--- a/presentation.pptx
+++ b/presentation.pptx
@@ -26,6 +26,13 @@
     <p:sldId id="274" r:id="rId20"/>
     <p:sldId id="275" r:id="rId21"/>
     <p:sldId id="276" r:id="rId22"/>
+    <p:sldId id="277" r:id="rId23"/>
+    <p:sldId id="278" r:id="rId24"/>
+    <p:sldId id="279" r:id="rId25"/>
+    <p:sldId id="280" r:id="rId26"/>
+    <p:sldId id="281" r:id="rId27"/>
+    <p:sldId id="282" r:id="rId28"/>
+    <p:sldId id="283" r:id="rId29"/>
   </p:sldIdLst>
   <p:sldSz cx="9144000" cy="5143500" type="screen16x9"/>
   <p:notesSz cx="6858000" cy="9144000"/>
@@ -3117,15 +3124,10 @@
             <a:spLocks noGrp="1"/>
           </p:cNvSpPr>
           <p:nvPr>
-            <p:ph type="ctrTitle"/>
-          </p:nvPr>
-        </p:nvSpPr>
-        <p:spPr>
-          <a:xfrm>
-            <a:off x="685800" y="1597819"/>
-            <a:ext cx="7772400" cy="1102519"/>
-          </a:xfrm>
-        </p:spPr>
+            <p:ph type="title"/>
+          </p:nvPr>
+        </p:nvSpPr>
+        <p:spPr/>
         <p:txBody>
           <a:bodyPr/>
           <a:lstStyle/>
@@ -3142,55 +3144,28 @@
       </p:sp>
       <p:sp>
         <p:nvSpPr>
-          <p:cNvPr id="3" name="Subtitle 2"/>
-          <p:cNvSpPr>
-            <a:spLocks noGrp="1"/>
-          </p:cNvSpPr>
-          <p:nvPr>
-            <p:ph idx="1" type="subTitle"/>
-          </p:nvPr>
-        </p:nvSpPr>
-        <p:spPr>
-          <a:xfrm>
-            <a:off x="1371600" y="2914650"/>
-            <a:ext cx="6400800" cy="1314450"/>
-          </a:xfrm>
-        </p:spPr>
+          <p:cNvPr id="3" name="Content Placeholder 2"/>
+          <p:cNvSpPr>
+            <a:spLocks noGrp="1"/>
+          </p:cNvSpPr>
+          <p:nvPr>
+            <p:ph idx="1"/>
+          </p:nvPr>
+        </p:nvSpPr>
+        <p:spPr/>
         <p:txBody>
           <a:bodyPr/>
           <a:lstStyle/>
           <a:p>
             <a:pPr lvl="0" indent="0" marL="0">
+              <a:spcBef>
+                <a:spcPts val="3000"/>
+              </a:spcBef>
               <a:buNone/>
             </a:pPr>
             <a:r>
-              <a:rPr/>
-              <a:t>Your Name</a:t>
-            </a:r>
-          </a:p>
-        </p:txBody>
-      </p:sp>
-      <p:sp>
-        <p:nvSpPr>
-          <p:cNvPr id="4" name="Date Placeholder 3"/>
-          <p:cNvSpPr>
-            <a:spLocks noGrp="1"/>
-          </p:cNvSpPr>
-          <p:nvPr>
-            <p:ph idx="10" sz="half" type="dt"/>
-          </p:nvPr>
-        </p:nvSpPr>
-        <p:spPr/>
-        <p:txBody>
-          <a:bodyPr/>
-          <a:lstStyle/>
-          <a:p>
-            <a:pPr lvl="0" indent="0" marL="0">
-              <a:buNone/>
-            </a:pPr>
-            <a:r>
-              <a:rPr/>
-              <a:t>March 2026</a:t>
+              <a:rPr b="1"/>
+              <a:t>Following the 5-Step Research Design Process</a:t>
             </a:r>
           </a:p>
         </p:txBody>
@@ -3242,7 +3217,7 @@
             </a:pPr>
             <a:r>
               <a:rPr/>
-              <a:t>Section B: Semantic Differential</a:t>
+              <a:t>Metric 7: Product Availability &amp; Variety</a:t>
             </a:r>
           </a:p>
         </p:txBody>
@@ -3263,14 +3238,11 @@
           <a:lstStyle/>
           <a:p>
             <a:pPr lvl="0" indent="0" marL="0">
-              <a:spcBef>
-                <a:spcPts val="3000"/>
-              </a:spcBef>
               <a:buNone/>
             </a:pPr>
             <a:r>
               <a:rPr b="1"/>
-              <a:t>Q3. How do you feel about a Campus Art Market?</a:t>
+              <a:t>Q13. Rate your agreement with the following statements:</a:t>
             </a:r>
           </a:p>
         </p:txBody>
@@ -3296,13 +3268,12 @@
                 <a:tableStyleId>{5C22544A-7EE6-4342-B048-85BDC9FD1C3A}</a:tableStyleId>
               </a:tblPr>
               <a:tblGrid>
-                <a:gridCol w="723900"/>
-                <a:gridCol w="723900"/>
-                <a:gridCol w="723900"/>
-                <a:gridCol w="723900"/>
-                <a:gridCol w="723900"/>
-                <a:gridCol w="723900"/>
-                <a:gridCol w="723900"/>
+                <a:gridCol w="774700"/>
+                <a:gridCol w="1346200"/>
+                <a:gridCol w="711200"/>
+                <a:gridCol w="635000"/>
+                <a:gridCol w="495300"/>
+                <a:gridCol w="1130300"/>
               </a:tblGrid>
               <a:tr h="0">
                 <a:tc>
@@ -3310,7 +3281,13 @@
                     <a:bodyPr/>
                     <a:lstStyle/>
                     <a:p>
-                      <a:endParaRPr/>
+                      <a:pPr lvl="0" indent="0" marL="0">
+                        <a:buNone/>
+                      </a:pPr>
+                      <a:r>
+                        <a:rPr/>
+                        <a:t>Statement</a:t>
+                      </a:r>
                     </a:p>
                   </a:txBody>
                   <a:tcPr/>
@@ -3325,7 +3302,7 @@
                       </a:pPr>
                       <a:r>
                         <a:rPr/>
-                        <a:t>1</a:t>
+                        <a:t>Strongly Disagree</a:t>
                       </a:r>
                     </a:p>
                   </a:txBody>
@@ -3341,7 +3318,7 @@
                       </a:pPr>
                       <a:r>
                         <a:rPr/>
-                        <a:t>2</a:t>
+                        <a:t>Disagree</a:t>
                       </a:r>
                     </a:p>
                   </a:txBody>
@@ -3357,7 +3334,7 @@
                       </a:pPr>
                       <a:r>
                         <a:rPr/>
-                        <a:t>3</a:t>
+                        <a:t>Neutral</a:t>
                       </a:r>
                     </a:p>
                   </a:txBody>
@@ -3373,7 +3350,7 @@
                       </a:pPr>
                       <a:r>
                         <a:rPr/>
-                        <a:t>4</a:t>
+                        <a:t>Agree</a:t>
                       </a:r>
                     </a:p>
                   </a:txBody>
@@ -3389,18 +3366,8 @@
                       </a:pPr>
                       <a:r>
                         <a:rPr/>
-                        <a:t>5</a:t>
-                      </a:r>
-                    </a:p>
-                  </a:txBody>
-                  <a:tcPr/>
-                </a:tc>
-                <a:tc>
-                  <a:txBody>
-                    <a:bodyPr/>
-                    <a:lstStyle/>
-                    <a:p>
-                      <a:endParaRPr/>
+                        <a:t>Strongly Agree</a:t>
+                      </a:r>
                     </a:p>
                   </a:txBody>
                   <a:tcPr/>
@@ -3417,97 +3384,82 @@
                       </a:pPr>
                       <a:r>
                         <a:rPr/>
-                        <a:t>Uninteresting</a:t>
-                      </a:r>
-                    </a:p>
-                  </a:txBody>
-                </a:tc>
-                <a:tc>
-                  <a:txBody>
-                    <a:bodyPr/>
-                    <a:lstStyle/>
-                    <a:p>
-                      <a:pPr lvl="0" indent="0" marL="0">
-                        <a:buNone/>
-                      </a:pPr>
-                      <a:r>
-                        <a:rPr/>
-                        <a:t>□</a:t>
-                      </a:r>
-                    </a:p>
-                  </a:txBody>
-                </a:tc>
-                <a:tc>
-                  <a:txBody>
-                    <a:bodyPr/>
-                    <a:lstStyle/>
-                    <a:p>
-                      <a:pPr lvl="0" indent="0" marL="0">
-                        <a:buNone/>
-                      </a:pPr>
-                      <a:r>
-                        <a:rPr/>
-                        <a:t>□</a:t>
-                      </a:r>
-                    </a:p>
-                  </a:txBody>
-                </a:tc>
-                <a:tc>
-                  <a:txBody>
-                    <a:bodyPr/>
-                    <a:lstStyle/>
-                    <a:p>
-                      <a:pPr lvl="0" indent="0" marL="0">
-                        <a:buNone/>
-                      </a:pPr>
-                      <a:r>
-                        <a:rPr/>
-                        <a:t>□</a:t>
-                      </a:r>
-                    </a:p>
-                  </a:txBody>
-                </a:tc>
-                <a:tc>
-                  <a:txBody>
-                    <a:bodyPr/>
-                    <a:lstStyle/>
-                    <a:p>
-                      <a:pPr lvl="0" indent="0" marL="0">
-                        <a:buNone/>
-                      </a:pPr>
-                      <a:r>
-                        <a:rPr/>
-                        <a:t>□</a:t>
-                      </a:r>
-                    </a:p>
-                  </a:txBody>
-                </a:tc>
-                <a:tc>
-                  <a:txBody>
-                    <a:bodyPr/>
-                    <a:lstStyle/>
-                    <a:p>
-                      <a:pPr lvl="0" indent="0" marL="0">
-                        <a:buNone/>
-                      </a:pPr>
-                      <a:r>
-                        <a:rPr/>
-                        <a:t>□</a:t>
-                      </a:r>
-                    </a:p>
-                  </a:txBody>
-                </a:tc>
-                <a:tc>
-                  <a:txBody>
-                    <a:bodyPr/>
-                    <a:lstStyle/>
-                    <a:p>
-                      <a:pPr lvl="0" indent="0" marL="0">
-                        <a:buNone/>
-                      </a:pPr>
-                      <a:r>
-                        <a:rPr/>
-                        <a:t>Interesting</a:t>
+                        <a:t>I want to see a wide variety of art styles</a:t>
+                      </a:r>
+                    </a:p>
+                  </a:txBody>
+                </a:tc>
+                <a:tc>
+                  <a:txBody>
+                    <a:bodyPr/>
+                    <a:lstStyle/>
+                    <a:p>
+                      <a:pPr lvl="0" indent="0" marL="0">
+                        <a:buNone/>
+                      </a:pPr>
+                      <a:r>
+                        <a:rPr/>
+                        <a:t>□</a:t>
+                      </a:r>
+                    </a:p>
+                  </a:txBody>
+                </a:tc>
+                <a:tc>
+                  <a:txBody>
+                    <a:bodyPr/>
+                    <a:lstStyle/>
+                    <a:p>
+                      <a:pPr lvl="0" indent="0" marL="0">
+                        <a:buNone/>
+                      </a:pPr>
+                      <a:r>
+                        <a:rPr/>
+                        <a:t>□</a:t>
+                      </a:r>
+                    </a:p>
+                  </a:txBody>
+                </a:tc>
+                <a:tc>
+                  <a:txBody>
+                    <a:bodyPr/>
+                    <a:lstStyle/>
+                    <a:p>
+                      <a:pPr lvl="0" indent="0" marL="0">
+                        <a:buNone/>
+                      </a:pPr>
+                      <a:r>
+                        <a:rPr/>
+                        <a:t>□</a:t>
+                      </a:r>
+                    </a:p>
+                  </a:txBody>
+                </a:tc>
+                <a:tc>
+                  <a:txBody>
+                    <a:bodyPr/>
+                    <a:lstStyle/>
+                    <a:p>
+                      <a:pPr lvl="0" indent="0" marL="0">
+                        <a:buNone/>
+                      </a:pPr>
+                      <a:r>
+                        <a:rPr/>
+                        <a:t>□</a:t>
+                      </a:r>
+                    </a:p>
+                  </a:txBody>
+                </a:tc>
+                <a:tc>
+                  <a:txBody>
+                    <a:bodyPr/>
+                    <a:lstStyle/>
+                    <a:p>
+                      <a:pPr lvl="0" indent="0" marL="0">
+                        <a:buNone/>
+                      </a:pPr>
+                      <a:r>
+                        <a:rPr/>
+                        <a:t>□</a:t>
                       </a:r>
                     </a:p>
                   </a:txBody>
@@ -3524,97 +3476,82 @@
                       </a:pPr>
                       <a:r>
                         <a:rPr/>
-                        <a:t>Inconvenient</a:t>
-                      </a:r>
-                    </a:p>
-                  </a:txBody>
-                </a:tc>
-                <a:tc>
-                  <a:txBody>
-                    <a:bodyPr/>
-                    <a:lstStyle/>
-                    <a:p>
-                      <a:pPr lvl="0" indent="0" marL="0">
-                        <a:buNone/>
-                      </a:pPr>
-                      <a:r>
-                        <a:rPr/>
-                        <a:t>□</a:t>
-                      </a:r>
-                    </a:p>
-                  </a:txBody>
-                </a:tc>
-                <a:tc>
-                  <a:txBody>
-                    <a:bodyPr/>
-                    <a:lstStyle/>
-                    <a:p>
-                      <a:pPr lvl="0" indent="0" marL="0">
-                        <a:buNone/>
-                      </a:pPr>
-                      <a:r>
-                        <a:rPr/>
-                        <a:t>□</a:t>
-                      </a:r>
-                    </a:p>
-                  </a:txBody>
-                </a:tc>
-                <a:tc>
-                  <a:txBody>
-                    <a:bodyPr/>
-                    <a:lstStyle/>
-                    <a:p>
-                      <a:pPr lvl="0" indent="0" marL="0">
-                        <a:buNone/>
-                      </a:pPr>
-                      <a:r>
-                        <a:rPr/>
-                        <a:t>□</a:t>
-                      </a:r>
-                    </a:p>
-                  </a:txBody>
-                </a:tc>
-                <a:tc>
-                  <a:txBody>
-                    <a:bodyPr/>
-                    <a:lstStyle/>
-                    <a:p>
-                      <a:pPr lvl="0" indent="0" marL="0">
-                        <a:buNone/>
-                      </a:pPr>
-                      <a:r>
-                        <a:rPr/>
-                        <a:t>□</a:t>
-                      </a:r>
-                    </a:p>
-                  </a:txBody>
-                </a:tc>
-                <a:tc>
-                  <a:txBody>
-                    <a:bodyPr/>
-                    <a:lstStyle/>
-                    <a:p>
-                      <a:pPr lvl="0" indent="0" marL="0">
-                        <a:buNone/>
-                      </a:pPr>
-                      <a:r>
-                        <a:rPr/>
-                        <a:t>□</a:t>
-                      </a:r>
-                    </a:p>
-                  </a:txBody>
-                </a:tc>
-                <a:tc>
-                  <a:txBody>
-                    <a:bodyPr/>
-                    <a:lstStyle/>
-                    <a:p>
-                      <a:pPr lvl="0" indent="0" marL="0">
-                        <a:buNone/>
-                      </a:pPr>
-                      <a:r>
-                        <a:rPr/>
-                        <a:t>Convenient</a:t>
+                        <a:t>I prefer unique, one-of-a-kind items</a:t>
+                      </a:r>
+                    </a:p>
+                  </a:txBody>
+                </a:tc>
+                <a:tc>
+                  <a:txBody>
+                    <a:bodyPr/>
+                    <a:lstStyle/>
+                    <a:p>
+                      <a:pPr lvl="0" indent="0" marL="0">
+                        <a:buNone/>
+                      </a:pPr>
+                      <a:r>
+                        <a:rPr/>
+                        <a:t>□</a:t>
+                      </a:r>
+                    </a:p>
+                  </a:txBody>
+                </a:tc>
+                <a:tc>
+                  <a:txBody>
+                    <a:bodyPr/>
+                    <a:lstStyle/>
+                    <a:p>
+                      <a:pPr lvl="0" indent="0" marL="0">
+                        <a:buNone/>
+                      </a:pPr>
+                      <a:r>
+                        <a:rPr/>
+                        <a:t>□</a:t>
+                      </a:r>
+                    </a:p>
+                  </a:txBody>
+                </a:tc>
+                <a:tc>
+                  <a:txBody>
+                    <a:bodyPr/>
+                    <a:lstStyle/>
+                    <a:p>
+                      <a:pPr lvl="0" indent="0" marL="0">
+                        <a:buNone/>
+                      </a:pPr>
+                      <a:r>
+                        <a:rPr/>
+                        <a:t>□</a:t>
+                      </a:r>
+                    </a:p>
+                  </a:txBody>
+                </a:tc>
+                <a:tc>
+                  <a:txBody>
+                    <a:bodyPr/>
+                    <a:lstStyle/>
+                    <a:p>
+                      <a:pPr lvl="0" indent="0" marL="0">
+                        <a:buNone/>
+                      </a:pPr>
+                      <a:r>
+                        <a:rPr/>
+                        <a:t>□</a:t>
+                      </a:r>
+                    </a:p>
+                  </a:txBody>
+                </a:tc>
+                <a:tc>
+                  <a:txBody>
+                    <a:bodyPr/>
+                    <a:lstStyle/>
+                    <a:p>
+                      <a:pPr lvl="0" indent="0" marL="0">
+                        <a:buNone/>
+                      </a:pPr>
+                      <a:r>
+                        <a:rPr/>
+                        <a:t>□</a:t>
                       </a:r>
                     </a:p>
                   </a:txBody>
@@ -3631,97 +3568,266 @@
                       </a:pPr>
                       <a:r>
                         <a:rPr/>
-                        <a:t>Waste of Time</a:t>
-                      </a:r>
-                    </a:p>
-                  </a:txBody>
-                </a:tc>
-                <a:tc>
-                  <a:txBody>
-                    <a:bodyPr/>
-                    <a:lstStyle/>
-                    <a:p>
-                      <a:pPr lvl="0" indent="0" marL="0">
-                        <a:buNone/>
-                      </a:pPr>
-                      <a:r>
-                        <a:rPr/>
-                        <a:t>□</a:t>
-                      </a:r>
-                    </a:p>
-                  </a:txBody>
-                </a:tc>
-                <a:tc>
-                  <a:txBody>
-                    <a:bodyPr/>
-                    <a:lstStyle/>
-                    <a:p>
-                      <a:pPr lvl="0" indent="0" marL="0">
-                        <a:buNone/>
-                      </a:pPr>
-                      <a:r>
-                        <a:rPr/>
-                        <a:t>□</a:t>
-                      </a:r>
-                    </a:p>
-                  </a:txBody>
-                </a:tc>
-                <a:tc>
-                  <a:txBody>
-                    <a:bodyPr/>
-                    <a:lstStyle/>
-                    <a:p>
-                      <a:pPr lvl="0" indent="0" marL="0">
-                        <a:buNone/>
-                      </a:pPr>
-                      <a:r>
-                        <a:rPr/>
-                        <a:t>□</a:t>
-                      </a:r>
-                    </a:p>
-                  </a:txBody>
-                </a:tc>
-                <a:tc>
-                  <a:txBody>
-                    <a:bodyPr/>
-                    <a:lstStyle/>
-                    <a:p>
-                      <a:pPr lvl="0" indent="0" marL="0">
-                        <a:buNone/>
-                      </a:pPr>
-                      <a:r>
-                        <a:rPr/>
-                        <a:t>□</a:t>
-                      </a:r>
-                    </a:p>
-                  </a:txBody>
-                </a:tc>
-                <a:tc>
-                  <a:txBody>
-                    <a:bodyPr/>
-                    <a:lstStyle/>
-                    <a:p>
-                      <a:pPr lvl="0" indent="0" marL="0">
-                        <a:buNone/>
-                      </a:pPr>
-                      <a:r>
-                        <a:rPr/>
-                        <a:t>□</a:t>
-                      </a:r>
-                    </a:p>
-                  </a:txBody>
-                </a:tc>
-                <a:tc>
-                  <a:txBody>
-                    <a:bodyPr/>
-                    <a:lstStyle/>
-                    <a:p>
-                      <a:pPr lvl="0" indent="0" marL="0">
-                        <a:buNone/>
-                      </a:pPr>
-                      <a:r>
-                        <a:rPr/>
-                        <a:t>Valuable</a:t>
+                        <a:t>I’m interested in affordable, small items</a:t>
+                      </a:r>
+                    </a:p>
+                  </a:txBody>
+                </a:tc>
+                <a:tc>
+                  <a:txBody>
+                    <a:bodyPr/>
+                    <a:lstStyle/>
+                    <a:p>
+                      <a:pPr lvl="0" indent="0" marL="0">
+                        <a:buNone/>
+                      </a:pPr>
+                      <a:r>
+                        <a:rPr/>
+                        <a:t>□</a:t>
+                      </a:r>
+                    </a:p>
+                  </a:txBody>
+                </a:tc>
+                <a:tc>
+                  <a:txBody>
+                    <a:bodyPr/>
+                    <a:lstStyle/>
+                    <a:p>
+                      <a:pPr lvl="0" indent="0" marL="0">
+                        <a:buNone/>
+                      </a:pPr>
+                      <a:r>
+                        <a:rPr/>
+                        <a:t>□</a:t>
+                      </a:r>
+                    </a:p>
+                  </a:txBody>
+                </a:tc>
+                <a:tc>
+                  <a:txBody>
+                    <a:bodyPr/>
+                    <a:lstStyle/>
+                    <a:p>
+                      <a:pPr lvl="0" indent="0" marL="0">
+                        <a:buNone/>
+                      </a:pPr>
+                      <a:r>
+                        <a:rPr/>
+                        <a:t>□</a:t>
+                      </a:r>
+                    </a:p>
+                  </a:txBody>
+                </a:tc>
+                <a:tc>
+                  <a:txBody>
+                    <a:bodyPr/>
+                    <a:lstStyle/>
+                    <a:p>
+                      <a:pPr lvl="0" indent="0" marL="0">
+                        <a:buNone/>
+                      </a:pPr>
+                      <a:r>
+                        <a:rPr/>
+                        <a:t>□</a:t>
+                      </a:r>
+                    </a:p>
+                  </a:txBody>
+                </a:tc>
+                <a:tc>
+                  <a:txBody>
+                    <a:bodyPr/>
+                    <a:lstStyle/>
+                    <a:p>
+                      <a:pPr lvl="0" indent="0" marL="0">
+                        <a:buNone/>
+                      </a:pPr>
+                      <a:r>
+                        <a:rPr/>
+                        <a:t>□</a:t>
+                      </a:r>
+                    </a:p>
+                  </a:txBody>
+                </a:tc>
+              </a:tr>
+              <a:tr h="0">
+                <a:tc>
+                  <a:txBody>
+                    <a:bodyPr/>
+                    <a:lstStyle/>
+                    <a:p>
+                      <a:pPr lvl="0" indent="0" marL="0">
+                        <a:buNone/>
+                      </a:pPr>
+                      <a:r>
+                        <a:rPr/>
+                        <a:t>I want to see different price ranges</a:t>
+                      </a:r>
+                    </a:p>
+                  </a:txBody>
+                </a:tc>
+                <a:tc>
+                  <a:txBody>
+                    <a:bodyPr/>
+                    <a:lstStyle/>
+                    <a:p>
+                      <a:pPr lvl="0" indent="0" marL="0">
+                        <a:buNone/>
+                      </a:pPr>
+                      <a:r>
+                        <a:rPr/>
+                        <a:t>□</a:t>
+                      </a:r>
+                    </a:p>
+                  </a:txBody>
+                </a:tc>
+                <a:tc>
+                  <a:txBody>
+                    <a:bodyPr/>
+                    <a:lstStyle/>
+                    <a:p>
+                      <a:pPr lvl="0" indent="0" marL="0">
+                        <a:buNone/>
+                      </a:pPr>
+                      <a:r>
+                        <a:rPr/>
+                        <a:t>□</a:t>
+                      </a:r>
+                    </a:p>
+                  </a:txBody>
+                </a:tc>
+                <a:tc>
+                  <a:txBody>
+                    <a:bodyPr/>
+                    <a:lstStyle/>
+                    <a:p>
+                      <a:pPr lvl="0" indent="0" marL="0">
+                        <a:buNone/>
+                      </a:pPr>
+                      <a:r>
+                        <a:rPr/>
+                        <a:t>□</a:t>
+                      </a:r>
+                    </a:p>
+                  </a:txBody>
+                </a:tc>
+                <a:tc>
+                  <a:txBody>
+                    <a:bodyPr/>
+                    <a:lstStyle/>
+                    <a:p>
+                      <a:pPr lvl="0" indent="0" marL="0">
+                        <a:buNone/>
+                      </a:pPr>
+                      <a:r>
+                        <a:rPr/>
+                        <a:t>□</a:t>
+                      </a:r>
+                    </a:p>
+                  </a:txBody>
+                </a:tc>
+                <a:tc>
+                  <a:txBody>
+                    <a:bodyPr/>
+                    <a:lstStyle/>
+                    <a:p>
+                      <a:pPr lvl="0" indent="0" marL="0">
+                        <a:buNone/>
+                      </a:pPr>
+                      <a:r>
+                        <a:rPr/>
+                        <a:t>□</a:t>
+                      </a:r>
+                    </a:p>
+                  </a:txBody>
+                </a:tc>
+              </a:tr>
+              <a:tr h="0">
+                <a:tc>
+                  <a:txBody>
+                    <a:bodyPr/>
+                    <a:lstStyle/>
+                    <a:p>
+                      <a:pPr lvl="0" indent="0" marL="0">
+                        <a:buNone/>
+                      </a:pPr>
+                      <a:r>
+                        <a:rPr/>
+                        <a:t>I’d like to see rotating artists each time</a:t>
+                      </a:r>
+                    </a:p>
+                  </a:txBody>
+                </a:tc>
+                <a:tc>
+                  <a:txBody>
+                    <a:bodyPr/>
+                    <a:lstStyle/>
+                    <a:p>
+                      <a:pPr lvl="0" indent="0" marL="0">
+                        <a:buNone/>
+                      </a:pPr>
+                      <a:r>
+                        <a:rPr/>
+                        <a:t>□</a:t>
+                      </a:r>
+                    </a:p>
+                  </a:txBody>
+                </a:tc>
+                <a:tc>
+                  <a:txBody>
+                    <a:bodyPr/>
+                    <a:lstStyle/>
+                    <a:p>
+                      <a:pPr lvl="0" indent="0" marL="0">
+                        <a:buNone/>
+                      </a:pPr>
+                      <a:r>
+                        <a:rPr/>
+                        <a:t>□</a:t>
+                      </a:r>
+                    </a:p>
+                  </a:txBody>
+                </a:tc>
+                <a:tc>
+                  <a:txBody>
+                    <a:bodyPr/>
+                    <a:lstStyle/>
+                    <a:p>
+                      <a:pPr lvl="0" indent="0" marL="0">
+                        <a:buNone/>
+                      </a:pPr>
+                      <a:r>
+                        <a:rPr/>
+                        <a:t>□</a:t>
+                      </a:r>
+                    </a:p>
+                  </a:txBody>
+                </a:tc>
+                <a:tc>
+                  <a:txBody>
+                    <a:bodyPr/>
+                    <a:lstStyle/>
+                    <a:p>
+                      <a:pPr lvl="0" indent="0" marL="0">
+                        <a:buNone/>
+                      </a:pPr>
+                      <a:r>
+                        <a:rPr/>
+                        <a:t>□</a:t>
+                      </a:r>
+                    </a:p>
+                  </a:txBody>
+                </a:tc>
+                <a:tc>
+                  <a:txBody>
+                    <a:bodyPr/>
+                    <a:lstStyle/>
+                    <a:p>
+                      <a:pPr lvl="0" indent="0" marL="0">
+                        <a:buNone/>
+                      </a:pPr>
+                      <a:r>
+                        <a:rPr/>
+                        <a:t>□</a:t>
                       </a:r>
                     </a:p>
                   </a:txBody>
@@ -3778,7 +3884,7 @@
             </a:pPr>
             <a:r>
               <a:rPr/>
-              <a:t>Section B: Stapel Scale</a:t>
+              <a:t>Metric 8: Pricing &amp; Promotions</a:t>
             </a:r>
           </a:p>
         </p:txBody>
@@ -3799,14 +3905,11 @@
           <a:lstStyle/>
           <a:p>
             <a:pPr lvl="0" indent="0" marL="0">
-              <a:spcBef>
-                <a:spcPts val="3000"/>
-              </a:spcBef>
               <a:buNone/>
             </a:pPr>
             <a:r>
               <a:rPr b="1"/>
-              <a:t>Q4. Rate feature appeal (-5 to +5)</a:t>
+              <a:t>Q14. How important are the following pricing factors?</a:t>
             </a:r>
           </a:p>
         </p:txBody>
@@ -3832,18 +3935,12 @@
                 <a:tableStyleId>{5C22544A-7EE6-4342-B048-85BDC9FD1C3A}</a:tableStyleId>
               </a:tblPr>
               <a:tblGrid>
-                <a:gridCol w="419100"/>
-                <a:gridCol w="419100"/>
-                <a:gridCol w="419100"/>
-                <a:gridCol w="419100"/>
-                <a:gridCol w="419100"/>
-                <a:gridCol w="419100"/>
-                <a:gridCol w="419100"/>
-                <a:gridCol w="419100"/>
-                <a:gridCol w="419100"/>
-                <a:gridCol w="419100"/>
-                <a:gridCol w="419100"/>
-                <a:gridCol w="419100"/>
+                <a:gridCol w="406400"/>
+                <a:gridCol w="749300"/>
+                <a:gridCol w="1003300"/>
+                <a:gridCol w="1104900"/>
+                <a:gridCol w="800100"/>
+                <a:gridCol w="1054100"/>
               </a:tblGrid>
               <a:tr h="0">
                 <a:tc>
@@ -3856,7 +3953,7 @@
                       </a:pPr>
                       <a:r>
                         <a:rPr/>
-                        <a:t>Feature</a:t>
+                        <a:t>Factor</a:t>
                       </a:r>
                     </a:p>
                   </a:txBody>
@@ -3872,7 +3969,7 @@
                       </a:pPr>
                       <a:r>
                         <a:rPr/>
-                        <a:t>-5</a:t>
+                        <a:t>Not Important</a:t>
                       </a:r>
                     </a:p>
                   </a:txBody>
@@ -3888,7 +3985,7 @@
                       </a:pPr>
                       <a:r>
                         <a:rPr/>
-                        <a:t>-4</a:t>
+                        <a:t>Slightly Important</a:t>
                       </a:r>
                     </a:p>
                   </a:txBody>
@@ -3904,7 +4001,7 @@
                       </a:pPr>
                       <a:r>
                         <a:rPr/>
-                        <a:t>-3</a:t>
+                        <a:t>Moderately Important</a:t>
                       </a:r>
                     </a:p>
                   </a:txBody>
@@ -3920,7 +4017,7 @@
                       </a:pPr>
                       <a:r>
                         <a:rPr/>
-                        <a:t>-2</a:t>
+                        <a:t>Very Important</a:t>
                       </a:r>
                     </a:p>
                   </a:txBody>
@@ -3936,103 +4033,7 @@
                       </a:pPr>
                       <a:r>
                         <a:rPr/>
-                        <a:t>-1</a:t>
-                      </a:r>
-                    </a:p>
-                  </a:txBody>
-                  <a:tcPr/>
-                </a:tc>
-                <a:tc>
-                  <a:txBody>
-                    <a:bodyPr/>
-                    <a:lstStyle/>
-                    <a:p>
-                      <a:pPr lvl="0" indent="0" marL="0">
-                        <a:buNone/>
-                      </a:pPr>
-                      <a:r>
-                        <a:rPr/>
-                        <a:t>0</a:t>
-                      </a:r>
-                    </a:p>
-                  </a:txBody>
-                  <a:tcPr/>
-                </a:tc>
-                <a:tc>
-                  <a:txBody>
-                    <a:bodyPr/>
-                    <a:lstStyle/>
-                    <a:p>
-                      <a:pPr lvl="0" indent="0" marL="0">
-                        <a:buNone/>
-                      </a:pPr>
-                      <a:r>
-                        <a:rPr/>
-                        <a:t>+1</a:t>
-                      </a:r>
-                    </a:p>
-                  </a:txBody>
-                  <a:tcPr/>
-                </a:tc>
-                <a:tc>
-                  <a:txBody>
-                    <a:bodyPr/>
-                    <a:lstStyle/>
-                    <a:p>
-                      <a:pPr lvl="0" indent="0" marL="0">
-                        <a:buNone/>
-                      </a:pPr>
-                      <a:r>
-                        <a:rPr/>
-                        <a:t>+2</a:t>
-                      </a:r>
-                    </a:p>
-                  </a:txBody>
-                  <a:tcPr/>
-                </a:tc>
-                <a:tc>
-                  <a:txBody>
-                    <a:bodyPr/>
-                    <a:lstStyle/>
-                    <a:p>
-                      <a:pPr lvl="0" indent="0" marL="0">
-                        <a:buNone/>
-                      </a:pPr>
-                      <a:r>
-                        <a:rPr/>
-                        <a:t>+3</a:t>
-                      </a:r>
-                    </a:p>
-                  </a:txBody>
-                  <a:tcPr/>
-                </a:tc>
-                <a:tc>
-                  <a:txBody>
-                    <a:bodyPr/>
-                    <a:lstStyle/>
-                    <a:p>
-                      <a:pPr lvl="0" indent="0" marL="0">
-                        <a:buNone/>
-                      </a:pPr>
-                      <a:r>
-                        <a:rPr/>
-                        <a:t>+4</a:t>
-                      </a:r>
-                    </a:p>
-                  </a:txBody>
-                  <a:tcPr/>
-                </a:tc>
-                <a:tc>
-                  <a:txBody>
-                    <a:bodyPr/>
-                    <a:lstStyle/>
-                    <a:p>
-                      <a:pPr lvl="0" indent="0" marL="0">
-                        <a:buNone/>
-                      </a:pPr>
-                      <a:r>
-                        <a:rPr/>
-                        <a:t>+5</a:t>
+                        <a:t>Extremely Important</a:t>
                       </a:r>
                     </a:p>
                   </a:txBody>
@@ -4050,97 +4051,7 @@
                       </a:pPr>
                       <a:r>
                         <a:rPr/>
-                        <a:t>Product Variety</a:t>
-                      </a:r>
-                    </a:p>
-                  </a:txBody>
-                </a:tc>
-                <a:tc>
-                  <a:txBody>
-                    <a:bodyPr/>
-                    <a:lstStyle/>
-                    <a:p>
-                      <a:pPr lvl="0" indent="0" marL="0">
-                        <a:buNone/>
-                      </a:pPr>
-                      <a:r>
-                        <a:rPr/>
-                        <a:t>□</a:t>
-                      </a:r>
-                    </a:p>
-                  </a:txBody>
-                </a:tc>
-                <a:tc>
-                  <a:txBody>
-                    <a:bodyPr/>
-                    <a:lstStyle/>
-                    <a:p>
-                      <a:pPr lvl="0" indent="0" marL="0">
-                        <a:buNone/>
-                      </a:pPr>
-                      <a:r>
-                        <a:rPr/>
-                        <a:t>□</a:t>
-                      </a:r>
-                    </a:p>
-                  </a:txBody>
-                </a:tc>
-                <a:tc>
-                  <a:txBody>
-                    <a:bodyPr/>
-                    <a:lstStyle/>
-                    <a:p>
-                      <a:pPr lvl="0" indent="0" marL="0">
-                        <a:buNone/>
-                      </a:pPr>
-                      <a:r>
-                        <a:rPr/>
-                        <a:t>□</a:t>
-                      </a:r>
-                    </a:p>
-                  </a:txBody>
-                </a:tc>
-                <a:tc>
-                  <a:txBody>
-                    <a:bodyPr/>
-                    <a:lstStyle/>
-                    <a:p>
-                      <a:pPr lvl="0" indent="0" marL="0">
-                        <a:buNone/>
-                      </a:pPr>
-                      <a:r>
-                        <a:rPr/>
-                        <a:t>□</a:t>
-                      </a:r>
-                    </a:p>
-                  </a:txBody>
-                </a:tc>
-                <a:tc>
-                  <a:txBody>
-                    <a:bodyPr/>
-                    <a:lstStyle/>
-                    <a:p>
-                      <a:pPr lvl="0" indent="0" marL="0">
-                        <a:buNone/>
-                      </a:pPr>
-                      <a:r>
-                        <a:rPr/>
-                        <a:t>□</a:t>
-                      </a:r>
-                    </a:p>
-                  </a:txBody>
-                </a:tc>
-                <a:tc>
-                  <a:txBody>
-                    <a:bodyPr/>
-                    <a:lstStyle/>
-                    <a:p>
-                      <a:pPr lvl="0" indent="0" marL="0">
-                        <a:buNone/>
-                      </a:pPr>
-                      <a:r>
-                        <a:rPr/>
-                        <a:t>□</a:t>
+                        <a:t>Affordable prices (under $25)</a:t>
                       </a:r>
                     </a:p>
                   </a:txBody>
@@ -4232,97 +4143,7 @@
                       </a:pPr>
                       <a:r>
                         <a:rPr/>
-                        <a:t>Affordable Prices</a:t>
-                      </a:r>
-                    </a:p>
-                  </a:txBody>
-                </a:tc>
-                <a:tc>
-                  <a:txBody>
-                    <a:bodyPr/>
-                    <a:lstStyle/>
-                    <a:p>
-                      <a:pPr lvl="0" indent="0" marL="0">
-                        <a:buNone/>
-                      </a:pPr>
-                      <a:r>
-                        <a:rPr/>
-                        <a:t>□</a:t>
-                      </a:r>
-                    </a:p>
-                  </a:txBody>
-                </a:tc>
-                <a:tc>
-                  <a:txBody>
-                    <a:bodyPr/>
-                    <a:lstStyle/>
-                    <a:p>
-                      <a:pPr lvl="0" indent="0" marL="0">
-                        <a:buNone/>
-                      </a:pPr>
-                      <a:r>
-                        <a:rPr/>
-                        <a:t>□</a:t>
-                      </a:r>
-                    </a:p>
-                  </a:txBody>
-                </a:tc>
-                <a:tc>
-                  <a:txBody>
-                    <a:bodyPr/>
-                    <a:lstStyle/>
-                    <a:p>
-                      <a:pPr lvl="0" indent="0" marL="0">
-                        <a:buNone/>
-                      </a:pPr>
-                      <a:r>
-                        <a:rPr/>
-                        <a:t>□</a:t>
-                      </a:r>
-                    </a:p>
-                  </a:txBody>
-                </a:tc>
-                <a:tc>
-                  <a:txBody>
-                    <a:bodyPr/>
-                    <a:lstStyle/>
-                    <a:p>
-                      <a:pPr lvl="0" indent="0" marL="0">
-                        <a:buNone/>
-                      </a:pPr>
-                      <a:r>
-                        <a:rPr/>
-                        <a:t>□</a:t>
-                      </a:r>
-                    </a:p>
-                  </a:txBody>
-                </a:tc>
-                <a:tc>
-                  <a:txBody>
-                    <a:bodyPr/>
-                    <a:lstStyle/>
-                    <a:p>
-                      <a:pPr lvl="0" indent="0" marL="0">
-                        <a:buNone/>
-                      </a:pPr>
-                      <a:r>
-                        <a:rPr/>
-                        <a:t>□</a:t>
-                      </a:r>
-                    </a:p>
-                  </a:txBody>
-                </a:tc>
-                <a:tc>
-                  <a:txBody>
-                    <a:bodyPr/>
-                    <a:lstStyle/>
-                    <a:p>
-                      <a:pPr lvl="0" indent="0" marL="0">
-                        <a:buNone/>
-                      </a:pPr>
-                      <a:r>
-                        <a:rPr/>
-                        <a:t>□</a:t>
+                        <a:t>Mid-range items ($25-$50)</a:t>
                       </a:r>
                     </a:p>
                   </a:txBody>
@@ -4414,97 +4235,283 @@
                       </a:pPr>
                       <a:r>
                         <a:rPr/>
-                        <a:t>Meet the Artists</a:t>
-                      </a:r>
-                    </a:p>
-                  </a:txBody>
-                </a:tc>
-                <a:tc>
-                  <a:txBody>
-                    <a:bodyPr/>
-                    <a:lstStyle/>
-                    <a:p>
-                      <a:pPr lvl="0" indent="0" marL="0">
-                        <a:buNone/>
-                      </a:pPr>
-                      <a:r>
-                        <a:rPr/>
-                        <a:t>□</a:t>
-                      </a:r>
-                    </a:p>
-                  </a:txBody>
-                </a:tc>
-                <a:tc>
-                  <a:txBody>
-                    <a:bodyPr/>
-                    <a:lstStyle/>
-                    <a:p>
-                      <a:pPr lvl="0" indent="0" marL="0">
-                        <a:buNone/>
-                      </a:pPr>
-                      <a:r>
-                        <a:rPr/>
-                        <a:t>□</a:t>
-                      </a:r>
-                    </a:p>
-                  </a:txBody>
-                </a:tc>
-                <a:tc>
-                  <a:txBody>
-                    <a:bodyPr/>
-                    <a:lstStyle/>
-                    <a:p>
-                      <a:pPr lvl="0" indent="0" marL="0">
-                        <a:buNone/>
-                      </a:pPr>
-                      <a:r>
-                        <a:rPr/>
-                        <a:t>□</a:t>
-                      </a:r>
-                    </a:p>
-                  </a:txBody>
-                </a:tc>
-                <a:tc>
-                  <a:txBody>
-                    <a:bodyPr/>
-                    <a:lstStyle/>
-                    <a:p>
-                      <a:pPr lvl="0" indent="0" marL="0">
-                        <a:buNone/>
-                      </a:pPr>
-                      <a:r>
-                        <a:rPr/>
-                        <a:t>□</a:t>
-                      </a:r>
-                    </a:p>
-                  </a:txBody>
-                </a:tc>
-                <a:tc>
-                  <a:txBody>
-                    <a:bodyPr/>
-                    <a:lstStyle/>
-                    <a:p>
-                      <a:pPr lvl="0" indent="0" marL="0">
-                        <a:buNone/>
-                      </a:pPr>
-                      <a:r>
-                        <a:rPr/>
-                        <a:t>□</a:t>
-                      </a:r>
-                    </a:p>
-                  </a:txBody>
-                </a:tc>
-                <a:tc>
-                  <a:txBody>
-                    <a:bodyPr/>
-                    <a:lstStyle/>
-                    <a:p>
-                      <a:pPr lvl="0" indent="0" marL="0">
-                        <a:buNone/>
-                      </a:pPr>
-                      <a:r>
-                        <a:rPr/>
-                        <a:t>□</a:t>
+                        <a:t>Premium items ($50+)</a:t>
+                      </a:r>
+                    </a:p>
+                  </a:txBody>
+                </a:tc>
+                <a:tc>
+                  <a:txBody>
+                    <a:bodyPr/>
+                    <a:lstStyle/>
+                    <a:p>
+                      <a:pPr lvl="0" indent="0" marL="0">
+                        <a:buNone/>
+                      </a:pPr>
+                      <a:r>
+                        <a:rPr/>
+                        <a:t>□</a:t>
+                      </a:r>
+                    </a:p>
+                  </a:txBody>
+                </a:tc>
+                <a:tc>
+                  <a:txBody>
+                    <a:bodyPr/>
+                    <a:lstStyle/>
+                    <a:p>
+                      <a:pPr lvl="0" indent="0" marL="0">
+                        <a:buNone/>
+                      </a:pPr>
+                      <a:r>
+                        <a:rPr/>
+                        <a:t>□</a:t>
+                      </a:r>
+                    </a:p>
+                  </a:txBody>
+                </a:tc>
+                <a:tc>
+                  <a:txBody>
+                    <a:bodyPr/>
+                    <a:lstStyle/>
+                    <a:p>
+                      <a:pPr lvl="0" indent="0" marL="0">
+                        <a:buNone/>
+                      </a:pPr>
+                      <a:r>
+                        <a:rPr/>
+                        <a:t>□</a:t>
+                      </a:r>
+                    </a:p>
+                  </a:txBody>
+                </a:tc>
+                <a:tc>
+                  <a:txBody>
+                    <a:bodyPr/>
+                    <a:lstStyle/>
+                    <a:p>
+                      <a:pPr lvl="0" indent="0" marL="0">
+                        <a:buNone/>
+                      </a:pPr>
+                      <a:r>
+                        <a:rPr/>
+                        <a:t>□</a:t>
+                      </a:r>
+                    </a:p>
+                  </a:txBody>
+                </a:tc>
+                <a:tc>
+                  <a:txBody>
+                    <a:bodyPr/>
+                    <a:lstStyle/>
+                    <a:p>
+                      <a:pPr lvl="0" indent="0" marL="0">
+                        <a:buNone/>
+                      </a:pPr>
+                      <a:r>
+                        <a:rPr/>
+                        <a:t>□</a:t>
+                      </a:r>
+                    </a:p>
+                  </a:txBody>
+                </a:tc>
+              </a:tr>
+              <a:tr h="0">
+                <a:tc>
+                  <a:txBody>
+                    <a:bodyPr/>
+                    <a:lstStyle/>
+                    <a:p>
+                      <a:pPr lvl="0" indent="0" marL="0">
+                        <a:buNone/>
+                      </a:pPr>
+                      <a:r>
+                        <a:rPr/>
+                        <a:t>Student discounts</a:t>
+                      </a:r>
+                    </a:p>
+                  </a:txBody>
+                </a:tc>
+                <a:tc>
+                  <a:txBody>
+                    <a:bodyPr/>
+                    <a:lstStyle/>
+                    <a:p>
+                      <a:pPr lvl="0" indent="0" marL="0">
+                        <a:buNone/>
+                      </a:pPr>
+                      <a:r>
+                        <a:rPr/>
+                        <a:t>□</a:t>
+                      </a:r>
+                    </a:p>
+                  </a:txBody>
+                </a:tc>
+                <a:tc>
+                  <a:txBody>
+                    <a:bodyPr/>
+                    <a:lstStyle/>
+                    <a:p>
+                      <a:pPr lvl="0" indent="0" marL="0">
+                        <a:buNone/>
+                      </a:pPr>
+                      <a:r>
+                        <a:rPr/>
+                        <a:t>□</a:t>
+                      </a:r>
+                    </a:p>
+                  </a:txBody>
+                </a:tc>
+                <a:tc>
+                  <a:txBody>
+                    <a:bodyPr/>
+                    <a:lstStyle/>
+                    <a:p>
+                      <a:pPr lvl="0" indent="0" marL="0">
+                        <a:buNone/>
+                      </a:pPr>
+                      <a:r>
+                        <a:rPr/>
+                        <a:t>□</a:t>
+                      </a:r>
+                    </a:p>
+                  </a:txBody>
+                </a:tc>
+                <a:tc>
+                  <a:txBody>
+                    <a:bodyPr/>
+                    <a:lstStyle/>
+                    <a:p>
+                      <a:pPr lvl="0" indent="0" marL="0">
+                        <a:buNone/>
+                      </a:pPr>
+                      <a:r>
+                        <a:rPr/>
+                        <a:t>□</a:t>
+                      </a:r>
+                    </a:p>
+                  </a:txBody>
+                </a:tc>
+                <a:tc>
+                  <a:txBody>
+                    <a:bodyPr/>
+                    <a:lstStyle/>
+                    <a:p>
+                      <a:pPr lvl="0" indent="0" marL="0">
+                        <a:buNone/>
+                      </a:pPr>
+                      <a:r>
+                        <a:rPr/>
+                        <a:t>□</a:t>
+                      </a:r>
+                    </a:p>
+                  </a:txBody>
+                </a:tc>
+              </a:tr>
+              <a:tr h="0">
+                <a:tc>
+                  <a:txBody>
+                    <a:bodyPr/>
+                    <a:lstStyle/>
+                    <a:p>
+                      <a:pPr lvl="0" indent="0" marL="0">
+                        <a:buNone/>
+                      </a:pPr>
+                      <a:r>
+                        <a:rPr/>
+                        <a:t>Bundle deals</a:t>
+                      </a:r>
+                    </a:p>
+                  </a:txBody>
+                </a:tc>
+                <a:tc>
+                  <a:txBody>
+                    <a:bodyPr/>
+                    <a:lstStyle/>
+                    <a:p>
+                      <a:pPr lvl="0" indent="0" marL="0">
+                        <a:buNone/>
+                      </a:pPr>
+                      <a:r>
+                        <a:rPr/>
+                        <a:t>□</a:t>
+                      </a:r>
+                    </a:p>
+                  </a:txBody>
+                </a:tc>
+                <a:tc>
+                  <a:txBody>
+                    <a:bodyPr/>
+                    <a:lstStyle/>
+                    <a:p>
+                      <a:pPr lvl="0" indent="0" marL="0">
+                        <a:buNone/>
+                      </a:pPr>
+                      <a:r>
+                        <a:rPr/>
+                        <a:t>□</a:t>
+                      </a:r>
+                    </a:p>
+                  </a:txBody>
+                </a:tc>
+                <a:tc>
+                  <a:txBody>
+                    <a:bodyPr/>
+                    <a:lstStyle/>
+                    <a:p>
+                      <a:pPr lvl="0" indent="0" marL="0">
+                        <a:buNone/>
+                      </a:pPr>
+                      <a:r>
+                        <a:rPr/>
+                        <a:t>□</a:t>
+                      </a:r>
+                    </a:p>
+                  </a:txBody>
+                </a:tc>
+                <a:tc>
+                  <a:txBody>
+                    <a:bodyPr/>
+                    <a:lstStyle/>
+                    <a:p>
+                      <a:pPr lvl="0" indent="0" marL="0">
+                        <a:buNone/>
+                      </a:pPr>
+                      <a:r>
+                        <a:rPr/>
+                        <a:t>□</a:t>
+                      </a:r>
+                    </a:p>
+                  </a:txBody>
+                </a:tc>
+                <a:tc>
+                  <a:txBody>
+                    <a:bodyPr/>
+                    <a:lstStyle/>
+                    <a:p>
+                      <a:pPr lvl="0" indent="0" marL="0">
+                        <a:buNone/>
+                      </a:pPr>
+                      <a:r>
+                        <a:rPr/>
+                        <a:t>□</a:t>
+                      </a:r>
+                    </a:p>
+                  </a:txBody>
+                </a:tc>
+              </a:tr>
+              <a:tr h="0">
+                <a:tc>
+                  <a:txBody>
+                    <a:bodyPr/>
+                    <a:lstStyle/>
+                    <a:p>
+                      <a:pPr lvl="0" indent="0" marL="0">
+                        <a:buNone/>
+                      </a:pPr>
+                      <a:r>
+                        <a:rPr/>
+                        <a:t>Loyalty program</a:t>
                       </a:r>
                     </a:p>
                   </a:txBody>
@@ -4621,12 +4628,7 @@
             <p:ph type="title"/>
           </p:nvPr>
         </p:nvSpPr>
-        <p:spPr>
-          <a:xfrm>
-            <a:off x="457201" y="204787"/>
-            <a:ext cx="3008313" cy="871538"/>
-          </a:xfrm>
-        </p:spPr>
+        <p:spPr/>
         <p:txBody>
           <a:bodyPr/>
           <a:lstStyle/>
@@ -4636,19 +4638,19 @@
             </a:pPr>
             <a:r>
               <a:rPr/>
-              <a:t>Section B: Paired Comparison</a:t>
-            </a:r>
-          </a:p>
-        </p:txBody>
-      </p:sp>
-      <p:sp>
-        <p:nvSpPr>
-          <p:cNvPr id="4" name="Text Placeholder 3"/>
-          <p:cNvSpPr>
-            <a:spLocks noGrp="1"/>
-          </p:cNvSpPr>
-          <p:nvPr>
-            <p:ph idx="2" sz="half" type="body"/>
+              <a:t>Metric 9: Payment Preferences</a:t>
+            </a:r>
+          </a:p>
+        </p:txBody>
+      </p:sp>
+      <p:sp>
+        <p:nvSpPr>
+          <p:cNvPr id="3" name="Content Placeholder 2"/>
+          <p:cNvSpPr>
+            <a:spLocks noGrp="1"/>
+          </p:cNvSpPr>
+          <p:nvPr>
+            <p:ph idx="1"/>
           </p:nvPr>
         </p:nvSpPr>
         <p:spPr/>
@@ -4657,238 +4659,32 @@
           <a:lstStyle/>
           <a:p>
             <a:pPr lvl="0" indent="0" marL="0">
-              <a:spcBef>
-                <a:spcPts val="3000"/>
-              </a:spcBef>
               <a:buNone/>
             </a:pPr>
             <a:r>
               <a:rPr b="1"/>
-              <a:t>Q5. Product Preferences</a:t>
-            </a:r>
-          </a:p>
-        </p:txBody>
-      </p:sp>
-      <p:graphicFrame>
-        <p:nvGraphicFramePr>
-          <p:cNvPr id="6" name="Content Placeholder 5"/>
-          <p:cNvGraphicFramePr>
-            <a:graphicFrameLocks noGrp="1"/>
-          </p:cNvGraphicFramePr>
-          <p:nvPr>
-            <p:ph idx="1"/>
-          </p:nvPr>
-        </p:nvGraphicFramePr>
-        <p:xfrm>
-          <a:off x="3568700" y="203200"/>
-          <a:ext cx="5105400" cy="4381500"/>
-        </p:xfrm>
-        <a:graphic>
-          <a:graphicData uri="http://schemas.openxmlformats.org/drawingml/2006/table">
-            <a:tbl>
-              <a:tblPr firstRow="1" bandRow="1">
-                <a:tableStyleId>{5C22544A-7EE6-4342-B048-85BDC9FD1C3A}</a:tableStyleId>
-              </a:tblPr>
-              <a:tblGrid>
-                <a:gridCol w="1270000"/>
-                <a:gridCol w="1270000"/>
-                <a:gridCol w="1270000"/>
-                <a:gridCol w="1270000"/>
-              </a:tblGrid>
-              <a:tr h="0">
-                <a:tc>
-                  <a:txBody>
-                    <a:bodyPr/>
-                    <a:lstStyle/>
-                    <a:p>
-                      <a:pPr lvl="0" indent="0" marL="0">
-                        <a:buNone/>
-                      </a:pPr>
-                      <a:r>
-                        <a:rPr/>
-                        <a:t>Pair</a:t>
-                      </a:r>
-                    </a:p>
-                  </a:txBody>
-                  <a:tcPr/>
-                </a:tc>
-                <a:tc>
-                  <a:txBody>
-                    <a:bodyPr/>
-                    <a:lstStyle/>
-                    <a:p>
-                      <a:pPr lvl="0" indent="0" marL="0">
-                        <a:buNone/>
-                      </a:pPr>
-                      <a:r>
-                        <a:rPr/>
-                        <a:t>Option A</a:t>
-                      </a:r>
-                    </a:p>
-                  </a:txBody>
-                  <a:tcPr/>
-                </a:tc>
-                <a:tc>
-                  <a:txBody>
-                    <a:bodyPr/>
-                    <a:lstStyle/>
-                    <a:p>
-                      <a:pPr lvl="0" indent="0" marL="0">
-                        <a:buNone/>
-                      </a:pPr>
-                      <a:r>
-                        <a:rPr/>
-                        <a:t>OR</a:t>
-                      </a:r>
-                    </a:p>
-                  </a:txBody>
-                  <a:tcPr/>
-                </a:tc>
-                <a:tc>
-                  <a:txBody>
-                    <a:bodyPr/>
-                    <a:lstStyle/>
-                    <a:p>
-                      <a:pPr lvl="0" indent="0" marL="0">
-                        <a:buNone/>
-                      </a:pPr>
-                      <a:r>
-                        <a:rPr/>
-                        <a:t>Option B</a:t>
-                      </a:r>
-                    </a:p>
-                  </a:txBody>
-                  <a:tcPr/>
-                </a:tc>
-              </a:tr>
-              <a:tr h="0">
-                <a:tc>
-                  <a:txBody>
-                    <a:bodyPr/>
-                    <a:lstStyle/>
-                    <a:p>
-                      <a:pPr lvl="0" indent="0" marL="0">
-                        <a:buNone/>
-                      </a:pPr>
-                      <a:r>
-                        <a:rPr/>
-                        <a:t>1</a:t>
-                      </a:r>
-                    </a:p>
-                  </a:txBody>
-                </a:tc>
-                <a:tc>
-                  <a:txBody>
-                    <a:bodyPr/>
-                    <a:lstStyle/>
-                    <a:p>
-                      <a:pPr lvl="0" indent="0" marL="0">
-                        <a:buNone/>
-                      </a:pPr>
-                      <a:r>
-                        <a:rPr/>
-                        <a:t>□ Paintings/Prints</a:t>
-                      </a:r>
-                    </a:p>
-                  </a:txBody>
-                </a:tc>
-                <a:tc>
-                  <a:txBody>
-                    <a:bodyPr/>
-                    <a:lstStyle/>
-                    <a:p>
-                      <a:pPr lvl="0" indent="0" marL="0">
-                        <a:buNone/>
-                      </a:pPr>
-                      <a:r>
-                        <a:rPr/>
-                        <a:t>OR</a:t>
-                      </a:r>
-                    </a:p>
-                  </a:txBody>
-                </a:tc>
-                <a:tc>
-                  <a:txBody>
-                    <a:bodyPr/>
-                    <a:lstStyle/>
-                    <a:p>
-                      <a:pPr lvl="0" indent="0" marL="0">
-                        <a:buNone/>
-                      </a:pPr>
-                      <a:r>
-                        <a:rPr/>
-                        <a:t>□ Jewelry</a:t>
-                      </a:r>
-                    </a:p>
-                  </a:txBody>
-                </a:tc>
-              </a:tr>
-              <a:tr h="0">
-                <a:tc>
-                  <a:txBody>
-                    <a:bodyPr/>
-                    <a:lstStyle/>
-                    <a:p>
-                      <a:pPr lvl="0" indent="0" marL="0">
-                        <a:buNone/>
-                      </a:pPr>
-                      <a:r>
-                        <a:rPr/>
-                        <a:t>2</a:t>
-                      </a:r>
-                    </a:p>
-                  </a:txBody>
-                </a:tc>
-                <a:tc>
-                  <a:txBody>
-                    <a:bodyPr/>
-                    <a:lstStyle/>
-                    <a:p>
-                      <a:pPr lvl="0" indent="0" marL="0">
-                        <a:buNone/>
-                      </a:pPr>
-                      <a:r>
-                        <a:rPr/>
-                        <a:t>□ Customizable</a:t>
-                      </a:r>
-                    </a:p>
-                  </a:txBody>
-                </a:tc>
-                <a:tc>
-                  <a:txBody>
-                    <a:bodyPr/>
-                    <a:lstStyle/>
-                    <a:p>
-                      <a:pPr lvl="0" indent="0" marL="0">
-                        <a:buNone/>
-                      </a:pPr>
-                      <a:r>
-                        <a:rPr/>
-                        <a:t>OR</a:t>
-                      </a:r>
-                    </a:p>
-                  </a:txBody>
-                </a:tc>
-                <a:tc>
-                  <a:txBody>
-                    <a:bodyPr/>
-                    <a:lstStyle/>
-                    <a:p>
-                      <a:pPr lvl="0" indent="0" marL="0">
-                        <a:buNone/>
-                      </a:pPr>
-                      <a:r>
-                        <a:rPr/>
-                        <a:t>□ Ready-made</a:t>
-                      </a:r>
-                    </a:p>
-                  </a:txBody>
-                </a:tc>
-              </a:tr>
-            </a:tbl>
-          </a:graphicData>
-        </a:graphic>
-      </p:graphicFrame>
+              <a:t>Q15. What payment methods would you prefer to use at the market?</a:t>
+            </a:r>
+            <a:r>
+              <a:rPr/>
+              <a:t> (Select all that apply) - [ ] Cash - [ ] Credit/Debit Card - [ ] Mobile Payments (Apple Pay, Google Pay) - [ ] Venmo/PayPal - [ ] Student ID/Campus Card - [ ] Cryptocurrency</a:t>
+            </a:r>
+          </a:p>
+          <a:p>
+            <a:pPr lvl="0" indent="0" marL="0">
+              <a:buNone/>
+            </a:pPr>
+            <a:r>
+              <a:rPr b="1"/>
+              <a:t>Q16. How important is it that vendors accept digital payments?</a:t>
+            </a:r>
+            <a:r>
+              <a:rPr/>
+              <a:t> - [ ] Not important - [ ] Somewhat important - [ ] Neutral - [ ] Important - [ ] Essential - I rarely carry cash</a:t>
+            </a:r>
+          </a:p>
+        </p:txBody>
+      </p:sp>
     </p:spTree>
   </p:cSld>
 </p:sld>
@@ -4921,12 +4717,7 @@
             <p:ph type="title"/>
           </p:nvPr>
         </p:nvSpPr>
-        <p:spPr>
-          <a:xfrm>
-            <a:off x="457201" y="204787"/>
-            <a:ext cx="3008313" cy="871538"/>
-          </a:xfrm>
-        </p:spPr>
+        <p:spPr/>
         <p:txBody>
           <a:bodyPr/>
           <a:lstStyle/>
@@ -4936,19 +4727,19 @@
             </a:pPr>
             <a:r>
               <a:rPr/>
-              <a:t>Section B: Constant Sum Scale</a:t>
-            </a:r>
-          </a:p>
-        </p:txBody>
-      </p:sp>
-      <p:sp>
-        <p:nvSpPr>
-          <p:cNvPr id="4" name="Text Placeholder 3"/>
-          <p:cNvSpPr>
-            <a:spLocks noGrp="1"/>
-          </p:cNvSpPr>
-          <p:nvPr>
-            <p:ph idx="2" sz="half" type="body"/>
+              <a:t>Metric 10: Vendor/Artist Perspective</a:t>
+            </a:r>
+          </a:p>
+        </p:txBody>
+      </p:sp>
+      <p:sp>
+        <p:nvSpPr>
+          <p:cNvPr id="3" name="Content Placeholder 2"/>
+          <p:cNvSpPr>
+            <a:spLocks noGrp="1"/>
+          </p:cNvSpPr>
+          <p:nvPr>
+            <p:ph idx="1"/>
           </p:nvPr>
         </p:nvSpPr>
         <p:spPr/>
@@ -4957,240 +4748,32 @@
           <a:lstStyle/>
           <a:p>
             <a:pPr lvl="0" indent="0" marL="0">
-              <a:spcBef>
-                <a:spcPts val="3000"/>
-              </a:spcBef>
               <a:buNone/>
             </a:pPr>
             <a:r>
               <a:rPr b="1"/>
-              <a:t>Q6. Distribute 100 points</a:t>
-            </a:r>
-          </a:p>
-        </p:txBody>
-      </p:sp>
-      <p:graphicFrame>
-        <p:nvGraphicFramePr>
-          <p:cNvPr id="6" name="Content Placeholder 5"/>
-          <p:cNvGraphicFramePr>
-            <a:graphicFrameLocks noGrp="1"/>
-          </p:cNvGraphicFramePr>
-          <p:nvPr>
-            <p:ph idx="1"/>
-          </p:nvPr>
-        </p:nvGraphicFramePr>
-        <p:xfrm>
-          <a:off x="3568700" y="203200"/>
-          <a:ext cx="5105400" cy="4381500"/>
-        </p:xfrm>
-        <a:graphic>
-          <a:graphicData uri="http://schemas.openxmlformats.org/drawingml/2006/table">
-            <a:tbl>
-              <a:tblPr firstRow="1" bandRow="1">
-                <a:tableStyleId>{5C22544A-7EE6-4342-B048-85BDC9FD1C3A}</a:tableStyleId>
-              </a:tblPr>
-              <a:tblGrid>
-                <a:gridCol w="2552700"/>
-                <a:gridCol w="2552700"/>
-              </a:tblGrid>
-              <a:tr h="0">
-                <a:tc>
-                  <a:txBody>
-                    <a:bodyPr/>
-                    <a:lstStyle/>
-                    <a:p>
-                      <a:pPr lvl="0" indent="0" marL="0">
-                        <a:buNone/>
-                      </a:pPr>
-                      <a:r>
-                        <a:rPr/>
-                        <a:t>Category</a:t>
-                      </a:r>
-                    </a:p>
-                  </a:txBody>
-                  <a:tcPr/>
-                </a:tc>
-                <a:tc>
-                  <a:txBody>
-                    <a:bodyPr/>
-                    <a:lstStyle/>
-                    <a:p>
-                      <a:pPr lvl="0" indent="0" marL="0">
-                        <a:buNone/>
-                      </a:pPr>
-                      <a:r>
-                        <a:rPr/>
-                        <a:t>Points</a:t>
-                      </a:r>
-                    </a:p>
-                  </a:txBody>
-                  <a:tcPr/>
-                </a:tc>
-              </a:tr>
-              <a:tr h="0">
-                <a:tc>
-                  <a:txBody>
-                    <a:bodyPr/>
-                    <a:lstStyle/>
-                    <a:p>
-                      <a:pPr lvl="0" indent="0" marL="0">
-                        <a:buNone/>
-                      </a:pPr>
-                      <a:r>
-                        <a:rPr/>
-                        <a:t>Paintings/Prints</a:t>
-                      </a:r>
-                    </a:p>
-                  </a:txBody>
-                </a:tc>
-                <a:tc>
-                  <a:txBody>
-                    <a:bodyPr/>
-                    <a:lstStyle/>
-                    <a:p>
-                      <a:pPr lvl="0" indent="0" marL="0">
-                        <a:buNone/>
-                      </a:pPr>
-                      <a:r>
-                        <a:rPr/>
-                        <a:t>______</a:t>
-                      </a:r>
-                    </a:p>
-                  </a:txBody>
-                </a:tc>
-              </a:tr>
-              <a:tr h="0">
-                <a:tc>
-                  <a:txBody>
-                    <a:bodyPr/>
-                    <a:lstStyle/>
-                    <a:p>
-                      <a:pPr lvl="0" indent="0" marL="0">
-                        <a:buNone/>
-                      </a:pPr>
-                      <a:r>
-                        <a:rPr/>
-                        <a:t>Jewelry/Accessories</a:t>
-                      </a:r>
-                    </a:p>
-                  </a:txBody>
-                </a:tc>
-                <a:tc>
-                  <a:txBody>
-                    <a:bodyPr/>
-                    <a:lstStyle/>
-                    <a:p>
-                      <a:pPr lvl="0" indent="0" marL="0">
-                        <a:buNone/>
-                      </a:pPr>
-                      <a:r>
-                        <a:rPr/>
-                        <a:t>______</a:t>
-                      </a:r>
-                    </a:p>
-                  </a:txBody>
-                </a:tc>
-              </a:tr>
-              <a:tr h="0">
-                <a:tc>
-                  <a:txBody>
-                    <a:bodyPr/>
-                    <a:lstStyle/>
-                    <a:p>
-                      <a:pPr lvl="0" indent="0" marL="0">
-                        <a:buNone/>
-                      </a:pPr>
-                      <a:r>
-                        <a:rPr/>
-                        <a:t>Crafts/Pottery</a:t>
-                      </a:r>
-                    </a:p>
-                  </a:txBody>
-                </a:tc>
-                <a:tc>
-                  <a:txBody>
-                    <a:bodyPr/>
-                    <a:lstStyle/>
-                    <a:p>
-                      <a:pPr lvl="0" indent="0" marL="0">
-                        <a:buNone/>
-                      </a:pPr>
-                      <a:r>
-                        <a:rPr/>
-                        <a:t>______</a:t>
-                      </a:r>
-                    </a:p>
-                  </a:txBody>
-                </a:tc>
-              </a:tr>
-              <a:tr h="0">
-                <a:tc>
-                  <a:txBody>
-                    <a:bodyPr/>
-                    <a:lstStyle/>
-                    <a:p>
-                      <a:pPr lvl="0" indent="0" marL="0">
-                        <a:buNone/>
-                      </a:pPr>
-                      <a:r>
-                        <a:rPr/>
-                        <a:t>Stationery/Stickers</a:t>
-                      </a:r>
-                    </a:p>
-                  </a:txBody>
-                </a:tc>
-                <a:tc>
-                  <a:txBody>
-                    <a:bodyPr/>
-                    <a:lstStyle/>
-                    <a:p>
-                      <a:pPr lvl="0" indent="0" marL="0">
-                        <a:buNone/>
-                      </a:pPr>
-                      <a:r>
-                        <a:rPr/>
-                        <a:t>______</a:t>
-                      </a:r>
-                    </a:p>
-                  </a:txBody>
-                </a:tc>
-              </a:tr>
-              <a:tr h="0">
-                <a:tc>
-                  <a:txBody>
-                    <a:bodyPr/>
-                    <a:lstStyle/>
-                    <a:p>
-                      <a:pPr lvl="0" indent="0" marL="0">
-                        <a:buNone/>
-                      </a:pPr>
-                      <a:r>
-                        <a:rPr b="1"/>
-                        <a:t>TOTAL</a:t>
-                      </a:r>
-                    </a:p>
-                  </a:txBody>
-                </a:tc>
-                <a:tc>
-                  <a:txBody>
-                    <a:bodyPr/>
-                    <a:lstStyle/>
-                    <a:p>
-                      <a:pPr lvl="0" indent="0" marL="0">
-                        <a:buNone/>
-                      </a:pPr>
-                      <a:r>
-                        <a:rPr b="1"/>
-                        <a:t>100</a:t>
-                      </a:r>
-                    </a:p>
-                  </a:txBody>
-                </a:tc>
-              </a:tr>
-            </a:tbl>
-          </a:graphicData>
-        </a:graphic>
-      </p:graphicFrame>
+              <a:t>Q17. Are you a student artist/crafter who would be interested in selling at a Campus Art Market?</a:t>
+            </a:r>
+            <a:r>
+              <a:rPr/>
+              <a:t> - [ ] Yes, definitely interested - [ ] Maybe, depending on details - [ ] Not interested - [ ] I am not an artist</a:t>
+            </a:r>
+          </a:p>
+          <a:p>
+            <a:pPr lvl="0" indent="0" marL="0">
+              <a:buNone/>
+            </a:pPr>
+            <a:r>
+              <a:rPr b="1"/>
+              <a:t>Q18. If you were to sell at the market, what type of art would you offer?</a:t>
+            </a:r>
+            <a:r>
+              <a:rPr/>
+              <a:t> (Select all that apply) - [ ] 2D Art (Paintings, Drawings, Prints) - [ ] 3D Art (Pottery, Sculptures) - [ ] Photography - [ ] Jewelry/Accessories - [ ] Textiles/Fashion - [ ] Digital Art - [ ] Custom/Personalized Items - [ ] Other: _____________</a:t>
+            </a:r>
+          </a:p>
+        </p:txBody>
+      </p:sp>
     </p:spTree>
   </p:cSld>
 </p:sld>
@@ -5223,7 +4806,12 @@
             <p:ph type="title"/>
           </p:nvPr>
         </p:nvSpPr>
-        <p:spPr/>
+        <p:spPr>
+          <a:xfrm>
+            <a:off x="457201" y="204787"/>
+            <a:ext cx="3008313" cy="871538"/>
+          </a:xfrm>
+        </p:spPr>
         <p:txBody>
           <a:bodyPr/>
           <a:lstStyle/>
@@ -5233,19 +4821,19 @@
             </a:pPr>
             <a:r>
               <a:rPr/>
-              <a:t>Section C: Rank-Order Scale</a:t>
-            </a:r>
-          </a:p>
-        </p:txBody>
-      </p:sp>
-      <p:sp>
-        <p:nvSpPr>
-          <p:cNvPr id="3" name="Content Placeholder 2"/>
-          <p:cNvSpPr>
-            <a:spLocks noGrp="1"/>
-          </p:cNvSpPr>
-          <p:nvPr>
-            <p:ph idx="1"/>
+              <a:t>Metric 10: Vendor/Artist Perspective (Continued)</a:t>
+            </a:r>
+          </a:p>
+        </p:txBody>
+      </p:sp>
+      <p:sp>
+        <p:nvSpPr>
+          <p:cNvPr id="4" name="Text Placeholder 3"/>
+          <p:cNvSpPr>
+            <a:spLocks noGrp="1"/>
+          </p:cNvSpPr>
+          <p:nvPr>
+            <p:ph idx="2" sz="half" type="body"/>
           </p:nvPr>
         </p:nvSpPr>
         <p:spPr/>
@@ -5254,53 +4842,295 @@
           <a:lstStyle/>
           <a:p>
             <a:pPr lvl="0" indent="0" marL="0">
-              <a:spcBef>
-                <a:spcPts val="3000"/>
-              </a:spcBef>
               <a:buNone/>
             </a:pPr>
             <a:r>
               <a:rPr b="1"/>
-              <a:t>Q7. Rank factors (1=Most Important, 5=Least)</a:t>
-            </a:r>
-          </a:p>
-          <a:p>
-            <a:pPr lvl="0"/>
+              <a:t>Q19. What would be your main motivation for selling at a Campus Art Market?</a:t>
+            </a:r>
             <a:r>
               <a:rPr/>
-              <a:t>___ Product Variety &amp; Uniqueness</a:t>
-            </a:r>
-          </a:p>
-          <a:p>
-            <a:pPr lvl="0"/>
+              <a:t> (Rank 1-4) - ___ Earn money - ___ Gain exposure/build portfolio - ___ Connect with other artists - ___ Test market for products</a:t>
+            </a:r>
+          </a:p>
+          <a:p>
+            <a:pPr lvl="0" indent="0" marL="0">
+              <a:buNone/>
+            </a:pPr>
+            <a:r>
+              <a:rPr b="1"/>
+              <a:t>Q20. As a potential vendor, what support would you need?</a:t>
+            </a:r>
             <a:r>
               <a:rPr/>
-              <a:t>___ Affordable Prices</a:t>
-            </a:r>
-          </a:p>
-          <a:p>
-            <a:pPr lvl="0"/>
-            <a:r>
-              <a:rPr/>
-              <a:t>___ Convenient Location</a:t>
-            </a:r>
-          </a:p>
-          <a:p>
-            <a:pPr lvl="0"/>
-            <a:r>
-              <a:rPr/>
-              <a:t>___ Fun Atmosphere</a:t>
-            </a:r>
-          </a:p>
-          <a:p>
-            <a:pPr lvl="0"/>
-            <a:r>
-              <a:rPr/>
-              <a:t>___ Timing</a:t>
-            </a:r>
-          </a:p>
-        </p:txBody>
-      </p:sp>
+              <a:t> (Select all that apply) - [ ] Affordable booth fees - [ ] Tables/chairs provided - [ ] Marketing/promotion - [ ] Payment processing assistance - [ ] Workshops on selling - [ ] Storage for inventory - [ ] Other: _____________</a:t>
+            </a:r>
+          </a:p>
+          <a:p>
+            <a:pPr lvl="0" indent="0" marL="0">
+              <a:buNone/>
+            </a:pPr>
+            <a:r>
+              <a:rPr b="1"/>
+              <a:t>Q21. As a vendor, distribute 50 points across your priorities:</a:t>
+            </a:r>
+          </a:p>
+        </p:txBody>
+      </p:sp>
+      <p:graphicFrame>
+        <p:nvGraphicFramePr>
+          <p:cNvPr id="6" name="Content Placeholder 5"/>
+          <p:cNvGraphicFramePr>
+            <a:graphicFrameLocks noGrp="1"/>
+          </p:cNvGraphicFramePr>
+          <p:nvPr>
+            <p:ph idx="1"/>
+          </p:nvPr>
+        </p:nvGraphicFramePr>
+        <p:xfrm>
+          <a:off x="3568700" y="203200"/>
+          <a:ext cx="5105400" cy="4381500"/>
+        </p:xfrm>
+        <a:graphic>
+          <a:graphicData uri="http://schemas.openxmlformats.org/drawingml/2006/table">
+            <a:tbl>
+              <a:tblPr firstRow="1" bandRow="1">
+                <a:tableStyleId>{5C22544A-7EE6-4342-B048-85BDC9FD1C3A}</a:tableStyleId>
+              </a:tblPr>
+              <a:tblGrid>
+                <a:gridCol w="2552700"/>
+                <a:gridCol w="2552700"/>
+              </a:tblGrid>
+              <a:tr h="0">
+                <a:tc>
+                  <a:txBody>
+                    <a:bodyPr/>
+                    <a:lstStyle/>
+                    <a:p>
+                      <a:pPr lvl="0" indent="0" marL="0">
+                        <a:buNone/>
+                      </a:pPr>
+                      <a:r>
+                        <a:rPr/>
+                        <a:t>Priority</a:t>
+                      </a:r>
+                    </a:p>
+                  </a:txBody>
+                  <a:tcPr/>
+                </a:tc>
+                <a:tc>
+                  <a:txBody>
+                    <a:bodyPr/>
+                    <a:lstStyle/>
+                    <a:p>
+                      <a:pPr lvl="0" indent="0" marL="0">
+                        <a:buNone/>
+                      </a:pPr>
+                      <a:r>
+                        <a:rPr/>
+                        <a:t>Points</a:t>
+                      </a:r>
+                    </a:p>
+                  </a:txBody>
+                  <a:tcPr/>
+                </a:tc>
+              </a:tr>
+              <a:tr h="0">
+                <a:tc>
+                  <a:txBody>
+                    <a:bodyPr/>
+                    <a:lstStyle/>
+                    <a:p>
+                      <a:pPr lvl="0" indent="0" marL="0">
+                        <a:buNone/>
+                      </a:pPr>
+                      <a:r>
+                        <a:rPr/>
+                        <a:t>Selling price/Profit margin</a:t>
+                      </a:r>
+                    </a:p>
+                  </a:txBody>
+                </a:tc>
+                <a:tc>
+                  <a:txBody>
+                    <a:bodyPr/>
+                    <a:lstStyle/>
+                    <a:p>
+                      <a:pPr lvl="0" indent="0" marL="0">
+                        <a:buNone/>
+                      </a:pPr>
+                      <a:r>
+                        <a:rPr/>
+                        <a:t>_____</a:t>
+                      </a:r>
+                    </a:p>
+                  </a:txBody>
+                </a:tc>
+              </a:tr>
+              <a:tr h="0">
+                <a:tc>
+                  <a:txBody>
+                    <a:bodyPr/>
+                    <a:lstStyle/>
+                    <a:p>
+                      <a:pPr lvl="0" indent="0" marL="0">
+                        <a:buNone/>
+                      </a:pPr>
+                      <a:r>
+                        <a:rPr/>
+                        <a:t>Number of customers</a:t>
+                      </a:r>
+                    </a:p>
+                  </a:txBody>
+                </a:tc>
+                <a:tc>
+                  <a:txBody>
+                    <a:bodyPr/>
+                    <a:lstStyle/>
+                    <a:p>
+                      <a:pPr lvl="0" indent="0" marL="0">
+                        <a:buNone/>
+                      </a:pPr>
+                      <a:r>
+                        <a:rPr/>
+                        <a:t>_____</a:t>
+                      </a:r>
+                    </a:p>
+                  </a:txBody>
+                </a:tc>
+              </a:tr>
+              <a:tr h="0">
+                <a:tc>
+                  <a:txBody>
+                    <a:bodyPr/>
+                    <a:lstStyle/>
+                    <a:p>
+                      <a:pPr lvl="0" indent="0" marL="0">
+                        <a:buNone/>
+                      </a:pPr>
+                      <a:r>
+                        <a:rPr/>
+                        <a:t>Building repeat customers</a:t>
+                      </a:r>
+                    </a:p>
+                  </a:txBody>
+                </a:tc>
+                <a:tc>
+                  <a:txBody>
+                    <a:bodyPr/>
+                    <a:lstStyle/>
+                    <a:p>
+                      <a:pPr lvl="0" indent="0" marL="0">
+                        <a:buNone/>
+                      </a:pPr>
+                      <a:r>
+                        <a:rPr/>
+                        <a:t>_____</a:t>
+                      </a:r>
+                    </a:p>
+                  </a:txBody>
+                </a:tc>
+              </a:tr>
+              <a:tr h="0">
+                <a:tc>
+                  <a:txBody>
+                    <a:bodyPr/>
+                    <a:lstStyle/>
+                    <a:p>
+                      <a:pPr lvl="0" indent="0" marL="0">
+                        <a:buNone/>
+                      </a:pPr>
+                      <a:r>
+                        <a:rPr/>
+                        <a:t>Networking with other artists</a:t>
+                      </a:r>
+                    </a:p>
+                  </a:txBody>
+                </a:tc>
+                <a:tc>
+                  <a:txBody>
+                    <a:bodyPr/>
+                    <a:lstStyle/>
+                    <a:p>
+                      <a:pPr lvl="0" indent="0" marL="0">
+                        <a:buNone/>
+                      </a:pPr>
+                      <a:r>
+                        <a:rPr/>
+                        <a:t>_____</a:t>
+                      </a:r>
+                    </a:p>
+                  </a:txBody>
+                </a:tc>
+              </a:tr>
+              <a:tr h="0">
+                <a:tc>
+                  <a:txBody>
+                    <a:bodyPr/>
+                    <a:lstStyle/>
+                    <a:p>
+                      <a:pPr lvl="0" indent="0" marL="0">
+                        <a:buNone/>
+                      </a:pPr>
+                      <a:r>
+                        <a:rPr/>
+                        <a:t>Learning about the market</a:t>
+                      </a:r>
+                    </a:p>
+                  </a:txBody>
+                </a:tc>
+                <a:tc>
+                  <a:txBody>
+                    <a:bodyPr/>
+                    <a:lstStyle/>
+                    <a:p>
+                      <a:pPr lvl="0" indent="0" marL="0">
+                        <a:buNone/>
+                      </a:pPr>
+                      <a:r>
+                        <a:rPr/>
+                        <a:t>_____</a:t>
+                      </a:r>
+                    </a:p>
+                  </a:txBody>
+                </a:tc>
+              </a:tr>
+              <a:tr h="0">
+                <a:tc>
+                  <a:txBody>
+                    <a:bodyPr/>
+                    <a:lstStyle/>
+                    <a:p>
+                      <a:pPr lvl="0" indent="0" marL="0">
+                        <a:buNone/>
+                      </a:pPr>
+                      <a:r>
+                        <a:rPr b="1"/>
+                        <a:t>TOTAL</a:t>
+                      </a:r>
+                    </a:p>
+                  </a:txBody>
+                </a:tc>
+                <a:tc>
+                  <a:txBody>
+                    <a:bodyPr/>
+                    <a:lstStyle/>
+                    <a:p>
+                      <a:pPr lvl="0" indent="0" marL="0">
+                        <a:buNone/>
+                      </a:pPr>
+                      <a:r>
+                        <a:rPr b="1"/>
+                        <a:t>50</a:t>
+                      </a:r>
+                    </a:p>
+                  </a:txBody>
+                </a:tc>
+              </a:tr>
+            </a:tbl>
+          </a:graphicData>
+        </a:graphic>
+      </p:graphicFrame>
     </p:spTree>
   </p:cSld>
 </p:sld>
@@ -5333,12 +5163,7 @@
             <p:ph type="title"/>
           </p:nvPr>
         </p:nvSpPr>
-        <p:spPr>
-          <a:xfrm>
-            <a:off x="457201" y="204787"/>
-            <a:ext cx="3008313" cy="871538"/>
-          </a:xfrm>
-        </p:spPr>
+        <p:spPr/>
         <p:txBody>
           <a:bodyPr/>
           <a:lstStyle/>
@@ -5348,19 +5173,19 @@
             </a:pPr>
             <a:r>
               <a:rPr/>
-              <a:t>Section C: Likert Scale</a:t>
-            </a:r>
-          </a:p>
-        </p:txBody>
-      </p:sp>
-      <p:sp>
-        <p:nvSpPr>
-          <p:cNvPr id="4" name="Text Placeholder 3"/>
-          <p:cNvSpPr>
-            <a:spLocks noGrp="1"/>
-          </p:cNvSpPr>
-          <p:nvPr>
-            <p:ph idx="2" sz="half" type="body"/>
+              <a:t>Metric 11: Communication &amp; Awareness</a:t>
+            </a:r>
+          </a:p>
+        </p:txBody>
+      </p:sp>
+      <p:sp>
+        <p:nvSpPr>
+          <p:cNvPr id="3" name="Content Placeholder 2"/>
+          <p:cNvSpPr>
+            <a:spLocks noGrp="1"/>
+          </p:cNvSpPr>
+          <p:nvPr>
+            <p:ph idx="1"/>
           </p:nvPr>
         </p:nvSpPr>
         <p:spPr/>
@@ -5369,424 +5194,32 @@
           <a:lstStyle/>
           <a:p>
             <a:pPr lvl="0" indent="0" marL="0">
-              <a:spcBef>
-                <a:spcPts val="3000"/>
-              </a:spcBef>
               <a:buNone/>
             </a:pPr>
             <a:r>
               <a:rPr b="1"/>
-              <a:t>Q8. Agreement Level</a:t>
-            </a:r>
-          </a:p>
-        </p:txBody>
-      </p:sp>
-      <p:graphicFrame>
-        <p:nvGraphicFramePr>
-          <p:cNvPr id="6" name="Content Placeholder 5"/>
-          <p:cNvGraphicFramePr>
-            <a:graphicFrameLocks noGrp="1"/>
-          </p:cNvGraphicFramePr>
-          <p:nvPr>
-            <p:ph idx="1"/>
-          </p:nvPr>
-        </p:nvGraphicFramePr>
-        <p:xfrm>
-          <a:off x="3568700" y="203200"/>
-          <a:ext cx="5105400" cy="4381500"/>
-        </p:xfrm>
-        <a:graphic>
-          <a:graphicData uri="http://schemas.openxmlformats.org/drawingml/2006/table">
-            <a:tbl>
-              <a:tblPr firstRow="1" bandRow="1">
-                <a:tableStyleId>{5C22544A-7EE6-4342-B048-85BDC9FD1C3A}</a:tableStyleId>
-              </a:tblPr>
-              <a:tblGrid>
-                <a:gridCol w="850900"/>
-                <a:gridCol w="850900"/>
-                <a:gridCol w="850900"/>
-                <a:gridCol w="850900"/>
-                <a:gridCol w="850900"/>
-                <a:gridCol w="850900"/>
-              </a:tblGrid>
-              <a:tr h="0">
-                <a:tc>
-                  <a:txBody>
-                    <a:bodyPr/>
-                    <a:lstStyle/>
-                    <a:p>
-                      <a:pPr lvl="0" indent="0" marL="0">
-                        <a:buNone/>
-                      </a:pPr>
-                      <a:r>
-                        <a:rPr/>
-                        <a:t>Statement</a:t>
-                      </a:r>
-                    </a:p>
-                  </a:txBody>
-                  <a:tcPr/>
-                </a:tc>
-                <a:tc>
-                  <a:txBody>
-                    <a:bodyPr/>
-                    <a:lstStyle/>
-                    <a:p>
-                      <a:pPr lvl="0" indent="0" marL="0">
-                        <a:buNone/>
-                      </a:pPr>
-                      <a:r>
-                        <a:rPr/>
-                        <a:t>SD</a:t>
-                      </a:r>
-                    </a:p>
-                  </a:txBody>
-                  <a:tcPr/>
-                </a:tc>
-                <a:tc>
-                  <a:txBody>
-                    <a:bodyPr/>
-                    <a:lstStyle/>
-                    <a:p>
-                      <a:pPr lvl="0" indent="0" marL="0">
-                        <a:buNone/>
-                      </a:pPr>
-                      <a:r>
-                        <a:rPr/>
-                        <a:t>D</a:t>
-                      </a:r>
-                    </a:p>
-                  </a:txBody>
-                  <a:tcPr/>
-                </a:tc>
-                <a:tc>
-                  <a:txBody>
-                    <a:bodyPr/>
-                    <a:lstStyle/>
-                    <a:p>
-                      <a:pPr lvl="0" indent="0" marL="0">
-                        <a:buNone/>
-                      </a:pPr>
-                      <a:r>
-                        <a:rPr/>
-                        <a:t>N</a:t>
-                      </a:r>
-                    </a:p>
-                  </a:txBody>
-                  <a:tcPr/>
-                </a:tc>
-                <a:tc>
-                  <a:txBody>
-                    <a:bodyPr/>
-                    <a:lstStyle/>
-                    <a:p>
-                      <a:pPr lvl="0" indent="0" marL="0">
-                        <a:buNone/>
-                      </a:pPr>
-                      <a:r>
-                        <a:rPr/>
-                        <a:t>A</a:t>
-                      </a:r>
-                    </a:p>
-                  </a:txBody>
-                  <a:tcPr/>
-                </a:tc>
-                <a:tc>
-                  <a:txBody>
-                    <a:bodyPr/>
-                    <a:lstStyle/>
-                    <a:p>
-                      <a:pPr lvl="0" indent="0" marL="0">
-                        <a:buNone/>
-                      </a:pPr>
-                      <a:r>
-                        <a:rPr/>
-                        <a:t>SA</a:t>
-                      </a:r>
-                    </a:p>
-                  </a:txBody>
-                  <a:tcPr/>
-                </a:tc>
-              </a:tr>
-              <a:tr h="0">
-                <a:tc>
-                  <a:txBody>
-                    <a:bodyPr/>
-                    <a:lstStyle/>
-                    <a:p>
-                      <a:pPr lvl="0" indent="0" marL="0">
-                        <a:buNone/>
-                      </a:pPr>
-                      <a:r>
-                        <a:rPr/>
-                        <a:t>High-traffic area</a:t>
-                      </a:r>
-                    </a:p>
-                  </a:txBody>
-                </a:tc>
-                <a:tc>
-                  <a:txBody>
-                    <a:bodyPr/>
-                    <a:lstStyle/>
-                    <a:p>
-                      <a:pPr lvl="0" indent="0" marL="0">
-                        <a:buNone/>
-                      </a:pPr>
-                      <a:r>
-                        <a:rPr/>
-                        <a:t>□</a:t>
-                      </a:r>
-                    </a:p>
-                  </a:txBody>
-                </a:tc>
-                <a:tc>
-                  <a:txBody>
-                    <a:bodyPr/>
-                    <a:lstStyle/>
-                    <a:p>
-                      <a:pPr lvl="0" indent="0" marL="0">
-                        <a:buNone/>
-                      </a:pPr>
-                      <a:r>
-                        <a:rPr/>
-                        <a:t>□</a:t>
-                      </a:r>
-                    </a:p>
-                  </a:txBody>
-                </a:tc>
-                <a:tc>
-                  <a:txBody>
-                    <a:bodyPr/>
-                    <a:lstStyle/>
-                    <a:p>
-                      <a:pPr lvl="0" indent="0" marL="0">
-                        <a:buNone/>
-                      </a:pPr>
-                      <a:r>
-                        <a:rPr/>
-                        <a:t>□</a:t>
-                      </a:r>
-                    </a:p>
-                  </a:txBody>
-                </a:tc>
-                <a:tc>
-                  <a:txBody>
-                    <a:bodyPr/>
-                    <a:lstStyle/>
-                    <a:p>
-                      <a:pPr lvl="0" indent="0" marL="0">
-                        <a:buNone/>
-                      </a:pPr>
-                      <a:r>
-                        <a:rPr/>
-                        <a:t>□</a:t>
-                      </a:r>
-                    </a:p>
-                  </a:txBody>
-                </a:tc>
-                <a:tc>
-                  <a:txBody>
-                    <a:bodyPr/>
-                    <a:lstStyle/>
-                    <a:p>
-                      <a:pPr lvl="0" indent="0" marL="0">
-                        <a:buNone/>
-                      </a:pPr>
-                      <a:r>
-                        <a:rPr/>
-                        <a:t>□</a:t>
-                      </a:r>
-                    </a:p>
-                  </a:txBody>
-                </a:tc>
-              </a:tr>
-              <a:tr h="0">
-                <a:tc>
-                  <a:txBody>
-                    <a:bodyPr/>
-                    <a:lstStyle/>
-                    <a:p>
-                      <a:pPr lvl="0" indent="0" marL="0">
-                        <a:buNone/>
-                      </a:pPr>
-                      <a:r>
-                        <a:rPr/>
-                        <a:t>Weekend preferred</a:t>
-                      </a:r>
-                    </a:p>
-                  </a:txBody>
-                </a:tc>
-                <a:tc>
-                  <a:txBody>
-                    <a:bodyPr/>
-                    <a:lstStyle/>
-                    <a:p>
-                      <a:pPr lvl="0" indent="0" marL="0">
-                        <a:buNone/>
-                      </a:pPr>
-                      <a:r>
-                        <a:rPr/>
-                        <a:t>□</a:t>
-                      </a:r>
-                    </a:p>
-                  </a:txBody>
-                </a:tc>
-                <a:tc>
-                  <a:txBody>
-                    <a:bodyPr/>
-                    <a:lstStyle/>
-                    <a:p>
-                      <a:pPr lvl="0" indent="0" marL="0">
-                        <a:buNone/>
-                      </a:pPr>
-                      <a:r>
-                        <a:rPr/>
-                        <a:t>□</a:t>
-                      </a:r>
-                    </a:p>
-                  </a:txBody>
-                </a:tc>
-                <a:tc>
-                  <a:txBody>
-                    <a:bodyPr/>
-                    <a:lstStyle/>
-                    <a:p>
-                      <a:pPr lvl="0" indent="0" marL="0">
-                        <a:buNone/>
-                      </a:pPr>
-                      <a:r>
-                        <a:rPr/>
-                        <a:t>□</a:t>
-                      </a:r>
-                    </a:p>
-                  </a:txBody>
-                </a:tc>
-                <a:tc>
-                  <a:txBody>
-                    <a:bodyPr/>
-                    <a:lstStyle/>
-                    <a:p>
-                      <a:pPr lvl="0" indent="0" marL="0">
-                        <a:buNone/>
-                      </a:pPr>
-                      <a:r>
-                        <a:rPr/>
-                        <a:t>□</a:t>
-                      </a:r>
-                    </a:p>
-                  </a:txBody>
-                </a:tc>
-                <a:tc>
-                  <a:txBody>
-                    <a:bodyPr/>
-                    <a:lstStyle/>
-                    <a:p>
-                      <a:pPr lvl="0" indent="0" marL="0">
-                        <a:buNone/>
-                      </a:pPr>
-                      <a:r>
-                        <a:rPr/>
-                        <a:t>□</a:t>
-                      </a:r>
-                    </a:p>
-                  </a:txBody>
-                </a:tc>
-              </a:tr>
-              <a:tr h="0">
-                <a:tc>
-                  <a:txBody>
-                    <a:bodyPr/>
-                    <a:lstStyle/>
-                    <a:p>
-                      <a:pPr lvl="0" indent="0" marL="0">
-                        <a:buNone/>
-                      </a:pPr>
-                      <a:r>
-                        <a:rPr/>
-                        <a:t>Digital payments</a:t>
-                      </a:r>
-                    </a:p>
-                  </a:txBody>
-                </a:tc>
-                <a:tc>
-                  <a:txBody>
-                    <a:bodyPr/>
-                    <a:lstStyle/>
-                    <a:p>
-                      <a:pPr lvl="0" indent="0" marL="0">
-                        <a:buNone/>
-                      </a:pPr>
-                      <a:r>
-                        <a:rPr/>
-                        <a:t>□</a:t>
-                      </a:r>
-                    </a:p>
-                  </a:txBody>
-                </a:tc>
-                <a:tc>
-                  <a:txBody>
-                    <a:bodyPr/>
-                    <a:lstStyle/>
-                    <a:p>
-                      <a:pPr lvl="0" indent="0" marL="0">
-                        <a:buNone/>
-                      </a:pPr>
-                      <a:r>
-                        <a:rPr/>
-                        <a:t>□</a:t>
-                      </a:r>
-                    </a:p>
-                  </a:txBody>
-                </a:tc>
-                <a:tc>
-                  <a:txBody>
-                    <a:bodyPr/>
-                    <a:lstStyle/>
-                    <a:p>
-                      <a:pPr lvl="0" indent="0" marL="0">
-                        <a:buNone/>
-                      </a:pPr>
-                      <a:r>
-                        <a:rPr/>
-                        <a:t>□</a:t>
-                      </a:r>
-                    </a:p>
-                  </a:txBody>
-                </a:tc>
-                <a:tc>
-                  <a:txBody>
-                    <a:bodyPr/>
-                    <a:lstStyle/>
-                    <a:p>
-                      <a:pPr lvl="0" indent="0" marL="0">
-                        <a:buNone/>
-                      </a:pPr>
-                      <a:r>
-                        <a:rPr/>
-                        <a:t>□</a:t>
-                      </a:r>
-                    </a:p>
-                  </a:txBody>
-                </a:tc>
-                <a:tc>
-                  <a:txBody>
-                    <a:bodyPr/>
-                    <a:lstStyle/>
-                    <a:p>
-                      <a:pPr lvl="0" indent="0" marL="0">
-                        <a:buNone/>
-                      </a:pPr>
-                      <a:r>
-                        <a:rPr/>
-                        <a:t>□</a:t>
-                      </a:r>
-                    </a:p>
-                  </a:txBody>
-                </a:tc>
-              </a:tr>
-            </a:tbl>
-          </a:graphicData>
-        </a:graphic>
-      </p:graphicFrame>
+              <a:t>Q22. How would you prefer to learn about upcoming Campus Art Markets?</a:t>
+            </a:r>
+            <a:r>
+              <a:rPr/>
+              <a:t> (Select all that apply) - [ ] Email - [ ] Social Media (Instagram, TikTok) - [ ] Campus Announcements - [ ] Posters/Flyers - [ ] Word of mouth - [ ] Student organization newsletters - [ ] QR codes around campus</a:t>
+            </a:r>
+          </a:p>
+          <a:p>
+            <a:pPr lvl="0" indent="0" marL="0">
+              <a:buNone/>
+            </a:pPr>
+            <a:r>
+              <a:rPr b="1"/>
+              <a:t>Q23. Would you sign up for a mailing list to get updates about the Campus Art Market?</a:t>
+            </a:r>
+            <a:r>
+              <a:rPr/>
+              <a:t> - [ ] Yes - [ ] No - [ ] Maybe</a:t>
+            </a:r>
+          </a:p>
+        </p:txBody>
+      </p:sp>
     </p:spTree>
   </p:cSld>
 </p:sld>
@@ -5811,12 +5244,12 @@
       </p:grpSpPr>
       <p:sp>
         <p:nvSpPr>
-          <p:cNvPr id="3" name="Content Placeholder 2"/>
-          <p:cNvSpPr>
-            <a:spLocks noGrp="1"/>
-          </p:cNvSpPr>
-          <p:nvPr>
-            <p:ph idx="1"/>
+          <p:cNvPr id="2" name="Title 1"/>
+          <p:cNvSpPr>
+            <a:spLocks noGrp="1"/>
+          </p:cNvSpPr>
+          <p:nvPr>
+            <p:ph type="title"/>
           </p:nvPr>
         </p:nvSpPr>
         <p:spPr/>
@@ -5828,8 +5261,37 @@
               <a:buNone/>
             </a:pPr>
             <a:r>
-              <a:rPr i="1"/>
-              <a:t>SD=Strongly Disagree, D=Disagree, N=Neutral, A=Agree, SA=Strongly Agree</a:t>
+              <a:rPr/>
+              <a:t>Overall Feedback</a:t>
+            </a:r>
+          </a:p>
+        </p:txBody>
+      </p:sp>
+      <p:sp>
+        <p:nvSpPr>
+          <p:cNvPr id="3" name="Content Placeholder 2"/>
+          <p:cNvSpPr>
+            <a:spLocks noGrp="1"/>
+          </p:cNvSpPr>
+          <p:nvPr>
+            <p:ph idx="1"/>
+          </p:nvPr>
+        </p:nvSpPr>
+        <p:spPr/>
+        <p:txBody>
+          <a:bodyPr/>
+          <a:lstStyle/>
+          <a:p>
+            <a:pPr lvl="0" indent="0" marL="0">
+              <a:buNone/>
+            </a:pPr>
+            <a:r>
+              <a:rPr b="1"/>
+              <a:t>Q24. What would make you MORE likely to attend a Campus Art Market?</a:t>
+            </a:r>
+            <a:r>
+              <a:rPr/>
+              <a:t> (Open-ended)</a:t>
             </a:r>
           </a:p>
         </p:txBody>
@@ -5858,12 +5320,12 @@
       </p:grpSpPr>
       <p:sp>
         <p:nvSpPr>
-          <p:cNvPr id="2" name="Title 1"/>
-          <p:cNvSpPr>
-            <a:spLocks noGrp="1"/>
-          </p:cNvSpPr>
-          <p:nvPr>
-            <p:ph type="title"/>
+          <p:cNvPr id="3" name="Content Placeholder 2"/>
+          <p:cNvSpPr>
+            <a:spLocks noGrp="1"/>
+          </p:cNvSpPr>
+          <p:nvPr>
+            <p:ph idx="1"/>
           </p:nvPr>
         </p:nvSpPr>
         <p:spPr/>
@@ -5875,104 +5337,12 @@
               <a:buNone/>
             </a:pPr>
             <a:r>
+              <a:rPr b="1"/>
+              <a:t>Q25. What concerns or suggestions do you have for a Campus Art Market?</a:t>
+            </a:r>
+            <a:r>
               <a:rPr/>
-              <a:t>Section D: Artist Perspective</a:t>
-            </a:r>
-          </a:p>
-        </p:txBody>
-      </p:sp>
-      <p:sp>
-        <p:nvSpPr>
-          <p:cNvPr id="3" name="Content Placeholder 2"/>
-          <p:cNvSpPr>
-            <a:spLocks noGrp="1"/>
-          </p:cNvSpPr>
-          <p:nvPr>
-            <p:ph idx="1"/>
-          </p:nvPr>
-        </p:nvSpPr>
-        <p:spPr/>
-        <p:txBody>
-          <a:bodyPr/>
-          <a:lstStyle/>
-          <a:p>
-            <a:pPr lvl="0" indent="0" marL="0">
-              <a:spcBef>
-                <a:spcPts val="3000"/>
-              </a:spcBef>
-              <a:buNone/>
-            </a:pPr>
-            <a:r>
-              <a:rPr b="1"/>
-              <a:t>Q9. Artist Category</a:t>
-            </a:r>
-          </a:p>
-          <a:p>
-            <a:pPr lvl="0"/>
-            <a:r>
-              <a:rPr/>
-              <a:t>☐ 2D Art (paintings, prints, photography)</a:t>
-            </a:r>
-          </a:p>
-          <a:p>
-            <a:pPr lvl="0"/>
-            <a:r>
-              <a:rPr/>
-              <a:t>☐ 3D Art (pottery, sculptures, jewelry)</a:t>
-            </a:r>
-          </a:p>
-          <a:p>
-            <a:pPr lvl="0"/>
-            <a:r>
-              <a:rPr/>
-              <a:t>☐ Functional Art (clothing, stickers, stationery)</a:t>
-            </a:r>
-          </a:p>
-          <a:p>
-            <a:pPr lvl="0"/>
-            <a:r>
-              <a:rPr/>
-              <a:t>☐ Not an artist</a:t>
-            </a:r>
-          </a:p>
-          <a:p>
-            <a:pPr lvl="0" indent="0" marL="0">
-              <a:spcBef>
-                <a:spcPts val="3000"/>
-              </a:spcBef>
-              <a:buNone/>
-            </a:pPr>
-            <a:r>
-              <a:rPr b="1"/>
-              <a:t>Q10. Distribute 50 points</a:t>
-            </a:r>
-          </a:p>
-          <a:p>
-            <a:pPr lvl="0"/>
-            <a:r>
-              <a:rPr/>
-              <a:t>Earn money: ______</a:t>
-            </a:r>
-          </a:p>
-          <a:p>
-            <a:pPr lvl="0"/>
-            <a:r>
-              <a:rPr/>
-              <a:t>Gain exposure: ______</a:t>
-            </a:r>
-          </a:p>
-          <a:p>
-            <a:pPr lvl="0"/>
-            <a:r>
-              <a:rPr/>
-              <a:t>Connect with artists: ______</a:t>
-            </a:r>
-          </a:p>
-          <a:p>
-            <a:pPr lvl="0"/>
-            <a:r>
-              <a:rPr b="1"/>
-              <a:t>TOTAL: 50</a:t>
+              <a:t> (Open-ended)</a:t>
             </a:r>
           </a:p>
         </p:txBody>
@@ -6019,107 +5389,692 @@
             </a:pPr>
             <a:r>
               <a:rPr/>
-              <a:t>Data Collection Plan</a:t>
-            </a:r>
-          </a:p>
-        </p:txBody>
-      </p:sp>
-      <p:sp>
-        <p:nvSpPr>
-          <p:cNvPr id="3" name="Content Placeholder 2"/>
-          <p:cNvSpPr>
-            <a:spLocks noGrp="1"/>
-          </p:cNvSpPr>
+              <a:t>STEP 4: Expert Panel Evaluation Checklist</a:t>
+            </a:r>
+          </a:p>
+        </p:txBody>
+      </p:sp>
+      <p:graphicFrame>
+        <p:nvGraphicFramePr>
+          <p:cNvPr id="6" name="Content Placeholder 5"/>
+          <p:cNvGraphicFramePr>
+            <a:graphicFrameLocks noGrp="1"/>
+          </p:cNvGraphicFramePr>
           <p:nvPr>
             <p:ph idx="1"/>
           </p:nvPr>
-        </p:nvSpPr>
-        <p:spPr/>
-        <p:txBody>
-          <a:bodyPr/>
-          <a:lstStyle/>
-          <a:p>
-            <a:pPr lvl="0" indent="0" marL="0">
-              <a:spcBef>
-                <a:spcPts val="3000"/>
-              </a:spcBef>
-              <a:buNone/>
-            </a:pPr>
-            <a:r>
-              <a:rPr b="1"/>
-              <a:t>Distribution Methods</a:t>
-            </a:r>
-          </a:p>
-          <a:p>
-            <a:pPr lvl="0"/>
-            <a:r>
-              <a:rPr/>
-              <a:t>📱 Online (Google Forms)</a:t>
-            </a:r>
-          </a:p>
-          <a:p>
-            <a:pPr lvl="0"/>
-            <a:r>
-              <a:rPr/>
-              <a:t>📧 Email</a:t>
-            </a:r>
-          </a:p>
-          <a:p>
-            <a:pPr lvl="0"/>
-            <a:r>
-              <a:rPr/>
-              <a:t>📱 Social Media</a:t>
-            </a:r>
-          </a:p>
-          <a:p>
-            <a:pPr lvl="0"/>
-            <a:r>
-              <a:rPr/>
-              <a:t>👥 Face-to-face</a:t>
-            </a:r>
-          </a:p>
-          <a:p>
-            <a:pPr lvl="0"/>
-            <a:r>
-              <a:rPr/>
-              <a:t>📊 QR codes on campus</a:t>
-            </a:r>
-          </a:p>
-          <a:p>
-            <a:pPr lvl="0" indent="0" marL="0">
-              <a:spcBef>
-                <a:spcPts val="3000"/>
-              </a:spcBef>
-              <a:buNone/>
-            </a:pPr>
-            <a:r>
-              <a:rPr b="1"/>
-              <a:t>Analysis Tools</a:t>
-            </a:r>
-          </a:p>
-          <a:p>
-            <a:pPr lvl="0"/>
-            <a:r>
-              <a:rPr/>
-              <a:t>Excel / SPSS</a:t>
-            </a:r>
-          </a:p>
-          <a:p>
-            <a:pPr lvl="0"/>
-            <a:r>
-              <a:rPr/>
-              <a:t>Python / R</a:t>
-            </a:r>
-          </a:p>
-          <a:p>
-            <a:pPr lvl="0"/>
-            <a:r>
-              <a:rPr/>
-              <a:t>Tableau for visualization</a:t>
-            </a:r>
-          </a:p>
-        </p:txBody>
-      </p:sp>
+        </p:nvGraphicFramePr>
+        <p:xfrm>
+          <a:off x="457200" y="1193800"/>
+          <a:ext cx="8229600" cy="3390900"/>
+        </p:xfrm>
+        <a:graphic>
+          <a:graphicData uri="http://schemas.openxmlformats.org/drawingml/2006/table">
+            <a:tbl>
+              <a:tblPr firstRow="1" bandRow="1">
+                <a:tableStyleId>{5C22544A-7EE6-4342-B048-85BDC9FD1C3A}</a:tableStyleId>
+              </a:tblPr>
+              <a:tblGrid>
+                <a:gridCol w="2603500"/>
+                <a:gridCol w="1460500"/>
+                <a:gridCol w="1460500"/>
+                <a:gridCol w="1460500"/>
+                <a:gridCol w="1244600"/>
+              </a:tblGrid>
+              <a:tr h="0">
+                <a:tc>
+                  <a:txBody>
+                    <a:bodyPr/>
+                    <a:lstStyle/>
+                    <a:p>
+                      <a:pPr lvl="0" indent="0" marL="0">
+                        <a:buNone/>
+                      </a:pPr>
+                      <a:r>
+                        <a:rPr b="1"/>
+                        <a:t>Evaluation Criteria</a:t>
+                      </a:r>
+                    </a:p>
+                  </a:txBody>
+                  <a:tcPr/>
+                </a:tc>
+                <a:tc>
+                  <a:txBody>
+                    <a:bodyPr/>
+                    <a:lstStyle/>
+                    <a:p>
+                      <a:pPr lvl="0" indent="0" marL="0">
+                        <a:buNone/>
+                      </a:pPr>
+                      <a:r>
+                        <a:rPr b="1"/>
+                        <a:t>Expert 1</a:t>
+                      </a:r>
+                    </a:p>
+                  </a:txBody>
+                  <a:tcPr/>
+                </a:tc>
+                <a:tc>
+                  <a:txBody>
+                    <a:bodyPr/>
+                    <a:lstStyle/>
+                    <a:p>
+                      <a:pPr lvl="0" indent="0" marL="0">
+                        <a:buNone/>
+                      </a:pPr>
+                      <a:r>
+                        <a:rPr b="1"/>
+                        <a:t>Expert 2</a:t>
+                      </a:r>
+                    </a:p>
+                  </a:txBody>
+                  <a:tcPr/>
+                </a:tc>
+                <a:tc>
+                  <a:txBody>
+                    <a:bodyPr/>
+                    <a:lstStyle/>
+                    <a:p>
+                      <a:pPr lvl="0" indent="0" marL="0">
+                        <a:buNone/>
+                      </a:pPr>
+                      <a:r>
+                        <a:rPr b="1"/>
+                        <a:t>Expert 3</a:t>
+                      </a:r>
+                    </a:p>
+                  </a:txBody>
+                  <a:tcPr/>
+                </a:tc>
+                <a:tc>
+                  <a:txBody>
+                    <a:bodyPr/>
+                    <a:lstStyle/>
+                    <a:p>
+                      <a:pPr lvl="0" indent="0" marL="0">
+                        <a:buNone/>
+                      </a:pPr>
+                      <a:r>
+                        <a:rPr b="1"/>
+                        <a:t>Action</a:t>
+                      </a:r>
+                    </a:p>
+                  </a:txBody>
+                  <a:tcPr/>
+                </a:tc>
+              </a:tr>
+              <a:tr h="0">
+                <a:tc>
+                  <a:txBody>
+                    <a:bodyPr/>
+                    <a:lstStyle/>
+                    <a:p>
+                      <a:pPr lvl="0" indent="0" marL="0">
+                        <a:buNone/>
+                      </a:pPr>
+                      <a:r>
+                        <a:rPr/>
+                        <a:t>Questions align with research objectives</a:t>
+                      </a:r>
+                    </a:p>
+                  </a:txBody>
+                </a:tc>
+                <a:tc>
+                  <a:txBody>
+                    <a:bodyPr/>
+                    <a:lstStyle/>
+                    <a:p>
+                      <a:pPr lvl="0" indent="0" marL="0">
+                        <a:buNone/>
+                      </a:pPr>
+                      <a:r>
+                        <a:rPr/>
+                        <a:t>□</a:t>
+                      </a:r>
+                    </a:p>
+                  </a:txBody>
+                </a:tc>
+                <a:tc>
+                  <a:txBody>
+                    <a:bodyPr/>
+                    <a:lstStyle/>
+                    <a:p>
+                      <a:pPr lvl="0" indent="0" marL="0">
+                        <a:buNone/>
+                      </a:pPr>
+                      <a:r>
+                        <a:rPr/>
+                        <a:t>□</a:t>
+                      </a:r>
+                    </a:p>
+                  </a:txBody>
+                </a:tc>
+                <a:tc>
+                  <a:txBody>
+                    <a:bodyPr/>
+                    <a:lstStyle/>
+                    <a:p>
+                      <a:pPr lvl="0" indent="0" marL="0">
+                        <a:buNone/>
+                      </a:pPr>
+                      <a:r>
+                        <a:rPr/>
+                        <a:t>□</a:t>
+                      </a:r>
+                    </a:p>
+                  </a:txBody>
+                </a:tc>
+                <a:tc>
+                  <a:txBody>
+                    <a:bodyPr/>
+                    <a:lstStyle/>
+                    <a:p>
+                      <a:endParaRPr/>
+                    </a:p>
+                  </a:txBody>
+                </a:tc>
+              </a:tr>
+              <a:tr h="0">
+                <a:tc>
+                  <a:txBody>
+                    <a:bodyPr/>
+                    <a:lstStyle/>
+                    <a:p>
+                      <a:pPr lvl="0" indent="0" marL="0">
+                        <a:buNone/>
+                      </a:pPr>
+                      <a:r>
+                        <a:rPr/>
+                        <a:t>Clear and unambiguous wording</a:t>
+                      </a:r>
+                    </a:p>
+                  </a:txBody>
+                </a:tc>
+                <a:tc>
+                  <a:txBody>
+                    <a:bodyPr/>
+                    <a:lstStyle/>
+                    <a:p>
+                      <a:pPr lvl="0" indent="0" marL="0">
+                        <a:buNone/>
+                      </a:pPr>
+                      <a:r>
+                        <a:rPr/>
+                        <a:t>□</a:t>
+                      </a:r>
+                    </a:p>
+                  </a:txBody>
+                </a:tc>
+                <a:tc>
+                  <a:txBody>
+                    <a:bodyPr/>
+                    <a:lstStyle/>
+                    <a:p>
+                      <a:pPr lvl="0" indent="0" marL="0">
+                        <a:buNone/>
+                      </a:pPr>
+                      <a:r>
+                        <a:rPr/>
+                        <a:t>□</a:t>
+                      </a:r>
+                    </a:p>
+                  </a:txBody>
+                </a:tc>
+                <a:tc>
+                  <a:txBody>
+                    <a:bodyPr/>
+                    <a:lstStyle/>
+                    <a:p>
+                      <a:pPr lvl="0" indent="0" marL="0">
+                        <a:buNone/>
+                      </a:pPr>
+                      <a:r>
+                        <a:rPr/>
+                        <a:t>□</a:t>
+                      </a:r>
+                    </a:p>
+                  </a:txBody>
+                </a:tc>
+                <a:tc>
+                  <a:txBody>
+                    <a:bodyPr/>
+                    <a:lstStyle/>
+                    <a:p>
+                      <a:endParaRPr/>
+                    </a:p>
+                  </a:txBody>
+                </a:tc>
+              </a:tr>
+              <a:tr h="0">
+                <a:tc>
+                  <a:txBody>
+                    <a:bodyPr/>
+                    <a:lstStyle/>
+                    <a:p>
+                      <a:pPr lvl="0" indent="0" marL="0">
+                        <a:buNone/>
+                      </a:pPr>
+                      <a:r>
+                        <a:rPr/>
+                        <a:t>Appropriate scaling formats used</a:t>
+                      </a:r>
+                    </a:p>
+                  </a:txBody>
+                </a:tc>
+                <a:tc>
+                  <a:txBody>
+                    <a:bodyPr/>
+                    <a:lstStyle/>
+                    <a:p>
+                      <a:pPr lvl="0" indent="0" marL="0">
+                        <a:buNone/>
+                      </a:pPr>
+                      <a:r>
+                        <a:rPr/>
+                        <a:t>□</a:t>
+                      </a:r>
+                    </a:p>
+                  </a:txBody>
+                </a:tc>
+                <a:tc>
+                  <a:txBody>
+                    <a:bodyPr/>
+                    <a:lstStyle/>
+                    <a:p>
+                      <a:pPr lvl="0" indent="0" marL="0">
+                        <a:buNone/>
+                      </a:pPr>
+                      <a:r>
+                        <a:rPr/>
+                        <a:t>□</a:t>
+                      </a:r>
+                    </a:p>
+                  </a:txBody>
+                </a:tc>
+                <a:tc>
+                  <a:txBody>
+                    <a:bodyPr/>
+                    <a:lstStyle/>
+                    <a:p>
+                      <a:pPr lvl="0" indent="0" marL="0">
+                        <a:buNone/>
+                      </a:pPr>
+                      <a:r>
+                        <a:rPr/>
+                        <a:t>□</a:t>
+                      </a:r>
+                    </a:p>
+                  </a:txBody>
+                </a:tc>
+                <a:tc>
+                  <a:txBody>
+                    <a:bodyPr/>
+                    <a:lstStyle/>
+                    <a:p>
+                      <a:endParaRPr/>
+                    </a:p>
+                  </a:txBody>
+                </a:tc>
+              </a:tr>
+              <a:tr h="0">
+                <a:tc>
+                  <a:txBody>
+                    <a:bodyPr/>
+                    <a:lstStyle/>
+                    <a:p>
+                      <a:pPr lvl="0" indent="0" marL="0">
+                        <a:buNone/>
+                      </a:pPr>
+                      <a:r>
+                        <a:rPr/>
+                        <a:t>No leading or biased questions</a:t>
+                      </a:r>
+                    </a:p>
+                  </a:txBody>
+                </a:tc>
+                <a:tc>
+                  <a:txBody>
+                    <a:bodyPr/>
+                    <a:lstStyle/>
+                    <a:p>
+                      <a:pPr lvl="0" indent="0" marL="0">
+                        <a:buNone/>
+                      </a:pPr>
+                      <a:r>
+                        <a:rPr/>
+                        <a:t>□</a:t>
+                      </a:r>
+                    </a:p>
+                  </a:txBody>
+                </a:tc>
+                <a:tc>
+                  <a:txBody>
+                    <a:bodyPr/>
+                    <a:lstStyle/>
+                    <a:p>
+                      <a:pPr lvl="0" indent="0" marL="0">
+                        <a:buNone/>
+                      </a:pPr>
+                      <a:r>
+                        <a:rPr/>
+                        <a:t>□</a:t>
+                      </a:r>
+                    </a:p>
+                  </a:txBody>
+                </a:tc>
+                <a:tc>
+                  <a:txBody>
+                    <a:bodyPr/>
+                    <a:lstStyle/>
+                    <a:p>
+                      <a:pPr lvl="0" indent="0" marL="0">
+                        <a:buNone/>
+                      </a:pPr>
+                      <a:r>
+                        <a:rPr/>
+                        <a:t>□</a:t>
+                      </a:r>
+                    </a:p>
+                  </a:txBody>
+                </a:tc>
+                <a:tc>
+                  <a:txBody>
+                    <a:bodyPr/>
+                    <a:lstStyle/>
+                    <a:p>
+                      <a:endParaRPr/>
+                    </a:p>
+                  </a:txBody>
+                </a:tc>
+              </a:tr>
+              <a:tr h="0">
+                <a:tc>
+                  <a:txBody>
+                    <a:bodyPr/>
+                    <a:lstStyle/>
+                    <a:p>
+                      <a:pPr lvl="0" indent="0" marL="0">
+                        <a:buNone/>
+                      </a:pPr>
+                      <a:r>
+                        <a:rPr/>
+                        <a:t>Comprehensive coverage of all metrics</a:t>
+                      </a:r>
+                    </a:p>
+                  </a:txBody>
+                </a:tc>
+                <a:tc>
+                  <a:txBody>
+                    <a:bodyPr/>
+                    <a:lstStyle/>
+                    <a:p>
+                      <a:pPr lvl="0" indent="0" marL="0">
+                        <a:buNone/>
+                      </a:pPr>
+                      <a:r>
+                        <a:rPr/>
+                        <a:t>□</a:t>
+                      </a:r>
+                    </a:p>
+                  </a:txBody>
+                </a:tc>
+                <a:tc>
+                  <a:txBody>
+                    <a:bodyPr/>
+                    <a:lstStyle/>
+                    <a:p>
+                      <a:pPr lvl="0" indent="0" marL="0">
+                        <a:buNone/>
+                      </a:pPr>
+                      <a:r>
+                        <a:rPr/>
+                        <a:t>□</a:t>
+                      </a:r>
+                    </a:p>
+                  </a:txBody>
+                </a:tc>
+                <a:tc>
+                  <a:txBody>
+                    <a:bodyPr/>
+                    <a:lstStyle/>
+                    <a:p>
+                      <a:pPr lvl="0" indent="0" marL="0">
+                        <a:buNone/>
+                      </a:pPr>
+                      <a:r>
+                        <a:rPr/>
+                        <a:t>□</a:t>
+                      </a:r>
+                    </a:p>
+                  </a:txBody>
+                </a:tc>
+                <a:tc>
+                  <a:txBody>
+                    <a:bodyPr/>
+                    <a:lstStyle/>
+                    <a:p>
+                      <a:endParaRPr/>
+                    </a:p>
+                  </a:txBody>
+                </a:tc>
+              </a:tr>
+              <a:tr h="0">
+                <a:tc>
+                  <a:txBody>
+                    <a:bodyPr/>
+                    <a:lstStyle/>
+                    <a:p>
+                      <a:pPr lvl="0" indent="0" marL="0">
+                        <a:buNone/>
+                      </a:pPr>
+                      <a:r>
+                        <a:rPr/>
+                        <a:t>Logical flow and sequencing</a:t>
+                      </a:r>
+                    </a:p>
+                  </a:txBody>
+                </a:tc>
+                <a:tc>
+                  <a:txBody>
+                    <a:bodyPr/>
+                    <a:lstStyle/>
+                    <a:p>
+                      <a:pPr lvl="0" indent="0" marL="0">
+                        <a:buNone/>
+                      </a:pPr>
+                      <a:r>
+                        <a:rPr/>
+                        <a:t>□</a:t>
+                      </a:r>
+                    </a:p>
+                  </a:txBody>
+                </a:tc>
+                <a:tc>
+                  <a:txBody>
+                    <a:bodyPr/>
+                    <a:lstStyle/>
+                    <a:p>
+                      <a:pPr lvl="0" indent="0" marL="0">
+                        <a:buNone/>
+                      </a:pPr>
+                      <a:r>
+                        <a:rPr/>
+                        <a:t>□</a:t>
+                      </a:r>
+                    </a:p>
+                  </a:txBody>
+                </a:tc>
+                <a:tc>
+                  <a:txBody>
+                    <a:bodyPr/>
+                    <a:lstStyle/>
+                    <a:p>
+                      <a:pPr lvl="0" indent="0" marL="0">
+                        <a:buNone/>
+                      </a:pPr>
+                      <a:r>
+                        <a:rPr/>
+                        <a:t>□</a:t>
+                      </a:r>
+                    </a:p>
+                  </a:txBody>
+                </a:tc>
+                <a:tc>
+                  <a:txBody>
+                    <a:bodyPr/>
+                    <a:lstStyle/>
+                    <a:p>
+                      <a:endParaRPr/>
+                    </a:p>
+                  </a:txBody>
+                </a:tc>
+              </a:tr>
+              <a:tr h="0">
+                <a:tc>
+                  <a:txBody>
+                    <a:bodyPr/>
+                    <a:lstStyle/>
+                    <a:p>
+                      <a:pPr lvl="0" indent="0" marL="0">
+                        <a:buNone/>
+                      </a:pPr>
+                      <a:r>
+                        <a:rPr/>
+                        <a:t>Appropriate length (not too long)</a:t>
+                      </a:r>
+                    </a:p>
+                  </a:txBody>
+                </a:tc>
+                <a:tc>
+                  <a:txBody>
+                    <a:bodyPr/>
+                    <a:lstStyle/>
+                    <a:p>
+                      <a:pPr lvl="0" indent="0" marL="0">
+                        <a:buNone/>
+                      </a:pPr>
+                      <a:r>
+                        <a:rPr/>
+                        <a:t>□</a:t>
+                      </a:r>
+                    </a:p>
+                  </a:txBody>
+                </a:tc>
+                <a:tc>
+                  <a:txBody>
+                    <a:bodyPr/>
+                    <a:lstStyle/>
+                    <a:p>
+                      <a:pPr lvl="0" indent="0" marL="0">
+                        <a:buNone/>
+                      </a:pPr>
+                      <a:r>
+                        <a:rPr/>
+                        <a:t>□</a:t>
+                      </a:r>
+                    </a:p>
+                  </a:txBody>
+                </a:tc>
+                <a:tc>
+                  <a:txBody>
+                    <a:bodyPr/>
+                    <a:lstStyle/>
+                    <a:p>
+                      <a:pPr lvl="0" indent="0" marL="0">
+                        <a:buNone/>
+                      </a:pPr>
+                      <a:r>
+                        <a:rPr/>
+                        <a:t>□</a:t>
+                      </a:r>
+                    </a:p>
+                  </a:txBody>
+                </a:tc>
+                <a:tc>
+                  <a:txBody>
+                    <a:bodyPr/>
+                    <a:lstStyle/>
+                    <a:p>
+                      <a:endParaRPr/>
+                    </a:p>
+                  </a:txBody>
+                </a:tc>
+              </a:tr>
+              <a:tr h="0">
+                <a:tc>
+                  <a:txBody>
+                    <a:bodyPr/>
+                    <a:lstStyle/>
+                    <a:p>
+                      <a:pPr lvl="0" indent="0" marL="0">
+                        <a:buNone/>
+                      </a:pPr>
+                      <a:r>
+                        <a:rPr/>
+                        <a:t>Culturally appropriate</a:t>
+                      </a:r>
+                    </a:p>
+                  </a:txBody>
+                </a:tc>
+                <a:tc>
+                  <a:txBody>
+                    <a:bodyPr/>
+                    <a:lstStyle/>
+                    <a:p>
+                      <a:pPr lvl="0" indent="0" marL="0">
+                        <a:buNone/>
+                      </a:pPr>
+                      <a:r>
+                        <a:rPr/>
+                        <a:t>□</a:t>
+                      </a:r>
+                    </a:p>
+                  </a:txBody>
+                </a:tc>
+                <a:tc>
+                  <a:txBody>
+                    <a:bodyPr/>
+                    <a:lstStyle/>
+                    <a:p>
+                      <a:pPr lvl="0" indent="0" marL="0">
+                        <a:buNone/>
+                      </a:pPr>
+                      <a:r>
+                        <a:rPr/>
+                        <a:t>□</a:t>
+                      </a:r>
+                    </a:p>
+                  </a:txBody>
+                </a:tc>
+                <a:tc>
+                  <a:txBody>
+                    <a:bodyPr/>
+                    <a:lstStyle/>
+                    <a:p>
+                      <a:pPr lvl="0" indent="0" marL="0">
+                        <a:buNone/>
+                      </a:pPr>
+                      <a:r>
+                        <a:rPr/>
+                        <a:t>□</a:t>
+                      </a:r>
+                    </a:p>
+                  </a:txBody>
+                </a:tc>
+                <a:tc>
+                  <a:txBody>
+                    <a:bodyPr/>
+                    <a:lstStyle/>
+                    <a:p>
+                      <a:endParaRPr/>
+                    </a:p>
+                  </a:txBody>
+                </a:tc>
+              </a:tr>
+            </a:tbl>
+          </a:graphicData>
+        </a:graphic>
+      </p:graphicFrame>
     </p:spTree>
   </p:cSld>
 </p:sld>
@@ -6162,233 +6117,113 @@
             </a:pPr>
             <a:r>
               <a:rPr/>
-              <a:t>Project Timeline</a:t>
-            </a:r>
-          </a:p>
-        </p:txBody>
-      </p:sp>
-      <p:graphicFrame>
-        <p:nvGraphicFramePr>
-          <p:cNvPr id="6" name="Content Placeholder 5"/>
-          <p:cNvGraphicFramePr>
-            <a:graphicFrameLocks noGrp="1"/>
-          </p:cNvGraphicFramePr>
+              <a:t>Expert Panel Feedback Form</a:t>
+            </a:r>
+          </a:p>
+        </p:txBody>
+      </p:sp>
+      <p:sp>
+        <p:nvSpPr>
+          <p:cNvPr id="3" name="Content Placeholder 2"/>
+          <p:cNvSpPr>
+            <a:spLocks noGrp="1"/>
+          </p:cNvSpPr>
           <p:nvPr>
             <p:ph idx="1"/>
           </p:nvPr>
-        </p:nvGraphicFramePr>
-        <p:xfrm>
-          <a:off x="457200" y="1193800"/>
-          <a:ext cx="8229600" cy="3390900"/>
-        </p:xfrm>
-        <a:graphic>
-          <a:graphicData uri="http://schemas.openxmlformats.org/drawingml/2006/table">
-            <a:tbl>
-              <a:tblPr firstRow="1" bandRow="1">
-                <a:tableStyleId>{5C22544A-7EE6-4342-B048-85BDC9FD1C3A}</a:tableStyleId>
-              </a:tblPr>
-              <a:tblGrid>
-                <a:gridCol w="4114800"/>
-                <a:gridCol w="4114800"/>
-              </a:tblGrid>
-              <a:tr h="0">
-                <a:tc>
-                  <a:txBody>
-                    <a:bodyPr/>
-                    <a:lstStyle/>
-                    <a:p>
-                      <a:pPr lvl="0" indent="0" marL="0">
-                        <a:buNone/>
-                      </a:pPr>
-                      <a:r>
-                        <a:rPr/>
-                        <a:t>Week</a:t>
-                      </a:r>
-                    </a:p>
-                  </a:txBody>
-                  <a:tcPr/>
-                </a:tc>
-                <a:tc>
-                  <a:txBody>
-                    <a:bodyPr/>
-                    <a:lstStyle/>
-                    <a:p>
-                      <a:pPr lvl="0" indent="0" marL="0">
-                        <a:buNone/>
-                      </a:pPr>
-                      <a:r>
-                        <a:rPr/>
-                        <a:t>Activity</a:t>
-                      </a:r>
-                    </a:p>
-                  </a:txBody>
-                  <a:tcPr/>
-                </a:tc>
-              </a:tr>
-              <a:tr h="0">
-                <a:tc>
-                  <a:txBody>
-                    <a:bodyPr/>
-                    <a:lstStyle/>
-                    <a:p>
-                      <a:pPr lvl="0" indent="0" marL="0">
-                        <a:buNone/>
-                      </a:pPr>
-                      <a:r>
-                        <a:rPr/>
-                        <a:t>1-2</a:t>
-                      </a:r>
-                    </a:p>
-                  </a:txBody>
-                </a:tc>
-                <a:tc>
-                  <a:txBody>
-                    <a:bodyPr/>
-                    <a:lstStyle/>
-                    <a:p>
-                      <a:pPr lvl="0" indent="0" marL="0">
-                        <a:buNone/>
-                      </a:pPr>
-                      <a:r>
-                        <a:rPr/>
-                        <a:t>Survey Design &amp; Review</a:t>
-                      </a:r>
-                    </a:p>
-                  </a:txBody>
-                </a:tc>
-              </a:tr>
-              <a:tr h="0">
-                <a:tc>
-                  <a:txBody>
-                    <a:bodyPr/>
-                    <a:lstStyle/>
-                    <a:p>
-                      <a:pPr lvl="0" indent="0" marL="0">
-                        <a:buNone/>
-                      </a:pPr>
-                      <a:r>
-                        <a:rPr/>
-                        <a:t>3</a:t>
-                      </a:r>
-                    </a:p>
-                  </a:txBody>
-                </a:tc>
-                <a:tc>
-                  <a:txBody>
-                    <a:bodyPr/>
-                    <a:lstStyle/>
-                    <a:p>
-                      <a:pPr lvl="0" indent="0" marL="0">
-                        <a:buNone/>
-                      </a:pPr>
-                      <a:r>
-                        <a:rPr/>
-                        <a:t>Pilot Study (75-100)</a:t>
-                      </a:r>
-                    </a:p>
-                  </a:txBody>
-                </a:tc>
-              </a:tr>
-              <a:tr h="0">
-                <a:tc>
-                  <a:txBody>
-                    <a:bodyPr/>
-                    <a:lstStyle/>
-                    <a:p>
-                      <a:pPr lvl="0" indent="0" marL="0">
-                        <a:buNone/>
-                      </a:pPr>
-                      <a:r>
-                        <a:rPr/>
-                        <a:t>4</a:t>
-                      </a:r>
-                    </a:p>
-                  </a:txBody>
-                </a:tc>
-                <a:tc>
-                  <a:txBody>
-                    <a:bodyPr/>
-                    <a:lstStyle/>
-                    <a:p>
-                      <a:pPr lvl="0" indent="0" marL="0">
-                        <a:buNone/>
-                      </a:pPr>
-                      <a:r>
-                        <a:rPr/>
-                        <a:t>Data Collection</a:t>
-                      </a:r>
-                    </a:p>
-                  </a:txBody>
-                </a:tc>
-              </a:tr>
-              <a:tr h="0">
-                <a:tc>
-                  <a:txBody>
-                    <a:bodyPr/>
-                    <a:lstStyle/>
-                    <a:p>
-                      <a:pPr lvl="0" indent="0" marL="0">
-                        <a:buNone/>
-                      </a:pPr>
-                      <a:r>
-                        <a:rPr/>
-                        <a:t>5</a:t>
-                      </a:r>
-                    </a:p>
-                  </a:txBody>
-                </a:tc>
-                <a:tc>
-                  <a:txBody>
-                    <a:bodyPr/>
-                    <a:lstStyle/>
-                    <a:p>
-                      <a:pPr lvl="0" indent="0" marL="0">
-                        <a:buNone/>
-                      </a:pPr>
-                      <a:r>
-                        <a:rPr/>
-                        <a:t>Analysis</a:t>
-                      </a:r>
-                    </a:p>
-                  </a:txBody>
-                </a:tc>
-              </a:tr>
-              <a:tr h="0">
-                <a:tc>
-                  <a:txBody>
-                    <a:bodyPr/>
-                    <a:lstStyle/>
-                    <a:p>
-                      <a:pPr lvl="0" indent="0" marL="0">
-                        <a:buNone/>
-                      </a:pPr>
-                      <a:r>
-                        <a:rPr/>
-                        <a:t>6</a:t>
-                      </a:r>
-                    </a:p>
-                  </a:txBody>
-                </a:tc>
-                <a:tc>
-                  <a:txBody>
-                    <a:bodyPr/>
-                    <a:lstStyle/>
-                    <a:p>
-                      <a:pPr lvl="0" indent="0" marL="0">
-                        <a:buNone/>
-                      </a:pPr>
-                      <a:r>
-                        <a:rPr/>
-                        <a:t>Presentation</a:t>
-                      </a:r>
-                    </a:p>
-                  </a:txBody>
-                </a:tc>
-              </a:tr>
-            </a:tbl>
-          </a:graphicData>
-        </a:graphic>
-      </p:graphicFrame>
+        </p:nvSpPr>
+        <p:spPr/>
+        <p:txBody>
+          <a:bodyPr/>
+          <a:lstStyle/>
+          <a:p>
+            <a:pPr lvl="0" indent="0" marL="0">
+              <a:buNone/>
+            </a:pPr>
+            <a:r>
+              <a:rPr b="1"/>
+              <a:t>Name of Expert:</a:t>
+            </a:r>
+            <a:r>
+              <a:rPr/>
+              <a:t> ____________________ </a:t>
+            </a:r>
+            <a:r>
+              <a:rPr b="1"/>
+              <a:t>Date:</a:t>
+            </a:r>
+            <a:r>
+              <a:rPr/>
+              <a:t> ____________________</a:t>
+            </a:r>
+          </a:p>
+          <a:p>
+            <a:pPr lvl="0" indent="0" marL="0">
+              <a:buNone/>
+            </a:pPr>
+            <a:r>
+              <a:rPr b="1"/>
+              <a:t>Area of Expertise:</a:t>
+            </a:r>
+            <a:r>
+              <a:rPr/>
+              <a:t> ____________________</a:t>
+            </a:r>
+          </a:p>
+          <a:p>
+            <a:pPr lvl="0" indent="0" marL="0">
+              <a:buNone/>
+            </a:pPr>
+            <a:r>
+              <a:rPr b="1"/>
+              <a:t>Overall Comments:</a:t>
+            </a:r>
+            <a:r>
+              <a:rPr/>
+              <a:t> _______________________________________________ _______________________________________________</a:t>
+            </a:r>
+          </a:p>
+          <a:p>
+            <a:pPr lvl="0" indent="0" marL="0">
+              <a:buNone/>
+            </a:pPr>
+            <a:r>
+              <a:rPr b="1"/>
+              <a:t>Specific Recommendations:</a:t>
+            </a:r>
+            <a:r>
+              <a:rPr/>
+              <a:t> 1. _____________________________________________ 2. _____________________________________________ 3. _____________________________________________</a:t>
+            </a:r>
+          </a:p>
+          <a:p>
+            <a:pPr lvl="0" indent="0" marL="0">
+              <a:buNone/>
+            </a:pPr>
+            <a:r>
+              <a:rPr b="1"/>
+              <a:t>Suggested Additions/Deletions:</a:t>
+            </a:r>
+            <a:r>
+              <a:rPr/>
+              <a:t> _______________________________________________</a:t>
+            </a:r>
+          </a:p>
+          <a:p>
+            <a:pPr lvl="0" indent="0" marL="0">
+              <a:buNone/>
+            </a:pPr>
+            <a:r>
+              <a:rPr b="1"/>
+              <a:t>Signature:</a:t>
+            </a:r>
+            <a:r>
+              <a:rPr/>
+              <a:t> ____________________</a:t>
+            </a:r>
+          </a:p>
+        </p:txBody>
+      </p:sp>
     </p:spTree>
   </p:cSld>
 </p:sld>
@@ -6421,12 +6256,7 @@
             <p:ph type="title"/>
           </p:nvPr>
         </p:nvSpPr>
-        <p:spPr>
-          <a:xfrm>
-            <a:off x="722313" y="3305176"/>
-            <a:ext cx="7772400" cy="1021556"/>
-          </a:xfrm>
-        </p:spPr>
+        <p:spPr/>
         <p:txBody>
           <a:bodyPr/>
           <a:lstStyle/>
@@ -6436,7 +6266,120 @@
             </a:pPr>
             <a:r>
               <a:rPr/>
-              <a:t>Campus Art Market Survey</a:t>
+              <a:t>STEP 1: Define Research Question/Problem</a:t>
+            </a:r>
+          </a:p>
+        </p:txBody>
+      </p:sp>
+      <p:sp>
+        <p:nvSpPr>
+          <p:cNvPr id="3" name="Content Placeholder 2"/>
+          <p:cNvSpPr>
+            <a:spLocks noGrp="1"/>
+          </p:cNvSpPr>
+          <p:nvPr>
+            <p:ph idx="1"/>
+          </p:nvPr>
+        </p:nvSpPr>
+        <p:spPr/>
+        <p:txBody>
+          <a:bodyPr/>
+          <a:lstStyle/>
+          <a:p>
+            <a:pPr lvl="0" indent="0" marL="0">
+              <a:spcBef>
+                <a:spcPts val="3000"/>
+              </a:spcBef>
+              <a:buNone/>
+            </a:pPr>
+            <a:r>
+              <a:rPr b="1"/>
+              <a:t>Research Problem</a:t>
+            </a:r>
+          </a:p>
+          <a:p>
+            <a:pPr lvl="0" indent="0" marL="0">
+              <a:buNone/>
+            </a:pPr>
+            <a:r>
+              <a:rPr b="1"/>
+              <a:t>“Is there sufficient student interest and viability for establishing a regular Campus Art Market?”</a:t>
+            </a:r>
+          </a:p>
+          <a:p>
+            <a:pPr lvl="0" indent="0" marL="0">
+              <a:spcBef>
+                <a:spcPts val="3000"/>
+              </a:spcBef>
+              <a:buNone/>
+            </a:pPr>
+            <a:r>
+              <a:rPr b="1"/>
+              <a:t>Key Research Questions</a:t>
+            </a:r>
+          </a:p>
+          <a:p>
+            <a:pPr lvl="0"/>
+            <a:r>
+              <a:rPr b="1"/>
+              <a:t>Why collect data?</a:t>
+            </a:r>
+            <a:r>
+              <a:rPr/>
+              <a:t> To determine if students would actively participate in and support an on-campus art market</a:t>
+            </a:r>
+          </a:p>
+          <a:p>
+            <a:pPr lvl="0"/>
+            <a:r>
+              <a:rPr b="1"/>
+              <a:t>What do we want to understand?</a:t>
+            </a:r>
+          </a:p>
+          <a:p>
+            <a:pPr lvl="1"/>
+            <a:r>
+              <a:rPr/>
+              <a:t>Student demographics and art-buying behavior</a:t>
+            </a:r>
+          </a:p>
+          <a:p>
+            <a:pPr lvl="1"/>
+            <a:r>
+              <a:rPr/>
+              <a:t>Level of interest in a campus art market</a:t>
+            </a:r>
+          </a:p>
+          <a:p>
+            <a:pPr lvl="1"/>
+            <a:r>
+              <a:rPr/>
+              <a:t>Preferred products, timing, and location</a:t>
+            </a:r>
+          </a:p>
+          <a:p>
+            <a:pPr lvl="1"/>
+            <a:r>
+              <a:rPr/>
+              <a:t>Willingness of student artists to participate as vendors</a:t>
+            </a:r>
+          </a:p>
+          <a:p>
+            <a:pPr lvl="1"/>
+            <a:r>
+              <a:rPr/>
+              <a:t>Optimal market format and logistics</a:t>
+            </a:r>
+          </a:p>
+          <a:p>
+            <a:pPr lvl="0"/>
+            <a:r>
+              <a:rPr b="1"/>
+              <a:t>What type of data is needed?</a:t>
+            </a:r>
+            <a:r>
+              <a:rPr/>
+              <a:t> Quantitative data through structured survey with multiple scaling formats</a:t>
             </a:r>
           </a:p>
         </p:txBody>
@@ -6483,7 +6426,7 @@
             </a:pPr>
             <a:r>
               <a:rPr/>
-              <a:t>Expected Outcomes</a:t>
+              <a:t>STEP 5: Pilot Study and Validation Form</a:t>
             </a:r>
           </a:p>
         </p:txBody>
@@ -6503,45 +6446,50 @@
           <a:bodyPr/>
           <a:lstStyle/>
           <a:p>
-            <a:pPr lvl="0"/>
+            <a:pPr lvl="0" indent="0" marL="0">
+              <a:spcBef>
+                <a:spcPts val="3000"/>
+              </a:spcBef>
+              <a:buNone/>
+            </a:pPr>
+            <a:r>
+              <a:rPr b="1"/>
+              <a:t>Pilot Study Feedback Form (For Respondents)</a:t>
+            </a:r>
+          </a:p>
+          <a:p>
+            <a:pPr lvl="0" indent="0" marL="0">
+              <a:buNone/>
+            </a:pPr>
+            <a:r>
+              <a:rPr b="1"/>
+              <a:t>Thank you for participating in our pilot study! Please provide feedback on the survey itself:</a:t>
+            </a:r>
+          </a:p>
+          <a:p>
+            <a:pPr lvl="0" indent="0" marL="0">
+              <a:buNone/>
+            </a:pPr>
+            <a:r>
+              <a:rPr b="1"/>
+              <a:t>Q1. How long did it take you to complete this survey?</a:t>
+            </a:r>
             <a:r>
               <a:rPr/>
-              <a:t>📊 Student demographics &amp; buying behavior</a:t>
-            </a:r>
-          </a:p>
-          <a:p>
-            <a:pPr lvl="0"/>
+              <a:t> - [ ] Less than 5 minutes - [ ] 5-10 minutes - [ ] 10-15 minutes - [ ] More than 15 minutes</a:t>
+            </a:r>
+          </a:p>
+          <a:p>
+            <a:pPr lvl="0" indent="0" marL="0">
+              <a:buNone/>
+            </a:pPr>
+            <a:r>
+              <a:rPr b="1"/>
+              <a:t>Q2. Were any questions difficult to understand? If yes, please specify which ones:</a:t>
+            </a:r>
             <a:r>
               <a:rPr/>
-              <a:t>📈 Interest level in campus art market</a:t>
-            </a:r>
-          </a:p>
-          <a:p>
-            <a:pPr lvl="0"/>
-            <a:r>
-              <a:rPr/>
-              <a:t>🎨 Preferred product categories</a:t>
-            </a:r>
-          </a:p>
-          <a:p>
-            <a:pPr lvl="0"/>
-            <a:r>
-              <a:rPr/>
-              <a:t>📍 Optimal market location &amp; timing</a:t>
-            </a:r>
-          </a:p>
-          <a:p>
-            <a:pPr lvl="0"/>
-            <a:r>
-              <a:rPr/>
-              <a:t>💰 Spending patterns</a:t>
-            </a:r>
-          </a:p>
-          <a:p>
-            <a:pPr lvl="0"/>
-            <a:r>
-              <a:rPr/>
-              <a:t>👩‍🎨 Student artist participation interest</a:t>
+              <a:t> _______________________________________________ _______________________________________________</a:t>
             </a:r>
           </a:p>
         </p:txBody>
@@ -6588,7 +6536,7 @@
             </a:pPr>
             <a:r>
               <a:rPr/>
-              <a:t>Questions?</a:t>
+              <a:t>Pilot Study Feedback Form (Continued)</a:t>
             </a:r>
           </a:p>
         </p:txBody>
@@ -6613,11 +6561,11 @@
             </a:pPr>
             <a:r>
               <a:rPr b="1"/>
-              <a:t>📧 Contact:</a:t>
+              <a:t>Q3. Were any questions unclear or ambiguous? If yes, please specify:</a:t>
             </a:r>
             <a:r>
               <a:rPr/>
-              <a:t> [Your Email]</a:t>
+              <a:t> _______________________________________________ _______________________________________________</a:t>
             </a:r>
           </a:p>
           <a:p>
@@ -6626,7 +6574,1607 @@
             </a:pPr>
             <a:r>
               <a:rPr b="1"/>
-              <a:t>Thank you for your attention!</a:t>
+              <a:t>Q4. Did you encounter any technical issues while filling out the survey?</a:t>
+            </a:r>
+            <a:r>
+              <a:rPr/>
+              <a:t> - [ ] No issues - [ ] Yes (please describe): _________________________________</a:t>
+            </a:r>
+          </a:p>
+          <a:p>
+            <a:pPr lvl="0" indent="0" marL="0">
+              <a:buNone/>
+            </a:pPr>
+            <a:r>
+              <a:rPr b="1"/>
+              <a:t>Q5. Was the language appropriate and easy to understand?</a:t>
+            </a:r>
+            <a:r>
+              <a:rPr/>
+              <a:t> - [ ] Yes, completely - [ ] Mostly yes - [ ] No, some terms were confusing</a:t>
+            </a:r>
+          </a:p>
+        </p:txBody>
+      </p:sp>
+    </p:spTree>
+  </p:cSld>
+</p:sld>
+</file>
+
+<file path=ppt/slides/slide22.xml><?xml version="1.0" encoding="utf-8"?>
+<p:sld xmlns:a="http://schemas.openxmlformats.org/drawingml/2006/main" xmlns:r="http://schemas.openxmlformats.org/officeDocument/2006/relationships" xmlns:p="http://schemas.openxmlformats.org/presentationml/2006/main">
+  <p:cSld>
+    <p:spTree>
+      <p:nvGrpSpPr>
+        <p:cNvPr id="1" name=""/>
+        <p:cNvGrpSpPr/>
+        <p:nvPr/>
+      </p:nvGrpSpPr>
+      <p:grpSpPr>
+        <a:xfrm>
+          <a:off x="0" y="0"/>
+          <a:ext cx="0" cy="0"/>
+          <a:chOff x="0" y="0"/>
+          <a:chExt cx="0" cy="0"/>
+        </a:xfrm>
+      </p:grpSpPr>
+      <p:sp>
+        <p:nvSpPr>
+          <p:cNvPr id="2" name="Title 1"/>
+          <p:cNvSpPr>
+            <a:spLocks noGrp="1"/>
+          </p:cNvSpPr>
+          <p:nvPr>
+            <p:ph type="title"/>
+          </p:nvPr>
+        </p:nvSpPr>
+        <p:spPr/>
+        <p:txBody>
+          <a:bodyPr/>
+          <a:lstStyle/>
+          <a:p>
+            <a:pPr lvl="0" indent="0" marL="0">
+              <a:buNone/>
+            </a:pPr>
+            <a:r>
+              <a:rPr/>
+              <a:t>Pilot Study Feedback Form (Continued)</a:t>
+            </a:r>
+          </a:p>
+        </p:txBody>
+      </p:sp>
+      <p:sp>
+        <p:nvSpPr>
+          <p:cNvPr id="3" name="Content Placeholder 2"/>
+          <p:cNvSpPr>
+            <a:spLocks noGrp="1"/>
+          </p:cNvSpPr>
+          <p:nvPr>
+            <p:ph idx="1"/>
+          </p:nvPr>
+        </p:nvSpPr>
+        <p:spPr/>
+        <p:txBody>
+          <a:bodyPr/>
+          <a:lstStyle/>
+          <a:p>
+            <a:pPr lvl="0" indent="0" marL="0">
+              <a:buNone/>
+            </a:pPr>
+            <a:r>
+              <a:rPr b="1"/>
+              <a:t>Q6. Were there any questions you felt were unnecessary or redundant?</a:t>
+            </a:r>
+            <a:r>
+              <a:rPr/>
+              <a:t> _______________________________________________</a:t>
+            </a:r>
+          </a:p>
+          <a:p>
+            <a:pPr lvl="0" indent="0" marL="0">
+              <a:buNone/>
+            </a:pPr>
+            <a:r>
+              <a:rPr b="1"/>
+              <a:t>Q7. Were there any topics missing that should be covered?</a:t>
+            </a:r>
+            <a:r>
+              <a:rPr/>
+              <a:t> _______________________________________________</a:t>
+            </a:r>
+          </a:p>
+          <a:p>
+            <a:pPr lvl="0" indent="0" marL="0">
+              <a:buNone/>
+            </a:pPr>
+            <a:r>
+              <a:rPr b="1"/>
+              <a:t>Q8. Any other feedback or suggestions to improve this survey?</a:t>
+            </a:r>
+            <a:r>
+              <a:rPr/>
+              <a:t> _______________________________________________ _______________________________________________</a:t>
+            </a:r>
+          </a:p>
+        </p:txBody>
+      </p:sp>
+    </p:spTree>
+  </p:cSld>
+</p:sld>
+</file>
+
+<file path=ppt/slides/slide23.xml><?xml version="1.0" encoding="utf-8"?>
+<p:sld xmlns:a="http://schemas.openxmlformats.org/drawingml/2006/main" xmlns:r="http://schemas.openxmlformats.org/officeDocument/2006/relationships" xmlns:p="http://schemas.openxmlformats.org/presentationml/2006/main">
+  <p:cSld>
+    <p:spTree>
+      <p:nvGrpSpPr>
+        <p:cNvPr id="1" name=""/>
+        <p:cNvGrpSpPr/>
+        <p:nvPr/>
+      </p:nvGrpSpPr>
+      <p:grpSpPr>
+        <a:xfrm>
+          <a:off x="0" y="0"/>
+          <a:ext cx="0" cy="0"/>
+          <a:chOff x="0" y="0"/>
+          <a:chExt cx="0" cy="0"/>
+        </a:xfrm>
+      </p:grpSpPr>
+      <p:sp>
+        <p:nvSpPr>
+          <p:cNvPr id="2" name="Title 1"/>
+          <p:cNvSpPr>
+            <a:spLocks noGrp="1"/>
+          </p:cNvSpPr>
+          <p:nvPr>
+            <p:ph type="title"/>
+          </p:nvPr>
+        </p:nvSpPr>
+        <p:spPr/>
+        <p:txBody>
+          <a:bodyPr/>
+          <a:lstStyle/>
+          <a:p>
+            <a:pPr lvl="0" indent="0" marL="0">
+              <a:buNone/>
+            </a:pPr>
+            <a:r>
+              <a:rPr/>
+              <a:t>Pilot Study Observer Checklist</a:t>
+            </a:r>
+          </a:p>
+        </p:txBody>
+      </p:sp>
+      <p:graphicFrame>
+        <p:nvGraphicFramePr>
+          <p:cNvPr id="6" name="Content Placeholder 5"/>
+          <p:cNvGraphicFramePr>
+            <a:graphicFrameLocks noGrp="1"/>
+          </p:cNvGraphicFramePr>
+          <p:nvPr>
+            <p:ph idx="1"/>
+          </p:nvPr>
+        </p:nvGraphicFramePr>
+        <p:xfrm>
+          <a:off x="457200" y="1193800"/>
+          <a:ext cx="8229600" cy="3390900"/>
+        </p:xfrm>
+        <a:graphic>
+          <a:graphicData uri="http://schemas.openxmlformats.org/drawingml/2006/table">
+            <a:tbl>
+              <a:tblPr firstRow="1" bandRow="1">
+                <a:tableStyleId>{5C22544A-7EE6-4342-B048-85BDC9FD1C3A}</a:tableStyleId>
+              </a:tblPr>
+              <a:tblGrid>
+                <a:gridCol w="2146300"/>
+                <a:gridCol w="1689100"/>
+                <a:gridCol w="1689100"/>
+                <a:gridCol w="1689100"/>
+                <a:gridCol w="1028700"/>
+              </a:tblGrid>
+              <a:tr h="0">
+                <a:tc>
+                  <a:txBody>
+                    <a:bodyPr/>
+                    <a:lstStyle/>
+                    <a:p>
+                      <a:pPr lvl="0" indent="0" marL="0">
+                        <a:buNone/>
+                      </a:pPr>
+                      <a:r>
+                        <a:rPr b="1"/>
+                        <a:t>Observation Point</a:t>
+                      </a:r>
+                    </a:p>
+                  </a:txBody>
+                  <a:tcPr/>
+                </a:tc>
+                <a:tc>
+                  <a:txBody>
+                    <a:bodyPr/>
+                    <a:lstStyle/>
+                    <a:p>
+                      <a:pPr lvl="0" indent="0" marL="0">
+                        <a:buNone/>
+                      </a:pPr>
+                      <a:r>
+                        <a:rPr b="1"/>
+                        <a:t>Respondent 1</a:t>
+                      </a:r>
+                    </a:p>
+                  </a:txBody>
+                  <a:tcPr/>
+                </a:tc>
+                <a:tc>
+                  <a:txBody>
+                    <a:bodyPr/>
+                    <a:lstStyle/>
+                    <a:p>
+                      <a:pPr lvl="0" indent="0" marL="0">
+                        <a:buNone/>
+                      </a:pPr>
+                      <a:r>
+                        <a:rPr b="1"/>
+                        <a:t>Respondent 2</a:t>
+                      </a:r>
+                    </a:p>
+                  </a:txBody>
+                  <a:tcPr/>
+                </a:tc>
+                <a:tc>
+                  <a:txBody>
+                    <a:bodyPr/>
+                    <a:lstStyle/>
+                    <a:p>
+                      <a:pPr lvl="0" indent="0" marL="0">
+                        <a:buNone/>
+                      </a:pPr>
+                      <a:r>
+                        <a:rPr b="1"/>
+                        <a:t>Respondent 3</a:t>
+                      </a:r>
+                    </a:p>
+                  </a:txBody>
+                  <a:tcPr/>
+                </a:tc>
+                <a:tc>
+                  <a:txBody>
+                    <a:bodyPr/>
+                    <a:lstStyle/>
+                    <a:p>
+                      <a:pPr lvl="0" indent="0" marL="0">
+                        <a:buNone/>
+                      </a:pPr>
+                      <a:r>
+                        <a:rPr b="1"/>
+                        <a:t>Notes</a:t>
+                      </a:r>
+                    </a:p>
+                  </a:txBody>
+                  <a:tcPr/>
+                </a:tc>
+              </a:tr>
+              <a:tr h="0">
+                <a:tc>
+                  <a:txBody>
+                    <a:bodyPr/>
+                    <a:lstStyle/>
+                    <a:p>
+                      <a:pPr lvl="0" indent="0" marL="0">
+                        <a:buNone/>
+                      </a:pPr>
+                      <a:r>
+                        <a:rPr/>
+                        <a:t>Time taken to complete</a:t>
+                      </a:r>
+                    </a:p>
+                  </a:txBody>
+                </a:tc>
+                <a:tc>
+                  <a:txBody>
+                    <a:bodyPr/>
+                    <a:lstStyle/>
+                    <a:p>
+                      <a:endParaRPr/>
+                    </a:p>
+                  </a:txBody>
+                </a:tc>
+                <a:tc>
+                  <a:txBody>
+                    <a:bodyPr/>
+                    <a:lstStyle/>
+                    <a:p>
+                      <a:endParaRPr/>
+                    </a:p>
+                  </a:txBody>
+                </a:tc>
+                <a:tc>
+                  <a:txBody>
+                    <a:bodyPr/>
+                    <a:lstStyle/>
+                    <a:p>
+                      <a:endParaRPr/>
+                    </a:p>
+                  </a:txBody>
+                </a:tc>
+                <a:tc>
+                  <a:txBody>
+                    <a:bodyPr/>
+                    <a:lstStyle/>
+                    <a:p>
+                      <a:endParaRPr/>
+                    </a:p>
+                  </a:txBody>
+                </a:tc>
+              </a:tr>
+              <a:tr h="0">
+                <a:tc>
+                  <a:txBody>
+                    <a:bodyPr/>
+                    <a:lstStyle/>
+                    <a:p>
+                      <a:pPr lvl="0" indent="0" marL="0">
+                        <a:buNone/>
+                      </a:pPr>
+                      <a:r>
+                        <a:rPr/>
+                        <a:t>Hesitation on specific questions</a:t>
+                      </a:r>
+                    </a:p>
+                  </a:txBody>
+                </a:tc>
+                <a:tc>
+                  <a:txBody>
+                    <a:bodyPr/>
+                    <a:lstStyle/>
+                    <a:p>
+                      <a:endParaRPr/>
+                    </a:p>
+                  </a:txBody>
+                </a:tc>
+                <a:tc>
+                  <a:txBody>
+                    <a:bodyPr/>
+                    <a:lstStyle/>
+                    <a:p>
+                      <a:endParaRPr/>
+                    </a:p>
+                  </a:txBody>
+                </a:tc>
+                <a:tc>
+                  <a:txBody>
+                    <a:bodyPr/>
+                    <a:lstStyle/>
+                    <a:p>
+                      <a:endParaRPr/>
+                    </a:p>
+                  </a:txBody>
+                </a:tc>
+                <a:tc>
+                  <a:txBody>
+                    <a:bodyPr/>
+                    <a:lstStyle/>
+                    <a:p>
+                      <a:endParaRPr/>
+                    </a:p>
+                  </a:txBody>
+                </a:tc>
+              </a:tr>
+              <a:tr h="0">
+                <a:tc>
+                  <a:txBody>
+                    <a:bodyPr/>
+                    <a:lstStyle/>
+                    <a:p>
+                      <a:pPr lvl="0" indent="0" marL="0">
+                        <a:buNone/>
+                      </a:pPr>
+                      <a:r>
+                        <a:rPr/>
+                        <a:t>Asked for clarification</a:t>
+                      </a:r>
+                    </a:p>
+                  </a:txBody>
+                </a:tc>
+                <a:tc>
+                  <a:txBody>
+                    <a:bodyPr/>
+                    <a:lstStyle/>
+                    <a:p>
+                      <a:endParaRPr/>
+                    </a:p>
+                  </a:txBody>
+                </a:tc>
+                <a:tc>
+                  <a:txBody>
+                    <a:bodyPr/>
+                    <a:lstStyle/>
+                    <a:p>
+                      <a:endParaRPr/>
+                    </a:p>
+                  </a:txBody>
+                </a:tc>
+                <a:tc>
+                  <a:txBody>
+                    <a:bodyPr/>
+                    <a:lstStyle/>
+                    <a:p>
+                      <a:endParaRPr/>
+                    </a:p>
+                  </a:txBody>
+                </a:tc>
+                <a:tc>
+                  <a:txBody>
+                    <a:bodyPr/>
+                    <a:lstStyle/>
+                    <a:p>
+                      <a:endParaRPr/>
+                    </a:p>
+                  </a:txBody>
+                </a:tc>
+              </a:tr>
+              <a:tr h="0">
+                <a:tc>
+                  <a:txBody>
+                    <a:bodyPr/>
+                    <a:lstStyle/>
+                    <a:p>
+                      <a:pPr lvl="0" indent="0" marL="0">
+                        <a:buNone/>
+                      </a:pPr>
+                      <a:r>
+                        <a:rPr/>
+                        <a:t>Skipped questions</a:t>
+                      </a:r>
+                    </a:p>
+                  </a:txBody>
+                </a:tc>
+                <a:tc>
+                  <a:txBody>
+                    <a:bodyPr/>
+                    <a:lstStyle/>
+                    <a:p>
+                      <a:endParaRPr/>
+                    </a:p>
+                  </a:txBody>
+                </a:tc>
+                <a:tc>
+                  <a:txBody>
+                    <a:bodyPr/>
+                    <a:lstStyle/>
+                    <a:p>
+                      <a:endParaRPr/>
+                    </a:p>
+                  </a:txBody>
+                </a:tc>
+                <a:tc>
+                  <a:txBody>
+                    <a:bodyPr/>
+                    <a:lstStyle/>
+                    <a:p>
+                      <a:endParaRPr/>
+                    </a:p>
+                  </a:txBody>
+                </a:tc>
+                <a:tc>
+                  <a:txBody>
+                    <a:bodyPr/>
+                    <a:lstStyle/>
+                    <a:p>
+                      <a:endParaRPr/>
+                    </a:p>
+                  </a:txBody>
+                </a:tc>
+              </a:tr>
+              <a:tr h="0">
+                <a:tc>
+                  <a:txBody>
+                    <a:bodyPr/>
+                    <a:lstStyle/>
+                    <a:p>
+                      <a:pPr lvl="0" indent="0" marL="0">
+                        <a:buNone/>
+                      </a:pPr>
+                      <a:r>
+                        <a:rPr/>
+                        <a:t>Facial expressions (confusion/frustration)</a:t>
+                      </a:r>
+                    </a:p>
+                  </a:txBody>
+                </a:tc>
+                <a:tc>
+                  <a:txBody>
+                    <a:bodyPr/>
+                    <a:lstStyle/>
+                    <a:p>
+                      <a:endParaRPr/>
+                    </a:p>
+                  </a:txBody>
+                </a:tc>
+                <a:tc>
+                  <a:txBody>
+                    <a:bodyPr/>
+                    <a:lstStyle/>
+                    <a:p>
+                      <a:endParaRPr/>
+                    </a:p>
+                  </a:txBody>
+                </a:tc>
+                <a:tc>
+                  <a:txBody>
+                    <a:bodyPr/>
+                    <a:lstStyle/>
+                    <a:p>
+                      <a:endParaRPr/>
+                    </a:p>
+                  </a:txBody>
+                </a:tc>
+                <a:tc>
+                  <a:txBody>
+                    <a:bodyPr/>
+                    <a:lstStyle/>
+                    <a:p>
+                      <a:endParaRPr/>
+                    </a:p>
+                  </a:txBody>
+                </a:tc>
+              </a:tr>
+              <a:tr h="0">
+                <a:tc>
+                  <a:txBody>
+                    <a:bodyPr/>
+                    <a:lstStyle/>
+                    <a:p>
+                      <a:pPr lvl="0" indent="0" marL="0">
+                        <a:buNone/>
+                      </a:pPr>
+                      <a:r>
+                        <a:rPr/>
+                        <a:t>Comments made during survey</a:t>
+                      </a:r>
+                    </a:p>
+                  </a:txBody>
+                </a:tc>
+                <a:tc>
+                  <a:txBody>
+                    <a:bodyPr/>
+                    <a:lstStyle/>
+                    <a:p>
+                      <a:endParaRPr/>
+                    </a:p>
+                  </a:txBody>
+                </a:tc>
+                <a:tc>
+                  <a:txBody>
+                    <a:bodyPr/>
+                    <a:lstStyle/>
+                    <a:p>
+                      <a:endParaRPr/>
+                    </a:p>
+                  </a:txBody>
+                </a:tc>
+                <a:tc>
+                  <a:txBody>
+                    <a:bodyPr/>
+                    <a:lstStyle/>
+                    <a:p>
+                      <a:endParaRPr/>
+                    </a:p>
+                  </a:txBody>
+                </a:tc>
+                <a:tc>
+                  <a:txBody>
+                    <a:bodyPr/>
+                    <a:lstStyle/>
+                    <a:p>
+                      <a:endParaRPr/>
+                    </a:p>
+                  </a:txBody>
+                </a:tc>
+              </a:tr>
+            </a:tbl>
+          </a:graphicData>
+        </a:graphic>
+      </p:graphicFrame>
+    </p:spTree>
+  </p:cSld>
+</p:sld>
+</file>
+
+<file path=ppt/slides/slide24.xml><?xml version="1.0" encoding="utf-8"?>
+<p:sld xmlns:a="http://schemas.openxmlformats.org/drawingml/2006/main" xmlns:r="http://schemas.openxmlformats.org/officeDocument/2006/relationships" xmlns:p="http://schemas.openxmlformats.org/presentationml/2006/main">
+  <p:cSld>
+    <p:spTree>
+      <p:nvGrpSpPr>
+        <p:cNvPr id="1" name=""/>
+        <p:cNvGrpSpPr/>
+        <p:nvPr/>
+      </p:nvGrpSpPr>
+      <p:grpSpPr>
+        <a:xfrm>
+          <a:off x="0" y="0"/>
+          <a:ext cx="0" cy="0"/>
+          <a:chOff x="0" y="0"/>
+          <a:chExt cx="0" cy="0"/>
+        </a:xfrm>
+      </p:grpSpPr>
+      <p:sp>
+        <p:nvSpPr>
+          <p:cNvPr id="2" name="Title 1"/>
+          <p:cNvSpPr>
+            <a:spLocks noGrp="1"/>
+          </p:cNvSpPr>
+          <p:nvPr>
+            <p:ph type="title"/>
+          </p:nvPr>
+        </p:nvSpPr>
+        <p:spPr>
+          <a:xfrm>
+            <a:off x="457201" y="204787"/>
+            <a:ext cx="3008313" cy="871538"/>
+          </a:xfrm>
+        </p:spPr>
+        <p:txBody>
+          <a:bodyPr/>
+          <a:lstStyle/>
+          <a:p>
+            <a:pPr lvl="0" indent="0" marL="0">
+              <a:buNone/>
+            </a:pPr>
+            <a:r>
+              <a:rPr/>
+              <a:t>Pilot Study Summary Report</a:t>
+            </a:r>
+          </a:p>
+        </p:txBody>
+      </p:sp>
+      <p:sp>
+        <p:nvSpPr>
+          <p:cNvPr id="4" name="Text Placeholder 3"/>
+          <p:cNvSpPr>
+            <a:spLocks noGrp="1"/>
+          </p:cNvSpPr>
+          <p:nvPr>
+            <p:ph idx="2" sz="half" type="body"/>
+          </p:nvPr>
+        </p:nvSpPr>
+        <p:spPr/>
+        <p:txBody>
+          <a:bodyPr/>
+          <a:lstStyle/>
+          <a:p>
+            <a:pPr lvl="0" indent="0" marL="0">
+              <a:buNone/>
+            </a:pPr>
+            <a:r>
+              <a:rPr b="1"/>
+              <a:t>Date of Pilot:</a:t>
+            </a:r>
+            <a:r>
+              <a:rPr/>
+              <a:t> ____________________ </a:t>
+            </a:r>
+            <a:r>
+              <a:rPr b="1"/>
+              <a:t>Sample Size:</a:t>
+            </a:r>
+            <a:r>
+              <a:rPr/>
+              <a:t> _____ respondents </a:t>
+            </a:r>
+            <a:r>
+              <a:rPr b="1"/>
+              <a:t>Average Completion Time:</a:t>
+            </a:r>
+            <a:r>
+              <a:rPr/>
+              <a:t> _____ minutes</a:t>
+            </a:r>
+          </a:p>
+        </p:txBody>
+      </p:sp>
+      <p:graphicFrame>
+        <p:nvGraphicFramePr>
+          <p:cNvPr id="6" name="Content Placeholder 5"/>
+          <p:cNvGraphicFramePr>
+            <a:graphicFrameLocks noGrp="1"/>
+          </p:cNvGraphicFramePr>
+          <p:nvPr>
+            <p:ph idx="1"/>
+          </p:nvPr>
+        </p:nvGraphicFramePr>
+        <p:xfrm>
+          <a:off x="3568700" y="203200"/>
+          <a:ext cx="5105400" cy="4381500"/>
+        </p:xfrm>
+        <a:graphic>
+          <a:graphicData uri="http://schemas.openxmlformats.org/drawingml/2006/table">
+            <a:tbl>
+              <a:tblPr firstRow="1" bandRow="1">
+                <a:tableStyleId>{5C22544A-7EE6-4342-B048-85BDC9FD1C3A}</a:tableStyleId>
+              </a:tblPr>
+              <a:tblGrid>
+                <a:gridCol w="1701800"/>
+                <a:gridCol w="1701800"/>
+                <a:gridCol w="1701800"/>
+              </a:tblGrid>
+              <a:tr h="0">
+                <a:tc>
+                  <a:txBody>
+                    <a:bodyPr/>
+                    <a:lstStyle/>
+                    <a:p>
+                      <a:pPr lvl="0" indent="0" marL="0">
+                        <a:buNone/>
+                      </a:pPr>
+                      <a:r>
+                        <a:rPr b="1"/>
+                        <a:t>Metric</a:t>
+                      </a:r>
+                    </a:p>
+                  </a:txBody>
+                  <a:tcPr/>
+                </a:tc>
+                <a:tc>
+                  <a:txBody>
+                    <a:bodyPr/>
+                    <a:lstStyle/>
+                    <a:p>
+                      <a:pPr lvl="0" indent="0" marL="0">
+                        <a:buNone/>
+                      </a:pPr>
+                      <a:r>
+                        <a:rPr b="1"/>
+                        <a:t>Finding</a:t>
+                      </a:r>
+                    </a:p>
+                  </a:txBody>
+                  <a:tcPr/>
+                </a:tc>
+                <a:tc>
+                  <a:txBody>
+                    <a:bodyPr/>
+                    <a:lstStyle/>
+                    <a:p>
+                      <a:pPr lvl="0" indent="0" marL="0">
+                        <a:buNone/>
+                      </a:pPr>
+                      <a:r>
+                        <a:rPr b="1"/>
+                        <a:t>Action Required</a:t>
+                      </a:r>
+                    </a:p>
+                  </a:txBody>
+                  <a:tcPr/>
+                </a:tc>
+              </a:tr>
+              <a:tr h="0">
+                <a:tc>
+                  <a:txBody>
+                    <a:bodyPr/>
+                    <a:lstStyle/>
+                    <a:p>
+                      <a:pPr lvl="0" indent="0" marL="0">
+                        <a:buNone/>
+                      </a:pPr>
+                      <a:r>
+                        <a:rPr/>
+                        <a:t>Question Clarity</a:t>
+                      </a:r>
+                    </a:p>
+                  </a:txBody>
+                </a:tc>
+                <a:tc>
+                  <a:txBody>
+                    <a:bodyPr/>
+                    <a:lstStyle/>
+                    <a:p>
+                      <a:endParaRPr/>
+                    </a:p>
+                  </a:txBody>
+                </a:tc>
+                <a:tc>
+                  <a:txBody>
+                    <a:bodyPr/>
+                    <a:lstStyle/>
+                    <a:p>
+                      <a:endParaRPr/>
+                    </a:p>
+                  </a:txBody>
+                </a:tc>
+              </a:tr>
+              <a:tr h="0">
+                <a:tc>
+                  <a:txBody>
+                    <a:bodyPr/>
+                    <a:lstStyle/>
+                    <a:p>
+                      <a:pPr lvl="0" indent="0" marL="0">
+                        <a:buNone/>
+                      </a:pPr>
+                      <a:r>
+                        <a:rPr/>
+                        <a:t>Language/Meaning</a:t>
+                      </a:r>
+                    </a:p>
+                  </a:txBody>
+                </a:tc>
+                <a:tc>
+                  <a:txBody>
+                    <a:bodyPr/>
+                    <a:lstStyle/>
+                    <a:p>
+                      <a:endParaRPr/>
+                    </a:p>
+                  </a:txBody>
+                </a:tc>
+                <a:tc>
+                  <a:txBody>
+                    <a:bodyPr/>
+                    <a:lstStyle/>
+                    <a:p>
+                      <a:endParaRPr/>
+                    </a:p>
+                  </a:txBody>
+                </a:tc>
+              </a:tr>
+              <a:tr h="0">
+                <a:tc>
+                  <a:txBody>
+                    <a:bodyPr/>
+                    <a:lstStyle/>
+                    <a:p>
+                      <a:pPr lvl="0" indent="0" marL="0">
+                        <a:buNone/>
+                      </a:pPr>
+                      <a:r>
+                        <a:rPr/>
+                        <a:t>Technical Issues</a:t>
+                      </a:r>
+                    </a:p>
+                  </a:txBody>
+                </a:tc>
+                <a:tc>
+                  <a:txBody>
+                    <a:bodyPr/>
+                    <a:lstStyle/>
+                    <a:p>
+                      <a:endParaRPr/>
+                    </a:p>
+                  </a:txBody>
+                </a:tc>
+                <a:tc>
+                  <a:txBody>
+                    <a:bodyPr/>
+                    <a:lstStyle/>
+                    <a:p>
+                      <a:endParaRPr/>
+                    </a:p>
+                  </a:txBody>
+                </a:tc>
+              </a:tr>
+              <a:tr h="0">
+                <a:tc>
+                  <a:txBody>
+                    <a:bodyPr/>
+                    <a:lstStyle/>
+                    <a:p>
+                      <a:pPr lvl="0" indent="0" marL="0">
+                        <a:buNone/>
+                      </a:pPr>
+                      <a:r>
+                        <a:rPr/>
+                        <a:t>Missing Topics</a:t>
+                      </a:r>
+                    </a:p>
+                  </a:txBody>
+                </a:tc>
+                <a:tc>
+                  <a:txBody>
+                    <a:bodyPr/>
+                    <a:lstStyle/>
+                    <a:p>
+                      <a:endParaRPr/>
+                    </a:p>
+                  </a:txBody>
+                </a:tc>
+                <a:tc>
+                  <a:txBody>
+                    <a:bodyPr/>
+                    <a:lstStyle/>
+                    <a:p>
+                      <a:endParaRPr/>
+                    </a:p>
+                  </a:txBody>
+                </a:tc>
+              </a:tr>
+              <a:tr h="0">
+                <a:tc>
+                  <a:txBody>
+                    <a:bodyPr/>
+                    <a:lstStyle/>
+                    <a:p>
+                      <a:pPr lvl="0" indent="0" marL="0">
+                        <a:buNone/>
+                      </a:pPr>
+                      <a:r>
+                        <a:rPr/>
+                        <a:t>Redundant Questions</a:t>
+                      </a:r>
+                    </a:p>
+                  </a:txBody>
+                </a:tc>
+                <a:tc>
+                  <a:txBody>
+                    <a:bodyPr/>
+                    <a:lstStyle/>
+                    <a:p>
+                      <a:endParaRPr/>
+                    </a:p>
+                  </a:txBody>
+                </a:tc>
+                <a:tc>
+                  <a:txBody>
+                    <a:bodyPr/>
+                    <a:lstStyle/>
+                    <a:p>
+                      <a:endParaRPr/>
+                    </a:p>
+                  </a:txBody>
+                </a:tc>
+              </a:tr>
+              <a:tr h="0">
+                <a:tc>
+                  <a:txBody>
+                    <a:bodyPr/>
+                    <a:lstStyle/>
+                    <a:p>
+                      <a:pPr lvl="0" indent="0" marL="0">
+                        <a:buNone/>
+                      </a:pPr>
+                      <a:r>
+                        <a:rPr/>
+                        <a:t>Survey Length</a:t>
+                      </a:r>
+                    </a:p>
+                  </a:txBody>
+                </a:tc>
+                <a:tc>
+                  <a:txBody>
+                    <a:bodyPr/>
+                    <a:lstStyle/>
+                    <a:p>
+                      <a:endParaRPr/>
+                    </a:p>
+                  </a:txBody>
+                </a:tc>
+                <a:tc>
+                  <a:txBody>
+                    <a:bodyPr/>
+                    <a:lstStyle/>
+                    <a:p>
+                      <a:endParaRPr/>
+                    </a:p>
+                  </a:txBody>
+                </a:tc>
+              </a:tr>
+              <a:tr h="0">
+                <a:tc>
+                  <a:txBody>
+                    <a:bodyPr/>
+                    <a:lstStyle/>
+                    <a:p>
+                      <a:pPr lvl="0" indent="0" marL="0">
+                        <a:buNone/>
+                      </a:pPr>
+                      <a:r>
+                        <a:rPr/>
+                        <a:t>Response Rate</a:t>
+                      </a:r>
+                    </a:p>
+                  </a:txBody>
+                </a:tc>
+                <a:tc>
+                  <a:txBody>
+                    <a:bodyPr/>
+                    <a:lstStyle/>
+                    <a:p>
+                      <a:endParaRPr/>
+                    </a:p>
+                  </a:txBody>
+                </a:tc>
+                <a:tc>
+                  <a:txBody>
+                    <a:bodyPr/>
+                    <a:lstStyle/>
+                    <a:p>
+                      <a:endParaRPr/>
+                    </a:p>
+                  </a:txBody>
+                </a:tc>
+              </a:tr>
+            </a:tbl>
+          </a:graphicData>
+        </a:graphic>
+      </p:graphicFrame>
+    </p:spTree>
+  </p:cSld>
+</p:sld>
+</file>
+
+<file path=ppt/slides/slide25.xml><?xml version="1.0" encoding="utf-8"?>
+<p:sld xmlns:a="http://schemas.openxmlformats.org/drawingml/2006/main" xmlns:r="http://schemas.openxmlformats.org/officeDocument/2006/relationships" xmlns:p="http://schemas.openxmlformats.org/presentationml/2006/main">
+  <p:cSld>
+    <p:spTree>
+      <p:nvGrpSpPr>
+        <p:cNvPr id="1" name=""/>
+        <p:cNvGrpSpPr/>
+        <p:nvPr/>
+      </p:nvGrpSpPr>
+      <p:grpSpPr>
+        <a:xfrm>
+          <a:off x="0" y="0"/>
+          <a:ext cx="0" cy="0"/>
+          <a:chOff x="0" y="0"/>
+          <a:chExt cx="0" cy="0"/>
+        </a:xfrm>
+      </p:grpSpPr>
+      <p:sp>
+        <p:nvSpPr>
+          <p:cNvPr id="2" name="Title 1"/>
+          <p:cNvSpPr>
+            <a:spLocks noGrp="1"/>
+          </p:cNvSpPr>
+          <p:nvPr>
+            <p:ph type="title"/>
+          </p:nvPr>
+        </p:nvSpPr>
+        <p:spPr/>
+        <p:txBody>
+          <a:bodyPr/>
+          <a:lstStyle/>
+          <a:p>
+            <a:pPr lvl="0" indent="0" marL="0">
+              <a:buNone/>
+            </a:pPr>
+            <a:r>
+              <a:rPr/>
+              <a:t>Pilot Study Recommendations</a:t>
+            </a:r>
+          </a:p>
+        </p:txBody>
+      </p:sp>
+      <p:sp>
+        <p:nvSpPr>
+          <p:cNvPr id="3" name="Content Placeholder 2"/>
+          <p:cNvSpPr>
+            <a:spLocks noGrp="1"/>
+          </p:cNvSpPr>
+          <p:nvPr>
+            <p:ph idx="1"/>
+          </p:nvPr>
+        </p:nvSpPr>
+        <p:spPr/>
+        <p:txBody>
+          <a:bodyPr/>
+          <a:lstStyle/>
+          <a:p>
+            <a:pPr lvl="0" indent="0" marL="0">
+              <a:buNone/>
+            </a:pPr>
+            <a:r>
+              <a:rPr b="1"/>
+              <a:t>Recommendations for Final Survey:</a:t>
+            </a:r>
+            <a:r>
+              <a:rPr/>
+              <a:t> 1. _______________________________________________ 2. _______________________________________________ 3. _______________________________________________</a:t>
+            </a:r>
+          </a:p>
+          <a:p>
+            <a:pPr lvl="0" indent="0" marL="0">
+              <a:buNone/>
+            </a:pPr>
+            <a:r>
+              <a:rPr b="1"/>
+              <a:t>Approved by:</a:t>
+            </a:r>
+            <a:r>
+              <a:rPr/>
+              <a:t> ____________________ </a:t>
+            </a:r>
+            <a:r>
+              <a:rPr b="1"/>
+              <a:t>Date:</a:t>
+            </a:r>
+            <a:r>
+              <a:rPr/>
+              <a:t> ____________________</a:t>
+            </a:r>
+          </a:p>
+        </p:txBody>
+      </p:sp>
+    </p:spTree>
+  </p:cSld>
+</p:sld>
+</file>
+
+<file path=ppt/slides/slide26.xml><?xml version="1.0" encoding="utf-8"?>
+<p:sld xmlns:a="http://schemas.openxmlformats.org/drawingml/2006/main" xmlns:r="http://schemas.openxmlformats.org/officeDocument/2006/relationships" xmlns:p="http://schemas.openxmlformats.org/presentationml/2006/main">
+  <p:cSld>
+    <p:spTree>
+      <p:nvGrpSpPr>
+        <p:cNvPr id="1" name=""/>
+        <p:cNvGrpSpPr/>
+        <p:nvPr/>
+      </p:nvGrpSpPr>
+      <p:grpSpPr>
+        <a:xfrm>
+          <a:off x="0" y="0"/>
+          <a:ext cx="0" cy="0"/>
+          <a:chOff x="0" y="0"/>
+          <a:chExt cx="0" cy="0"/>
+        </a:xfrm>
+      </p:grpSpPr>
+      <p:sp>
+        <p:nvSpPr>
+          <p:cNvPr id="2" name="Title 1"/>
+          <p:cNvSpPr>
+            <a:spLocks noGrp="1"/>
+          </p:cNvSpPr>
+          <p:nvPr>
+            <p:ph type="title"/>
+          </p:nvPr>
+        </p:nvSpPr>
+        <p:spPr/>
+        <p:txBody>
+          <a:bodyPr/>
+          <a:lstStyle/>
+          <a:p>
+            <a:pPr lvl="0" indent="0" marL="0">
+              <a:buNone/>
+            </a:pPr>
+            <a:r>
+              <a:rPr/>
+              <a:t>Summary: How This Questionnaire Answers the 5 Questions</a:t>
+            </a:r>
+          </a:p>
+        </p:txBody>
+      </p:sp>
+      <p:graphicFrame>
+        <p:nvGraphicFramePr>
+          <p:cNvPr id="6" name="Content Placeholder 5"/>
+          <p:cNvGraphicFramePr>
+            <a:graphicFrameLocks noGrp="1"/>
+          </p:cNvGraphicFramePr>
+          <p:nvPr>
+            <p:ph idx="1"/>
+          </p:nvPr>
+        </p:nvGraphicFramePr>
+        <p:xfrm>
+          <a:off x="457200" y="1193800"/>
+          <a:ext cx="8229600" cy="3390900"/>
+        </p:xfrm>
+        <a:graphic>
+          <a:graphicData uri="http://schemas.openxmlformats.org/drawingml/2006/table">
+            <a:tbl>
+              <a:tblPr firstRow="1" bandRow="1">
+                <a:tableStyleId>{5C22544A-7EE6-4342-B048-85BDC9FD1C3A}</a:tableStyleId>
+              </a:tblPr>
+              <a:tblGrid>
+                <a:gridCol w="2425700"/>
+                <a:gridCol w="5803900"/>
+              </a:tblGrid>
+              <a:tr h="0">
+                <a:tc>
+                  <a:txBody>
+                    <a:bodyPr/>
+                    <a:lstStyle/>
+                    <a:p>
+                      <a:pPr lvl="0" indent="0" marL="0">
+                        <a:buNone/>
+                      </a:pPr>
+                      <a:r>
+                        <a:rPr b="1"/>
+                        <a:t>Step</a:t>
+                      </a:r>
+                    </a:p>
+                  </a:txBody>
+                  <a:tcPr/>
+                </a:tc>
+                <a:tc>
+                  <a:txBody>
+                    <a:bodyPr/>
+                    <a:lstStyle/>
+                    <a:p>
+                      <a:pPr lvl="0" indent="0" marL="0">
+                        <a:buNone/>
+                      </a:pPr>
+                      <a:r>
+                        <a:rPr b="1"/>
+                        <a:t>How It’s Addressed</a:t>
+                      </a:r>
+                    </a:p>
+                  </a:txBody>
+                  <a:tcPr/>
+                </a:tc>
+              </a:tr>
+              <a:tr h="0">
+                <a:tc>
+                  <a:txBody>
+                    <a:bodyPr/>
+                    <a:lstStyle/>
+                    <a:p>
+                      <a:pPr lvl="0" indent="0" marL="0">
+                        <a:buNone/>
+                      </a:pPr>
+                      <a:r>
+                        <a:rPr b="1"/>
+                        <a:t>1. Define Research Question</a:t>
+                      </a:r>
+                    </a:p>
+                  </a:txBody>
+                </a:tc>
+                <a:tc>
+                  <a:txBody>
+                    <a:bodyPr/>
+                    <a:lstStyle/>
+                    <a:p>
+                      <a:pPr lvl="0" indent="0" marL="0">
+                        <a:buNone/>
+                      </a:pPr>
+                      <a:r>
+                        <a:rPr/>
+                        <a:t>The survey is built around understanding student interest, preferences, and viability of a campus art market</a:t>
+                      </a:r>
+                    </a:p>
+                  </a:txBody>
+                </a:tc>
+              </a:tr>
+              <a:tr h="0">
+                <a:tc>
+                  <a:txBody>
+                    <a:bodyPr/>
+                    <a:lstStyle/>
+                    <a:p>
+                      <a:pPr lvl="0" indent="0" marL="0">
+                        <a:buNone/>
+                      </a:pPr>
+                      <a:r>
+                        <a:rPr b="1"/>
+                        <a:t>2. Identify Key Metrics</a:t>
+                      </a:r>
+                    </a:p>
+                  </a:txBody>
+                </a:tc>
+                <a:tc>
+                  <a:txBody>
+                    <a:bodyPr/>
+                    <a:lstStyle/>
+                    <a:p>
+                      <a:pPr lvl="0" indent="0" marL="0">
+                        <a:buNone/>
+                      </a:pPr>
+                      <a:r>
+                        <a:rPr/>
+                        <a:t>11 key metrics identified: Demographics, Interest, Products, Spending, Logistics, Experience, Availability, Pricing, Payments, Vendor Perspective, Communication</a:t>
+                      </a:r>
+                    </a:p>
+                  </a:txBody>
+                </a:tc>
+              </a:tr>
+              <a:tr h="0">
+                <a:tc>
+                  <a:txBody>
+                    <a:bodyPr/>
+                    <a:lstStyle/>
+                    <a:p>
+                      <a:pPr lvl="0" indent="0" marL="0">
+                        <a:buNone/>
+                      </a:pPr>
+                      <a:r>
+                        <a:rPr b="1"/>
+                        <a:t>3. Design Questions on Each Metric</a:t>
+                      </a:r>
+                    </a:p>
+                  </a:txBody>
+                </a:tc>
+                <a:tc>
+                  <a:txBody>
+                    <a:bodyPr/>
+                    <a:lstStyle/>
+                    <a:p>
+                      <a:pPr lvl="0" indent="0" marL="0">
+                        <a:buNone/>
+                      </a:pPr>
+                      <a:r>
+                        <a:rPr/>
+                        <a:t>25 questions designed covering all metrics with appropriate scaling formats (Likert, Rank-Order, Constant Sum, Multiple Choice, Open-ended)</a:t>
+                      </a:r>
+                    </a:p>
+                  </a:txBody>
+                </a:tc>
+              </a:tr>
+              <a:tr h="0">
+                <a:tc>
+                  <a:txBody>
+                    <a:bodyPr/>
+                    <a:lstStyle/>
+                    <a:p>
+                      <a:pPr lvl="0" indent="0" marL="0">
+                        <a:buNone/>
+                      </a:pPr>
+                      <a:r>
+                        <a:rPr b="1"/>
+                        <a:t>4. Expert Panel Evaluation</a:t>
+                      </a:r>
+                    </a:p>
+                  </a:txBody>
+                </a:tc>
+                <a:tc>
+                  <a:txBody>
+                    <a:bodyPr/>
+                    <a:lstStyle/>
+                    <a:p>
+                      <a:pPr lvl="0" indent="0" marL="0">
+                        <a:buNone/>
+                      </a:pPr>
+                      <a:r>
+                        <a:rPr/>
+                        <a:t>Expert evaluation checklist and feedback form provided for content validation</a:t>
+                      </a:r>
+                    </a:p>
+                  </a:txBody>
+                </a:tc>
+              </a:tr>
+              <a:tr h="0">
+                <a:tc>
+                  <a:txBody>
+                    <a:bodyPr/>
+                    <a:lstStyle/>
+                    <a:p>
+                      <a:pPr lvl="0" indent="0" marL="0">
+                        <a:buNone/>
+                      </a:pPr>
+                      <a:r>
+                        <a:rPr b="1"/>
+                        <a:t>5. Pilot Study and Validation</a:t>
+                      </a:r>
+                    </a:p>
+                  </a:txBody>
+                </a:tc>
+                <a:tc>
+                  <a:txBody>
+                    <a:bodyPr/>
+                    <a:lstStyle/>
+                    <a:p>
+                      <a:pPr lvl="0" indent="0" marL="0">
+                        <a:buNone/>
+                      </a:pPr>
+                      <a:r>
+                        <a:rPr/>
+                        <a:t>Pilot study feedback forms and observer checklist included for testing with 75-100 respondents</a:t>
+                      </a:r>
+                    </a:p>
+                  </a:txBody>
+                </a:tc>
+              </a:tr>
+            </a:tbl>
+          </a:graphicData>
+        </a:graphic>
+      </p:graphicFrame>
+    </p:spTree>
+  </p:cSld>
+</p:sld>
+</file>
+
+<file path=ppt/slides/slide27.xml><?xml version="1.0" encoding="utf-8"?>
+<p:sld xmlns:a="http://schemas.openxmlformats.org/drawingml/2006/main" xmlns:r="http://schemas.openxmlformats.org/officeDocument/2006/relationships" xmlns:p="http://schemas.openxmlformats.org/presentationml/2006/main">
+  <p:cSld>
+    <p:spTree>
+      <p:nvGrpSpPr>
+        <p:cNvPr id="1" name=""/>
+        <p:cNvGrpSpPr/>
+        <p:nvPr/>
+      </p:nvGrpSpPr>
+      <p:grpSpPr>
+        <a:xfrm>
+          <a:off x="0" y="0"/>
+          <a:ext cx="0" cy="0"/>
+          <a:chOff x="0" y="0"/>
+          <a:chExt cx="0" cy="0"/>
+        </a:xfrm>
+      </p:grpSpPr>
+      <p:sp>
+        <p:nvSpPr>
+          <p:cNvPr id="2" name="Title 1"/>
+          <p:cNvSpPr>
+            <a:spLocks noGrp="1"/>
+          </p:cNvSpPr>
+          <p:nvPr>
+            <p:ph type="title"/>
+          </p:nvPr>
+        </p:nvSpPr>
+        <p:spPr/>
+        <p:txBody>
+          <a:bodyPr/>
+          <a:lstStyle/>
+          <a:p>
+            <a:pPr lvl="0" indent="0" marL="0">
+              <a:buNone/>
+            </a:pPr>
+            <a:r>
+              <a:rPr/>
+              <a:t>Ready for Implementation</a:t>
+            </a:r>
+          </a:p>
+        </p:txBody>
+      </p:sp>
+      <p:sp>
+        <p:nvSpPr>
+          <p:cNvPr id="3" name="Content Placeholder 2"/>
+          <p:cNvSpPr>
+            <a:spLocks noGrp="1"/>
+          </p:cNvSpPr>
+          <p:nvPr>
+            <p:ph idx="1"/>
+          </p:nvPr>
+        </p:nvSpPr>
+        <p:spPr/>
+        <p:txBody>
+          <a:bodyPr/>
+          <a:lstStyle/>
+          <a:p>
+            <a:pPr lvl="0" indent="0" marL="0">
+              <a:spcBef>
+                <a:spcPts val="3000"/>
+              </a:spcBef>
+              <a:buNone/>
+            </a:pPr>
+            <a:r>
+              <a:rPr b="1"/>
+              <a:t>This questionnaire is now ready for:</a:t>
+            </a:r>
+          </a:p>
+          <a:p>
+            <a:pPr lvl="0" indent="-342900" marL="342900">
+              <a:buAutoNum type="arabicPeriod"/>
+            </a:pPr>
+            <a:r>
+              <a:rPr/>
+              <a:t>✅ Expert panel review</a:t>
+            </a:r>
+          </a:p>
+          <a:p>
+            <a:pPr lvl="0" indent="-342900" marL="342900">
+              <a:buAutoNum type="arabicPeriod"/>
+            </a:pPr>
+            <a:r>
+              <a:rPr/>
+              <a:t>✅ Pilot testing with 75-100 students</a:t>
+            </a:r>
+          </a:p>
+          <a:p>
+            <a:pPr lvl="0" indent="-342900" marL="342900">
+              <a:buAutoNum type="arabicPeriod"/>
+            </a:pPr>
+            <a:r>
+              <a:rPr/>
+              <a:t>✅ Revision based on feedback</a:t>
+            </a:r>
+          </a:p>
+          <a:p>
+            <a:pPr lvl="0" indent="-342900" marL="342900">
+              <a:buAutoNum type="arabicPeriod"/>
+            </a:pPr>
+            <a:r>
+              <a:rPr/>
+              <a:t>✅ Full-scale deployment</a:t>
+            </a:r>
+          </a:p>
+          <a:p>
+            <a:pPr lvl="0" indent="-342900" marL="342900">
+              <a:buAutoNum type="arabicPeriod"/>
+            </a:pPr>
+            <a:r>
+              <a:rPr/>
+              <a:t>✅ Data collection and analysis</a:t>
+            </a:r>
+          </a:p>
+        </p:txBody>
+      </p:sp>
+    </p:spTree>
+  </p:cSld>
+</p:sld>
+</file>
+
+<file path=ppt/slides/slide28.xml><?xml version="1.0" encoding="utf-8"?>
+<p:sld xmlns:a="http://schemas.openxmlformats.org/drawingml/2006/main" xmlns:r="http://schemas.openxmlformats.org/officeDocument/2006/relationships" xmlns:p="http://schemas.openxmlformats.org/presentationml/2006/main">
+  <p:cSld>
+    <p:spTree>
+      <p:nvGrpSpPr>
+        <p:cNvPr id="1" name=""/>
+        <p:cNvGrpSpPr/>
+        <p:nvPr/>
+      </p:nvGrpSpPr>
+      <p:grpSpPr>
+        <a:xfrm>
+          <a:off x="0" y="0"/>
+          <a:ext cx="0" cy="0"/>
+          <a:chOff x="0" y="0"/>
+          <a:chExt cx="0" cy="0"/>
+        </a:xfrm>
+      </p:grpSpPr>
+      <p:sp>
+        <p:nvSpPr>
+          <p:cNvPr id="2" name="Title 1"/>
+          <p:cNvSpPr>
+            <a:spLocks noGrp="1"/>
+          </p:cNvSpPr>
+          <p:nvPr>
+            <p:ph type="title"/>
+          </p:nvPr>
+        </p:nvSpPr>
+        <p:spPr/>
+        <p:txBody>
+          <a:bodyPr/>
+          <a:lstStyle/>
+          <a:p>
+            <a:pPr lvl="0" indent="0" marL="0">
+              <a:buNone/>
+            </a:pPr>
+            <a:r>
+              <a:rPr/>
+              <a:t>Thank You!</a:t>
+            </a:r>
+          </a:p>
+        </p:txBody>
+      </p:sp>
+      <p:sp>
+        <p:nvSpPr>
+          <p:cNvPr id="3" name="Content Placeholder 2"/>
+          <p:cNvSpPr>
+            <a:spLocks noGrp="1"/>
+          </p:cNvSpPr>
+          <p:nvPr>
+            <p:ph idx="1"/>
+          </p:nvPr>
+        </p:nvSpPr>
+        <p:spPr/>
+        <p:txBody>
+          <a:bodyPr/>
+          <a:lstStyle/>
+          <a:p>
+            <a:pPr lvl="0" indent="0" marL="0">
+              <a:spcBef>
+                <a:spcPts val="3000"/>
+              </a:spcBef>
+              <a:buNone/>
+            </a:pPr>
+            <a:r>
+              <a:rPr b="1"/>
+              <a:t>Campus Art Market Survey</a:t>
+            </a:r>
+          </a:p>
+          <a:p>
+            <a:pPr lvl="0" indent="0" marL="0">
+              <a:spcBef>
+                <a:spcPts val="3000"/>
+              </a:spcBef>
+              <a:buNone/>
+            </a:pPr>
+            <a:r>
+              <a:rPr b="1"/>
+              <a:t>5-Step Research Design Process</a:t>
+            </a:r>
+          </a:p>
+          <a:p>
+            <a:pPr lvl="0" indent="0" marL="0">
+              <a:buNone/>
+            </a:pPr>
+            <a:r>
+              <a:rPr b="1"/>
+              <a:t>End of Presentation</a:t>
             </a:r>
           </a:p>
         </p:txBody>
@@ -6673,11 +8221,329 @@
             </a:pPr>
             <a:r>
               <a:rPr/>
-              <a:t>Understanding Student Interest in an On-Campus Art Market</a:t>
-            </a:r>
-          </a:p>
-        </p:txBody>
-      </p:sp>
+              <a:t>STEP 2: Identify Key Metrics</a:t>
+            </a:r>
+          </a:p>
+        </p:txBody>
+      </p:sp>
+      <p:graphicFrame>
+        <p:nvGraphicFramePr>
+          <p:cNvPr id="6" name="Content Placeholder 5"/>
+          <p:cNvGraphicFramePr>
+            <a:graphicFrameLocks noGrp="1"/>
+          </p:cNvGraphicFramePr>
+          <p:nvPr>
+            <p:ph idx="1"/>
+          </p:nvPr>
+        </p:nvGraphicFramePr>
+        <p:xfrm>
+          <a:off x="457200" y="1193800"/>
+          <a:ext cx="8229600" cy="3390900"/>
+        </p:xfrm>
+        <a:graphic>
+          <a:graphicData uri="http://schemas.openxmlformats.org/drawingml/2006/table">
+            <a:tbl>
+              <a:tblPr firstRow="1" bandRow="1">
+                <a:tableStyleId>{5C22544A-7EE6-4342-B048-85BDC9FD1C3A}</a:tableStyleId>
+              </a:tblPr>
+              <a:tblGrid>
+                <a:gridCol w="4114800"/>
+                <a:gridCol w="4114800"/>
+              </a:tblGrid>
+              <a:tr h="0">
+                <a:tc>
+                  <a:txBody>
+                    <a:bodyPr/>
+                    <a:lstStyle/>
+                    <a:p>
+                      <a:pPr lvl="0" indent="0" marL="0">
+                        <a:buNone/>
+                      </a:pPr>
+                      <a:r>
+                        <a:rPr b="1"/>
+                        <a:t>Metric</a:t>
+                      </a:r>
+                    </a:p>
+                  </a:txBody>
+                  <a:tcPr/>
+                </a:tc>
+                <a:tc>
+                  <a:txBody>
+                    <a:bodyPr/>
+                    <a:lstStyle/>
+                    <a:p>
+                      <a:pPr lvl="0" indent="0" marL="0">
+                        <a:buNone/>
+                      </a:pPr>
+                      <a:r>
+                        <a:rPr b="1"/>
+                        <a:t>Description</a:t>
+                      </a:r>
+                    </a:p>
+                  </a:txBody>
+                  <a:tcPr/>
+                </a:tc>
+              </a:tr>
+              <a:tr h="0">
+                <a:tc>
+                  <a:txBody>
+                    <a:bodyPr/>
+                    <a:lstStyle/>
+                    <a:p>
+                      <a:pPr lvl="0" indent="0" marL="0">
+                        <a:buNone/>
+                      </a:pPr>
+                      <a:r>
+                        <a:rPr b="1"/>
+                        <a:t>Student Demographics</a:t>
+                      </a:r>
+                    </a:p>
+                  </a:txBody>
+                </a:tc>
+                <a:tc>
+                  <a:txBody>
+                    <a:bodyPr/>
+                    <a:lstStyle/>
+                    <a:p>
+                      <a:pPr lvl="0" indent="0" marL="0">
+                        <a:buNone/>
+                      </a:pPr>
+                      <a:r>
+                        <a:rPr/>
+                        <a:t>Academic standing, art purchasing habits</a:t>
+                      </a:r>
+                    </a:p>
+                  </a:txBody>
+                </a:tc>
+              </a:tr>
+              <a:tr h="0">
+                <a:tc>
+                  <a:txBody>
+                    <a:bodyPr/>
+                    <a:lstStyle/>
+                    <a:p>
+                      <a:pPr lvl="0" indent="0" marL="0">
+                        <a:buNone/>
+                      </a:pPr>
+                      <a:r>
+                        <a:rPr b="1"/>
+                        <a:t>Market Interest</a:t>
+                      </a:r>
+                    </a:p>
+                  </a:txBody>
+                </a:tc>
+                <a:tc>
+                  <a:txBody>
+                    <a:bodyPr/>
+                    <a:lstStyle/>
+                    <a:p>
+                      <a:pPr lvl="0" indent="0" marL="0">
+                        <a:buNone/>
+                      </a:pPr>
+                      <a:r>
+                        <a:rPr/>
+                        <a:t>Overall attitude, likelihood to attend</a:t>
+                      </a:r>
+                    </a:p>
+                  </a:txBody>
+                </a:tc>
+              </a:tr>
+              <a:tr h="0">
+                <a:tc>
+                  <a:txBody>
+                    <a:bodyPr/>
+                    <a:lstStyle/>
+                    <a:p>
+                      <a:pPr lvl="0" indent="0" marL="0">
+                        <a:buNone/>
+                      </a:pPr>
+                      <a:r>
+                        <a:rPr b="1"/>
+                        <a:t>Product Preferences</a:t>
+                      </a:r>
+                    </a:p>
+                  </a:txBody>
+                </a:tc>
+                <a:tc>
+                  <a:txBody>
+                    <a:bodyPr/>
+                    <a:lstStyle/>
+                    <a:p>
+                      <a:pPr lvl="0" indent="0" marL="0">
+                        <a:buNone/>
+                      </a:pPr>
+                      <a:r>
+                        <a:rPr/>
+                        <a:t>Types of art/products students want to buy</a:t>
+                      </a:r>
+                    </a:p>
+                  </a:txBody>
+                </a:tc>
+              </a:tr>
+              <a:tr h="0">
+                <a:tc>
+                  <a:txBody>
+                    <a:bodyPr/>
+                    <a:lstStyle/>
+                    <a:p>
+                      <a:pPr lvl="0" indent="0" marL="0">
+                        <a:buNone/>
+                      </a:pPr>
+                      <a:r>
+                        <a:rPr b="1"/>
+                        <a:t>Spending Behavior</a:t>
+                      </a:r>
+                    </a:p>
+                  </a:txBody>
+                </a:tc>
+                <a:tc>
+                  <a:txBody>
+                    <a:bodyPr/>
+                    <a:lstStyle/>
+                    <a:p>
+                      <a:pPr lvl="0" indent="0" marL="0">
+                        <a:buNone/>
+                      </a:pPr>
+                      <a:r>
+                        <a:rPr/>
+                        <a:t>How much students are willing to spend</a:t>
+                      </a:r>
+                    </a:p>
+                  </a:txBody>
+                </a:tc>
+              </a:tr>
+              <a:tr h="0">
+                <a:tc>
+                  <a:txBody>
+                    <a:bodyPr/>
+                    <a:lstStyle/>
+                    <a:p>
+                      <a:pPr lvl="0" indent="0" marL="0">
+                        <a:buNone/>
+                      </a:pPr>
+                      <a:r>
+                        <a:rPr b="1"/>
+                        <a:t>Market Logistics</a:t>
+                      </a:r>
+                    </a:p>
+                  </a:txBody>
+                </a:tc>
+                <a:tc>
+                  <a:txBody>
+                    <a:bodyPr/>
+                    <a:lstStyle/>
+                    <a:p>
+                      <a:pPr lvl="0" indent="0" marL="0">
+                        <a:buNone/>
+                      </a:pPr>
+                      <a:r>
+                        <a:rPr/>
+                        <a:t>Preferred location, timing, frequency</a:t>
+                      </a:r>
+                    </a:p>
+                  </a:txBody>
+                </a:tc>
+              </a:tr>
+              <a:tr h="0">
+                <a:tc>
+                  <a:txBody>
+                    <a:bodyPr/>
+                    <a:lstStyle/>
+                    <a:p>
+                      <a:pPr lvl="0" indent="0" marL="0">
+                        <a:buNone/>
+                      </a:pPr>
+                      <a:r>
+                        <a:rPr b="1"/>
+                        <a:t>Vendor Interest</a:t>
+                      </a:r>
+                    </a:p>
+                  </a:txBody>
+                </a:tc>
+                <a:tc>
+                  <a:txBody>
+                    <a:bodyPr/>
+                    <a:lstStyle/>
+                    <a:p>
+                      <a:pPr lvl="0" indent="0" marL="0">
+                        <a:buNone/>
+                      </a:pPr>
+                      <a:r>
+                        <a:rPr/>
+                        <a:t>Willingness of student artists to sell</a:t>
+                      </a:r>
+                    </a:p>
+                  </a:txBody>
+                </a:tc>
+              </a:tr>
+              <a:tr h="0">
+                <a:tc>
+                  <a:txBody>
+                    <a:bodyPr/>
+                    <a:lstStyle/>
+                    <a:p>
+                      <a:pPr lvl="0" indent="0" marL="0">
+                        <a:buNone/>
+                      </a:pPr>
+                      <a:r>
+                        <a:rPr b="1"/>
+                        <a:t>Experience Factors</a:t>
+                      </a:r>
+                    </a:p>
+                  </a:txBody>
+                </a:tc>
+                <a:tc>
+                  <a:txBody>
+                    <a:bodyPr/>
+                    <a:lstStyle/>
+                    <a:p>
+                      <a:pPr lvl="0" indent="0" marL="0">
+                        <a:buNone/>
+                      </a:pPr>
+                      <a:r>
+                        <a:rPr/>
+                        <a:t>Atmosphere, variety, affordability</a:t>
+                      </a:r>
+                    </a:p>
+                  </a:txBody>
+                </a:tc>
+              </a:tr>
+              <a:tr h="0">
+                <a:tc>
+                  <a:txBody>
+                    <a:bodyPr/>
+                    <a:lstStyle/>
+                    <a:p>
+                      <a:pPr lvl="0" indent="0" marL="0">
+                        <a:buNone/>
+                      </a:pPr>
+                      <a:r>
+                        <a:rPr b="1"/>
+                        <a:t>Payment Preferences</a:t>
+                      </a:r>
+                    </a:p>
+                  </a:txBody>
+                </a:tc>
+                <a:tc>
+                  <a:txBody>
+                    <a:bodyPr/>
+                    <a:lstStyle/>
+                    <a:p>
+                      <a:pPr lvl="0" indent="0" marL="0">
+                        <a:buNone/>
+                      </a:pPr>
+                      <a:r>
+                        <a:rPr/>
+                        <a:t>Cash, digital, cards</a:t>
+                      </a:r>
+                    </a:p>
+                  </a:txBody>
+                </a:tc>
+              </a:tr>
+            </a:tbl>
+          </a:graphicData>
+        </a:graphic>
+      </p:graphicFrame>
     </p:spTree>
   </p:cSld>
 </p:sld>
@@ -6720,7 +8586,7 @@
             </a:pPr>
             <a:r>
               <a:rPr/>
-              <a:t>Agenda</a:t>
+              <a:t>STEP 3: Design Questions on Each Metric</a:t>
             </a:r>
           </a:p>
         </p:txBody>
@@ -6740,52 +8606,41 @@
           <a:bodyPr/>
           <a:lstStyle/>
           <a:p>
-            <a:pPr lvl="0"/>
+            <a:pPr lvl="0" indent="0" marL="0">
+              <a:spcBef>
+                <a:spcPts val="3000"/>
+              </a:spcBef>
+              <a:buNone/>
+            </a:pPr>
+            <a:r>
+              <a:rPr b="1"/>
+              <a:t>Metric 1: Student Demographics</a:t>
+            </a:r>
+          </a:p>
+          <a:p>
+            <a:pPr lvl="0" indent="0" marL="0">
+              <a:buNone/>
+            </a:pPr>
+            <a:r>
+              <a:rPr b="1"/>
+              <a:t>Q1. What is your current academic standing?</a:t>
+            </a:r>
             <a:r>
               <a:rPr/>
-              <a:t>Research Objectives</a:t>
-            </a:r>
-          </a:p>
-          <a:p>
-            <a:pPr lvl="0"/>
+              <a:t> - [ ] Freshman - [ ] Sophomore - [ ] Junior - [ ] Senior - [ ] Graduate Student - [ ] Faculty/Staff</a:t>
+            </a:r>
+          </a:p>
+          <a:p>
+            <a:pPr lvl="0" indent="0" marL="0">
+              <a:buNone/>
+            </a:pPr>
+            <a:r>
+              <a:rPr b="1"/>
+              <a:t>Q2. How often do you purchase art, crafts, or creative goods?</a:t>
+            </a:r>
             <a:r>
               <a:rPr/>
-              <a:t>Methodology</a:t>
-            </a:r>
-          </a:p>
-          <a:p>
-            <a:pPr lvl="0"/>
-            <a:r>
-              <a:rPr/>
-              <a:t>Survey Design &amp; Structure</a:t>
-            </a:r>
-          </a:p>
-          <a:p>
-            <a:pPr lvl="0"/>
-            <a:r>
-              <a:rPr/>
-              <a:t>Question Types &amp; Scaling Formats</a:t>
-            </a:r>
-          </a:p>
-          <a:p>
-            <a:pPr lvl="0"/>
-            <a:r>
-              <a:rPr/>
-              <a:t>Data Collection Plan</a:t>
-            </a:r>
-          </a:p>
-          <a:p>
-            <a:pPr lvl="0"/>
-            <a:r>
-              <a:rPr/>
-              <a:t>Expected Outcomes</a:t>
-            </a:r>
-          </a:p>
-          <a:p>
-            <a:pPr lvl="0"/>
-            <a:r>
-              <a:rPr/>
-              <a:t>Q&amp;A</a:t>
+              <a:t> - [ ] Never - [ ] Rarely (Once or twice a year) - [ ] Occasionally (Every few months) - [ ] Frequently (Monthly or more) - [ ] Very Frequently (Weekly)</a:t>
             </a:r>
           </a:p>
         </p:txBody>
@@ -6832,7 +8687,7 @@
             </a:pPr>
             <a:r>
               <a:rPr/>
-              <a:t>Research Objectives</a:t>
+              <a:t>Metric 2: Market Interest</a:t>
             </a:r>
           </a:p>
         </p:txBody>
@@ -6857,11 +8712,11 @@
             </a:pPr>
             <a:r>
               <a:rPr b="1"/>
-              <a:t>🎯 Primary Objective:</a:t>
+              <a:t>Q3. How interested would you be in visiting a monthly “Campus Art Market” featuring student artists?</a:t>
             </a:r>
             <a:r>
               <a:rPr/>
-              <a:t> To understand student interest in a campus-based art market</a:t>
+              <a:t> - [ ] Not at all interested - [ ] Slightly interested - [ ] Moderately interested - [ ] Very interested - [ ] Extremely interested</a:t>
             </a:r>
           </a:p>
           <a:p>
@@ -6870,42 +8725,11 @@
             </a:pPr>
             <a:r>
               <a:rPr b="1"/>
-              <a:t>🔍 Specific Objectives:</a:t>
-            </a:r>
-          </a:p>
-          <a:p>
-            <a:pPr lvl="0"/>
+              <a:t>Q4. How likely are you to purchase something from a Campus Art Market?</a:t>
+            </a:r>
             <a:r>
               <a:rPr/>
-              <a:t>Assess student demographics &amp; art purchasing behavior</a:t>
-            </a:r>
-          </a:p>
-          <a:p>
-            <a:pPr lvl="0"/>
-            <a:r>
-              <a:rPr/>
-              <a:t>Measure interest levels in campus art market</a:t>
-            </a:r>
-          </a:p>
-          <a:p>
-            <a:pPr lvl="0"/>
-            <a:r>
-              <a:rPr/>
-              <a:t>Identify preferred product categories</a:t>
-            </a:r>
-          </a:p>
-          <a:p>
-            <a:pPr lvl="0"/>
-            <a:r>
-              <a:rPr/>
-              <a:t>Determine optimal market logistics</a:t>
-            </a:r>
-          </a:p>
-          <a:p>
-            <a:pPr lvl="0"/>
-            <a:r>
-              <a:rPr/>
-              <a:t>Evaluate student artist participation interest</a:t>
+              <a:t> - [ ] Very unlikely - [ ] Unlikely - [ ] Neutral - [ ] Likely - [ ] Very likely</a:t>
             </a:r>
           </a:p>
         </p:txBody>
@@ -6952,201 +8776,53 @@
             </a:pPr>
             <a:r>
               <a:rPr/>
-              <a:t>Methodology</a:t>
-            </a:r>
-          </a:p>
-        </p:txBody>
-      </p:sp>
-      <p:graphicFrame>
-        <p:nvGraphicFramePr>
-          <p:cNvPr id="6" name="Content Placeholder 5"/>
-          <p:cNvGraphicFramePr>
-            <a:graphicFrameLocks noGrp="1"/>
-          </p:cNvGraphicFramePr>
+              <a:t>Metric 3: Product Preferences</a:t>
+            </a:r>
+          </a:p>
+        </p:txBody>
+      </p:sp>
+      <p:sp>
+        <p:nvSpPr>
+          <p:cNvPr id="3" name="Content Placeholder 2"/>
+          <p:cNvSpPr>
+            <a:spLocks noGrp="1"/>
+          </p:cNvSpPr>
           <p:nvPr>
             <p:ph idx="1"/>
           </p:nvPr>
-        </p:nvGraphicFramePr>
-        <p:xfrm>
-          <a:off x="457200" y="1193800"/>
-          <a:ext cx="8229600" cy="3390900"/>
-        </p:xfrm>
-        <a:graphic>
-          <a:graphicData uri="http://schemas.openxmlformats.org/drawingml/2006/table">
-            <a:tbl>
-              <a:tblPr firstRow="1" bandRow="1">
-                <a:tableStyleId>{5C22544A-7EE6-4342-B048-85BDC9FD1C3A}</a:tableStyleId>
-              </a:tblPr>
-              <a:tblGrid>
-                <a:gridCol w="4114800"/>
-                <a:gridCol w="4114800"/>
-              </a:tblGrid>
-              <a:tr h="0">
-                <a:tc>
-                  <a:txBody>
-                    <a:bodyPr/>
-                    <a:lstStyle/>
-                    <a:p>
-                      <a:pPr lvl="0" indent="0" marL="0">
-                        <a:buNone/>
-                      </a:pPr>
-                      <a:r>
-                        <a:rPr/>
-                        <a:t>Aspect</a:t>
-                      </a:r>
-                    </a:p>
-                  </a:txBody>
-                  <a:tcPr/>
-                </a:tc>
-                <a:tc>
-                  <a:txBody>
-                    <a:bodyPr/>
-                    <a:lstStyle/>
-                    <a:p>
-                      <a:pPr lvl="0" indent="0" marL="0">
-                        <a:buNone/>
-                      </a:pPr>
-                      <a:r>
-                        <a:rPr/>
-                        <a:t>Details</a:t>
-                      </a:r>
-                    </a:p>
-                  </a:txBody>
-                  <a:tcPr/>
-                </a:tc>
-              </a:tr>
-              <a:tr h="0">
-                <a:tc>
-                  <a:txBody>
-                    <a:bodyPr/>
-                    <a:lstStyle/>
-                    <a:p>
-                      <a:pPr lvl="0" indent="0" marL="0">
-                        <a:buNone/>
-                      </a:pPr>
-                      <a:r>
-                        <a:rPr/>
-                        <a:t>Research Design</a:t>
-                      </a:r>
-                    </a:p>
-                  </a:txBody>
-                </a:tc>
-                <a:tc>
-                  <a:txBody>
-                    <a:bodyPr/>
-                    <a:lstStyle/>
-                    <a:p>
-                      <a:pPr lvl="0" indent="0" marL="0">
-                        <a:buNone/>
-                      </a:pPr>
-                      <a:r>
-                        <a:rPr/>
-                        <a:t>Quantitative Survey</a:t>
-                      </a:r>
-                    </a:p>
-                  </a:txBody>
-                </a:tc>
-              </a:tr>
-              <a:tr h="0">
-                <a:tc>
-                  <a:txBody>
-                    <a:bodyPr/>
-                    <a:lstStyle/>
-                    <a:p>
-                      <a:pPr lvl="0" indent="0" marL="0">
-                        <a:buNone/>
-                      </a:pPr>
-                      <a:r>
-                        <a:rPr/>
-                        <a:t>Target Population</a:t>
-                      </a:r>
-                    </a:p>
-                  </a:txBody>
-                </a:tc>
-                <a:tc>
-                  <a:txBody>
-                    <a:bodyPr/>
-                    <a:lstStyle/>
-                    <a:p>
-                      <a:pPr lvl="0" indent="0" marL="0">
-                        <a:buNone/>
-                      </a:pPr>
-                      <a:r>
-                        <a:rPr/>
-                        <a:t>University Students (Freshmen to Graduate)</a:t>
-                      </a:r>
-                    </a:p>
-                  </a:txBody>
-                </a:tc>
-              </a:tr>
-              <a:tr h="0">
-                <a:tc>
-                  <a:txBody>
-                    <a:bodyPr/>
-                    <a:lstStyle/>
-                    <a:p>
-                      <a:pPr lvl="0" indent="0" marL="0">
-                        <a:buNone/>
-                      </a:pPr>
-                      <a:r>
-                        <a:rPr/>
-                        <a:t>Sample Size</a:t>
-                      </a:r>
-                    </a:p>
-                  </a:txBody>
-                </a:tc>
-                <a:tc>
-                  <a:txBody>
-                    <a:bodyPr/>
-                    <a:lstStyle/>
-                    <a:p>
-                      <a:pPr lvl="0" indent="0" marL="0">
-                        <a:buNone/>
-                      </a:pPr>
-                      <a:r>
-                        <a:rPr/>
-                        <a:t>75-100 (Pilot Study)</a:t>
-                      </a:r>
-                    </a:p>
-                  </a:txBody>
-                </a:tc>
-              </a:tr>
-              <a:tr h="0">
-                <a:tc>
-                  <a:txBody>
-                    <a:bodyPr/>
-                    <a:lstStyle/>
-                    <a:p>
-                      <a:pPr lvl="0" indent="0" marL="0">
-                        <a:buNone/>
-                      </a:pPr>
-                      <a:r>
-                        <a:rPr/>
-                        <a:t>Collection Method</a:t>
-                      </a:r>
-                    </a:p>
-                  </a:txBody>
-                </a:tc>
-                <a:tc>
-                  <a:txBody>
-                    <a:bodyPr/>
-                    <a:lstStyle/>
-                    <a:p>
-                      <a:pPr lvl="0" indent="0" marL="0">
-                        <a:buNone/>
-                      </a:pPr>
-                      <a:r>
-                        <a:rPr/>
-                        <a:t>Online + Face-to-face</a:t>
-                      </a:r>
-                    </a:p>
-                  </a:txBody>
-                </a:tc>
-              </a:tr>
-            </a:tbl>
-          </a:graphicData>
-        </a:graphic>
-      </p:graphicFrame>
+        </p:nvSpPr>
+        <p:spPr/>
+        <p:txBody>
+          <a:bodyPr/>
+          <a:lstStyle/>
+          <a:p>
+            <a:pPr lvl="0" indent="0" marL="0">
+              <a:buNone/>
+            </a:pPr>
+            <a:r>
+              <a:rPr b="1"/>
+              <a:t>Q5. Which types of art/products would you be most interested in buying?</a:t>
+            </a:r>
+            <a:r>
+              <a:rPr/>
+              <a:t> (Select all that apply) - [ ] Paintings/Prints - [ ] Photography - [ ] Handmade Jewelry - [ ] Pottery/Ceramics - [ ] Sculptures - [ ] Textiles/Clothing - [ ] Stickers/Stationery - [ ] Customized Items - [ ] Digital Art - [ ] Other: _____________</a:t>
+            </a:r>
+          </a:p>
+          <a:p>
+            <a:pPr lvl="0" indent="0" marL="0">
+              <a:buNone/>
+            </a:pPr>
+            <a:r>
+              <a:rPr b="1"/>
+              <a:t>Q6. Rank the following product categories in order of your preference</a:t>
+            </a:r>
+            <a:r>
+              <a:rPr/>
+              <a:t> (1 = Most preferred, 6 = Least preferred) - ___ Original Artwork (Paintings, Prints) - ___ Wearable Art (Jewelry, Custom Clothing) - ___ Home Decor (Pottery, Sculptures) - ___ Functional Art (Stationery, Accessories) - ___ Digital Art/Prints - ___ Custom/Personalized Items</a:t>
+            </a:r>
+          </a:p>
+        </p:txBody>
+      </p:sp>
     </p:spTree>
   </p:cSld>
 </p:sld>
@@ -7179,7 +8855,12 @@
             <p:ph type="title"/>
           </p:nvPr>
         </p:nvSpPr>
-        <p:spPr/>
+        <p:spPr>
+          <a:xfrm>
+            <a:off x="457201" y="204787"/>
+            <a:ext cx="3008313" cy="871538"/>
+          </a:xfrm>
+        </p:spPr>
         <p:txBody>
           <a:bodyPr/>
           <a:lstStyle/>
@@ -7189,19 +8870,19 @@
             </a:pPr>
             <a:r>
               <a:rPr/>
-              <a:t>Survey Structure</a:t>
-            </a:r>
-          </a:p>
-        </p:txBody>
-      </p:sp>
-      <p:sp>
-        <p:nvSpPr>
-          <p:cNvPr id="3" name="Content Placeholder 2"/>
-          <p:cNvSpPr>
-            <a:spLocks noGrp="1"/>
-          </p:cNvSpPr>
-          <p:nvPr>
-            <p:ph idx="1"/>
+              <a:t>Metric 4: Spending Behavior</a:t>
+            </a:r>
+          </a:p>
+        </p:txBody>
+      </p:sp>
+      <p:sp>
+        <p:nvSpPr>
+          <p:cNvPr id="4" name="Text Placeholder 3"/>
+          <p:cNvSpPr>
+            <a:spLocks noGrp="1"/>
+          </p:cNvSpPr>
+          <p:nvPr>
+            <p:ph idx="2" sz="half" type="body"/>
           </p:nvPr>
         </p:nvSpPr>
         <p:spPr/>
@@ -7210,110 +8891,314 @@
           <a:lstStyle/>
           <a:p>
             <a:pPr lvl="0" indent="0" marL="0">
-              <a:spcBef>
-                <a:spcPts val="3000"/>
-              </a:spcBef>
               <a:buNone/>
             </a:pPr>
             <a:r>
               <a:rPr b="1"/>
-              <a:t>Section A: Demographics &amp; Art Interest</a:t>
-            </a:r>
-          </a:p>
-          <a:p>
-            <a:pPr lvl="0"/>
+              <a:t>Q7. What is the average amount you would be willing to spend per visit to a Campus Art Market?</a:t>
+            </a:r>
             <a:r>
               <a:rPr/>
-              <a:t>Academic standing</a:t>
-            </a:r>
-          </a:p>
-          <a:p>
-            <a:pPr lvl="0"/>
-            <a:r>
-              <a:rPr/>
-              <a:t>Purchase frequency</a:t>
+              <a:t> - [ ] Less than $10 - [ ] $10 - $25 - [ ] $26 - $50 - [ ] $51 - $100 - [ ] More than $100</a:t>
             </a:r>
           </a:p>
           <a:p>
             <a:pPr lvl="0" indent="0" marL="0">
-              <a:spcBef>
-                <a:spcPts val="3000"/>
-              </a:spcBef>
               <a:buNone/>
             </a:pPr>
             <a:r>
               <a:rPr b="1"/>
-              <a:t>Section B: Market Interest &amp; Preferences</a:t>
-            </a:r>
-          </a:p>
-          <a:p>
-            <a:pPr lvl="0"/>
-            <a:r>
-              <a:rPr/>
-              <a:t>Interest levels</a:t>
-            </a:r>
-          </a:p>
-          <a:p>
-            <a:pPr lvl="0"/>
-            <a:r>
-              <a:rPr/>
-              <a:t>Product preferences</a:t>
-            </a:r>
-          </a:p>
-          <a:p>
-            <a:pPr lvl="0"/>
-            <a:r>
-              <a:rPr/>
-              <a:t>Spending allocation</a:t>
-            </a:r>
-          </a:p>
-          <a:p>
-            <a:pPr lvl="0" indent="0" marL="0">
-              <a:spcBef>
-                <a:spcPts val="3000"/>
-              </a:spcBef>
-              <a:buNone/>
-            </a:pPr>
-            <a:r>
-              <a:rPr b="1"/>
-              <a:t>Section C: Market Logistics &amp; Experience</a:t>
-            </a:r>
-          </a:p>
-          <a:p>
-            <a:pPr lvl="0"/>
-            <a:r>
-              <a:rPr/>
-              <a:t>Location, timing, payments</a:t>
-            </a:r>
-          </a:p>
-          <a:p>
-            <a:pPr lvl="0" indent="0" marL="0">
-              <a:spcBef>
-                <a:spcPts val="3000"/>
-              </a:spcBef>
-              <a:buNone/>
-            </a:pPr>
-            <a:r>
-              <a:rPr b="1"/>
-              <a:t>Section D: Student Artist Perspective</a:t>
-            </a:r>
-          </a:p>
-          <a:p>
-            <a:pPr lvl="0"/>
-            <a:r>
-              <a:rPr/>
-              <a:t>Artist categories</a:t>
-            </a:r>
-          </a:p>
-          <a:p>
-            <a:pPr lvl="0"/>
-            <a:r>
-              <a:rPr/>
-              <a:t>Motivations</a:t>
-            </a:r>
-          </a:p>
-        </p:txBody>
-      </p:sp>
+              <a:t>Q8. If you had 100 points to distribute across different product categories at an art market, how would you allocate them?</a:t>
+            </a:r>
+          </a:p>
+        </p:txBody>
+      </p:sp>
+      <p:graphicFrame>
+        <p:nvGraphicFramePr>
+          <p:cNvPr id="6" name="Content Placeholder 5"/>
+          <p:cNvGraphicFramePr>
+            <a:graphicFrameLocks noGrp="1"/>
+          </p:cNvGraphicFramePr>
+          <p:nvPr>
+            <p:ph idx="1"/>
+          </p:nvPr>
+        </p:nvGraphicFramePr>
+        <p:xfrm>
+          <a:off x="3568700" y="203200"/>
+          <a:ext cx="5105400" cy="4381500"/>
+        </p:xfrm>
+        <a:graphic>
+          <a:graphicData uri="http://schemas.openxmlformats.org/drawingml/2006/table">
+            <a:tbl>
+              <a:tblPr firstRow="1" bandRow="1">
+                <a:tableStyleId>{5C22544A-7EE6-4342-B048-85BDC9FD1C3A}</a:tableStyleId>
+              </a:tblPr>
+              <a:tblGrid>
+                <a:gridCol w="2552700"/>
+                <a:gridCol w="2552700"/>
+              </a:tblGrid>
+              <a:tr h="0">
+                <a:tc>
+                  <a:txBody>
+                    <a:bodyPr/>
+                    <a:lstStyle/>
+                    <a:p>
+                      <a:pPr lvl="0" indent="0" marL="0">
+                        <a:buNone/>
+                      </a:pPr>
+                      <a:r>
+                        <a:rPr/>
+                        <a:t>Category</a:t>
+                      </a:r>
+                    </a:p>
+                  </a:txBody>
+                  <a:tcPr/>
+                </a:tc>
+                <a:tc>
+                  <a:txBody>
+                    <a:bodyPr/>
+                    <a:lstStyle/>
+                    <a:p>
+                      <a:pPr lvl="0" indent="0" marL="0">
+                        <a:buNone/>
+                      </a:pPr>
+                      <a:r>
+                        <a:rPr/>
+                        <a:t>Points (0-100)</a:t>
+                      </a:r>
+                    </a:p>
+                  </a:txBody>
+                  <a:tcPr/>
+                </a:tc>
+              </a:tr>
+              <a:tr h="0">
+                <a:tc>
+                  <a:txBody>
+                    <a:bodyPr/>
+                    <a:lstStyle/>
+                    <a:p>
+                      <a:pPr lvl="0" indent="0" marL="0">
+                        <a:buNone/>
+                      </a:pPr>
+                      <a:r>
+                        <a:rPr/>
+                        <a:t>Paintings/Prints</a:t>
+                      </a:r>
+                    </a:p>
+                  </a:txBody>
+                </a:tc>
+                <a:tc>
+                  <a:txBody>
+                    <a:bodyPr/>
+                    <a:lstStyle/>
+                    <a:p>
+                      <a:pPr lvl="0" indent="0" marL="0">
+                        <a:buNone/>
+                      </a:pPr>
+                      <a:r>
+                        <a:rPr/>
+                        <a:t>_____</a:t>
+                      </a:r>
+                    </a:p>
+                  </a:txBody>
+                </a:tc>
+              </a:tr>
+              <a:tr h="0">
+                <a:tc>
+                  <a:txBody>
+                    <a:bodyPr/>
+                    <a:lstStyle/>
+                    <a:p>
+                      <a:pPr lvl="0" indent="0" marL="0">
+                        <a:buNone/>
+                      </a:pPr>
+                      <a:r>
+                        <a:rPr/>
+                        <a:t>Jewelry/Accessories</a:t>
+                      </a:r>
+                    </a:p>
+                  </a:txBody>
+                </a:tc>
+                <a:tc>
+                  <a:txBody>
+                    <a:bodyPr/>
+                    <a:lstStyle/>
+                    <a:p>
+                      <a:pPr lvl="0" indent="0" marL="0">
+                        <a:buNone/>
+                      </a:pPr>
+                      <a:r>
+                        <a:rPr/>
+                        <a:t>_____</a:t>
+                      </a:r>
+                    </a:p>
+                  </a:txBody>
+                </a:tc>
+              </a:tr>
+              <a:tr h="0">
+                <a:tc>
+                  <a:txBody>
+                    <a:bodyPr/>
+                    <a:lstStyle/>
+                    <a:p>
+                      <a:pPr lvl="0" indent="0" marL="0">
+                        <a:buNone/>
+                      </a:pPr>
+                      <a:r>
+                        <a:rPr/>
+                        <a:t>Pottery/Crafts</a:t>
+                      </a:r>
+                    </a:p>
+                  </a:txBody>
+                </a:tc>
+                <a:tc>
+                  <a:txBody>
+                    <a:bodyPr/>
+                    <a:lstStyle/>
+                    <a:p>
+                      <a:pPr lvl="0" indent="0" marL="0">
+                        <a:buNone/>
+                      </a:pPr>
+                      <a:r>
+                        <a:rPr/>
+                        <a:t>_____</a:t>
+                      </a:r>
+                    </a:p>
+                  </a:txBody>
+                </a:tc>
+              </a:tr>
+              <a:tr h="0">
+                <a:tc>
+                  <a:txBody>
+                    <a:bodyPr/>
+                    <a:lstStyle/>
+                    <a:p>
+                      <a:pPr lvl="0" indent="0" marL="0">
+                        <a:buNone/>
+                      </a:pPr>
+                      <a:r>
+                        <a:rPr/>
+                        <a:t>Photography</a:t>
+                      </a:r>
+                    </a:p>
+                  </a:txBody>
+                </a:tc>
+                <a:tc>
+                  <a:txBody>
+                    <a:bodyPr/>
+                    <a:lstStyle/>
+                    <a:p>
+                      <a:pPr lvl="0" indent="0" marL="0">
+                        <a:buNone/>
+                      </a:pPr>
+                      <a:r>
+                        <a:rPr/>
+                        <a:t>_____</a:t>
+                      </a:r>
+                    </a:p>
+                  </a:txBody>
+                </a:tc>
+              </a:tr>
+              <a:tr h="0">
+                <a:tc>
+                  <a:txBody>
+                    <a:bodyPr/>
+                    <a:lstStyle/>
+                    <a:p>
+                      <a:pPr lvl="0" indent="0" marL="0">
+                        <a:buNone/>
+                      </a:pPr>
+                      <a:r>
+                        <a:rPr/>
+                        <a:t>Custom Items</a:t>
+                      </a:r>
+                    </a:p>
+                  </a:txBody>
+                </a:tc>
+                <a:tc>
+                  <a:txBody>
+                    <a:bodyPr/>
+                    <a:lstStyle/>
+                    <a:p>
+                      <a:pPr lvl="0" indent="0" marL="0">
+                        <a:buNone/>
+                      </a:pPr>
+                      <a:r>
+                        <a:rPr/>
+                        <a:t>_____</a:t>
+                      </a:r>
+                    </a:p>
+                  </a:txBody>
+                </a:tc>
+              </a:tr>
+              <a:tr h="0">
+                <a:tc>
+                  <a:txBody>
+                    <a:bodyPr/>
+                    <a:lstStyle/>
+                    <a:p>
+                      <a:pPr lvl="0" indent="0" marL="0">
+                        <a:buNone/>
+                      </a:pPr>
+                      <a:r>
+                        <a:rPr/>
+                        <a:t>Stationery/Stickers</a:t>
+                      </a:r>
+                    </a:p>
+                  </a:txBody>
+                </a:tc>
+                <a:tc>
+                  <a:txBody>
+                    <a:bodyPr/>
+                    <a:lstStyle/>
+                    <a:p>
+                      <a:pPr lvl="0" indent="0" marL="0">
+                        <a:buNone/>
+                      </a:pPr>
+                      <a:r>
+                        <a:rPr/>
+                        <a:t>_____</a:t>
+                      </a:r>
+                    </a:p>
+                  </a:txBody>
+                </a:tc>
+              </a:tr>
+              <a:tr h="0">
+                <a:tc>
+                  <a:txBody>
+                    <a:bodyPr/>
+                    <a:lstStyle/>
+                    <a:p>
+                      <a:pPr lvl="0" indent="0" marL="0">
+                        <a:buNone/>
+                      </a:pPr>
+                      <a:r>
+                        <a:rPr b="1"/>
+                        <a:t>TOTAL</a:t>
+                      </a:r>
+                    </a:p>
+                  </a:txBody>
+                </a:tc>
+                <a:tc>
+                  <a:txBody>
+                    <a:bodyPr/>
+                    <a:lstStyle/>
+                    <a:p>
+                      <a:pPr lvl="0" indent="0" marL="0">
+                        <a:buNone/>
+                      </a:pPr>
+                      <a:r>
+                        <a:rPr b="1"/>
+                        <a:t>100</a:t>
+                      </a:r>
+                    </a:p>
+                  </a:txBody>
+                </a:tc>
+              </a:tr>
+            </a:tbl>
+          </a:graphicData>
+        </a:graphic>
+      </p:graphicFrame>
     </p:spTree>
   </p:cSld>
 </p:sld>
@@ -7356,419 +9241,66 @@
             </a:pPr>
             <a:r>
               <a:rPr/>
-              <a:t>Scaling Formats Used</a:t>
-            </a:r>
-          </a:p>
-        </p:txBody>
-      </p:sp>
-      <p:graphicFrame>
-        <p:nvGraphicFramePr>
-          <p:cNvPr id="6" name="Content Placeholder 5"/>
-          <p:cNvGraphicFramePr>
-            <a:graphicFrameLocks noGrp="1"/>
-          </p:cNvGraphicFramePr>
+              <a:t>Metric 5: Market Logistics</a:t>
+            </a:r>
+          </a:p>
+        </p:txBody>
+      </p:sp>
+      <p:sp>
+        <p:nvSpPr>
+          <p:cNvPr id="3" name="Content Placeholder 2"/>
+          <p:cNvSpPr>
+            <a:spLocks noGrp="1"/>
+          </p:cNvSpPr>
           <p:nvPr>
             <p:ph idx="1"/>
           </p:nvPr>
-        </p:nvGraphicFramePr>
-        <p:xfrm>
-          <a:off x="457200" y="1193800"/>
-          <a:ext cx="8229600" cy="3390900"/>
-        </p:xfrm>
-        <a:graphic>
-          <a:graphicData uri="http://schemas.openxmlformats.org/drawingml/2006/table">
-            <a:tbl>
-              <a:tblPr firstRow="1" bandRow="1">
-                <a:tableStyleId>{5C22544A-7EE6-4342-B048-85BDC9FD1C3A}</a:tableStyleId>
-              </a:tblPr>
-              <a:tblGrid>
-                <a:gridCol w="2743200"/>
-                <a:gridCol w="2743200"/>
-                <a:gridCol w="2743200"/>
-              </a:tblGrid>
-              <a:tr h="0">
-                <a:tc>
-                  <a:txBody>
-                    <a:bodyPr/>
-                    <a:lstStyle/>
-                    <a:p>
-                      <a:pPr lvl="0" indent="0" marL="0">
-                        <a:buNone/>
-                      </a:pPr>
-                      <a:r>
-                        <a:rPr/>
-                        <a:t>Format</a:t>
-                      </a:r>
-                    </a:p>
-                  </a:txBody>
-                  <a:tcPr/>
-                </a:tc>
-                <a:tc>
-                  <a:txBody>
-                    <a:bodyPr/>
-                    <a:lstStyle/>
-                    <a:p>
-                      <a:pPr lvl="0" indent="0" marL="0">
-                        <a:buNone/>
-                      </a:pPr>
-                      <a:r>
-                        <a:rPr/>
-                        <a:t>Description</a:t>
-                      </a:r>
-                    </a:p>
-                  </a:txBody>
-                  <a:tcPr/>
-                </a:tc>
-                <a:tc>
-                  <a:txBody>
-                    <a:bodyPr/>
-                    <a:lstStyle/>
-                    <a:p>
-                      <a:pPr lvl="0" indent="0" marL="0">
-                        <a:buNone/>
-                      </a:pPr>
-                      <a:r>
-                        <a:rPr/>
-                        <a:t>Example</a:t>
-                      </a:r>
-                    </a:p>
-                  </a:txBody>
-                  <a:tcPr/>
-                </a:tc>
-              </a:tr>
-              <a:tr h="0">
-                <a:tc>
-                  <a:txBody>
-                    <a:bodyPr/>
-                    <a:lstStyle/>
-                    <a:p>
-                      <a:pPr lvl="0" indent="0" marL="0">
-                        <a:buNone/>
-                      </a:pPr>
-                      <a:r>
-                        <a:rPr/>
-                        <a:t>Semantic Differential</a:t>
-                      </a:r>
-                    </a:p>
-                  </a:txBody>
-                </a:tc>
-                <a:tc>
-                  <a:txBody>
-                    <a:bodyPr/>
-                    <a:lstStyle/>
-                    <a:p>
-                      <a:pPr lvl="0" indent="0" marL="0">
-                        <a:buNone/>
-                      </a:pPr>
-                      <a:r>
-                        <a:rPr/>
-                        <a:t>5-point scale</a:t>
-                      </a:r>
-                    </a:p>
-                  </a:txBody>
-                </a:tc>
-                <a:tc>
-                  <a:txBody>
-                    <a:bodyPr/>
-                    <a:lstStyle/>
-                    <a:p>
-                      <a:pPr lvl="0" indent="0" marL="0">
-                        <a:buNone/>
-                      </a:pPr>
-                      <a:r>
-                        <a:rPr/>
-                        <a:t>Uninteresting ↔ Interesting</a:t>
-                      </a:r>
-                    </a:p>
-                  </a:txBody>
-                </a:tc>
-              </a:tr>
-              <a:tr h="0">
-                <a:tc>
-                  <a:txBody>
-                    <a:bodyPr/>
-                    <a:lstStyle/>
-                    <a:p>
-                      <a:pPr lvl="0" indent="0" marL="0">
-                        <a:buNone/>
-                      </a:pPr>
-                      <a:r>
-                        <a:rPr/>
-                        <a:t>Stapel Scale</a:t>
-                      </a:r>
-                    </a:p>
-                  </a:txBody>
-                </a:tc>
-                <a:tc>
-                  <a:txBody>
-                    <a:bodyPr/>
-                    <a:lstStyle/>
-                    <a:p>
-                      <a:pPr lvl="0" indent="0" marL="0">
-                        <a:buNone/>
-                      </a:pPr>
-                      <a:r>
-                        <a:rPr/>
-                        <a:t>-5 to +5</a:t>
-                      </a:r>
-                    </a:p>
-                  </a:txBody>
-                </a:tc>
-                <a:tc>
-                  <a:txBody>
-                    <a:bodyPr/>
-                    <a:lstStyle/>
-                    <a:p>
-                      <a:pPr lvl="0" indent="0" marL="0">
-                        <a:buNone/>
-                      </a:pPr>
-                      <a:r>
-                        <a:rPr/>
-                        <a:t>Feature appeal</a:t>
-                      </a:r>
-                    </a:p>
-                  </a:txBody>
-                </a:tc>
-              </a:tr>
-              <a:tr h="0">
-                <a:tc>
-                  <a:txBody>
-                    <a:bodyPr/>
-                    <a:lstStyle/>
-                    <a:p>
-                      <a:pPr lvl="0" indent="0" marL="0">
-                        <a:buNone/>
-                      </a:pPr>
-                      <a:r>
-                        <a:rPr/>
-                        <a:t>Paired Comparison</a:t>
-                      </a:r>
-                    </a:p>
-                  </a:txBody>
-                </a:tc>
-                <a:tc>
-                  <a:txBody>
-                    <a:bodyPr/>
-                    <a:lstStyle/>
-                    <a:p>
-                      <a:pPr lvl="0" indent="0" marL="0">
-                        <a:buNone/>
-                      </a:pPr>
-                      <a:r>
-                        <a:rPr/>
-                        <a:t>Forced choice</a:t>
-                      </a:r>
-                    </a:p>
-                  </a:txBody>
-                </a:tc>
-                <a:tc>
-                  <a:txBody>
-                    <a:bodyPr/>
-                    <a:lstStyle/>
-                    <a:p>
-                      <a:pPr lvl="0" indent="0" marL="0">
-                        <a:buNone/>
-                      </a:pPr>
-                      <a:r>
-                        <a:rPr/>
-                        <a:t>Product preferences</a:t>
-                      </a:r>
-                    </a:p>
-                  </a:txBody>
-                </a:tc>
-              </a:tr>
-              <a:tr h="0">
-                <a:tc>
-                  <a:txBody>
-                    <a:bodyPr/>
-                    <a:lstStyle/>
-                    <a:p>
-                      <a:pPr lvl="0" indent="0" marL="0">
-                        <a:buNone/>
-                      </a:pPr>
-                      <a:r>
-                        <a:rPr/>
-                        <a:t>Constant Sum</a:t>
-                      </a:r>
-                    </a:p>
-                  </a:txBody>
-                </a:tc>
-                <a:tc>
-                  <a:txBody>
-                    <a:bodyPr/>
-                    <a:lstStyle/>
-                    <a:p>
-                      <a:pPr lvl="0" indent="0" marL="0">
-                        <a:buNone/>
-                      </a:pPr>
-                      <a:r>
-                        <a:rPr/>
-                        <a:t>Distribute points</a:t>
-                      </a:r>
-                    </a:p>
-                  </a:txBody>
-                </a:tc>
-                <a:tc>
-                  <a:txBody>
-                    <a:bodyPr/>
-                    <a:lstStyle/>
-                    <a:p>
-                      <a:pPr lvl="0" indent="0" marL="0">
-                        <a:buNone/>
-                      </a:pPr>
-                      <a:r>
-                        <a:rPr/>
-                        <a:t>100/50 allocation</a:t>
-                      </a:r>
-                    </a:p>
-                  </a:txBody>
-                </a:tc>
-              </a:tr>
-              <a:tr h="0">
-                <a:tc>
-                  <a:txBody>
-                    <a:bodyPr/>
-                    <a:lstStyle/>
-                    <a:p>
-                      <a:pPr lvl="0" indent="0" marL="0">
-                        <a:buNone/>
-                      </a:pPr>
-                      <a:r>
-                        <a:rPr/>
-                        <a:t>Rank-Order</a:t>
-                      </a:r>
-                    </a:p>
-                  </a:txBody>
-                </a:tc>
-                <a:tc>
-                  <a:txBody>
-                    <a:bodyPr/>
-                    <a:lstStyle/>
-                    <a:p>
-                      <a:pPr lvl="0" indent="0" marL="0">
-                        <a:buNone/>
-                      </a:pPr>
-                      <a:r>
-                        <a:rPr/>
-                        <a:t>1-5 ranking</a:t>
-                      </a:r>
-                    </a:p>
-                  </a:txBody>
-                </a:tc>
-                <a:tc>
-                  <a:txBody>
-                    <a:bodyPr/>
-                    <a:lstStyle/>
-                    <a:p>
-                      <a:pPr lvl="0" indent="0" marL="0">
-                        <a:buNone/>
-                      </a:pPr>
-                      <a:r>
-                        <a:rPr/>
-                        <a:t>Factor importance</a:t>
-                      </a:r>
-                    </a:p>
-                  </a:txBody>
-                </a:tc>
-              </a:tr>
-              <a:tr h="0">
-                <a:tc>
-                  <a:txBody>
-                    <a:bodyPr/>
-                    <a:lstStyle/>
-                    <a:p>
-                      <a:pPr lvl="0" indent="0" marL="0">
-                        <a:buNone/>
-                      </a:pPr>
-                      <a:r>
-                        <a:rPr/>
-                        <a:t>Likert Scale</a:t>
-                      </a:r>
-                    </a:p>
-                  </a:txBody>
-                </a:tc>
-                <a:tc>
-                  <a:txBody>
-                    <a:bodyPr/>
-                    <a:lstStyle/>
-                    <a:p>
-                      <a:pPr lvl="0" indent="0" marL="0">
-                        <a:buNone/>
-                      </a:pPr>
-                      <a:r>
-                        <a:rPr/>
-                        <a:t>5-point agreement</a:t>
-                      </a:r>
-                    </a:p>
-                  </a:txBody>
-                </a:tc>
-                <a:tc>
-                  <a:txBody>
-                    <a:bodyPr/>
-                    <a:lstStyle/>
-                    <a:p>
-                      <a:pPr lvl="0" indent="0" marL="0">
-                        <a:buNone/>
-                      </a:pPr>
-                      <a:r>
-                        <a:rPr/>
-                        <a:t>Statement agreement</a:t>
-                      </a:r>
-                    </a:p>
-                  </a:txBody>
-                </a:tc>
-              </a:tr>
-              <a:tr h="0">
-                <a:tc>
-                  <a:txBody>
-                    <a:bodyPr/>
-                    <a:lstStyle/>
-                    <a:p>
-                      <a:pPr lvl="0" indent="0" marL="0">
-                        <a:buNone/>
-                      </a:pPr>
-                      <a:r>
-                        <a:rPr/>
-                        <a:t>Q-Sort</a:t>
-                      </a:r>
-                    </a:p>
-                  </a:txBody>
-                </a:tc>
-                <a:tc>
-                  <a:txBody>
-                    <a:bodyPr/>
-                    <a:lstStyle/>
-                    <a:p>
-                      <a:pPr lvl="0" indent="0" marL="0">
-                        <a:buNone/>
-                      </a:pPr>
-                      <a:r>
-                        <a:rPr/>
-                        <a:t>Category sorting</a:t>
-                      </a:r>
-                    </a:p>
-                  </a:txBody>
-                </a:tc>
-                <a:tc>
-                  <a:txBody>
-                    <a:bodyPr/>
-                    <a:lstStyle/>
-                    <a:p>
-                      <a:pPr lvl="0" indent="0" marL="0">
-                        <a:buNone/>
-                      </a:pPr>
-                      <a:r>
-                        <a:rPr/>
-                        <a:t>Artist type</a:t>
-                      </a:r>
-                    </a:p>
-                  </a:txBody>
-                </a:tc>
-              </a:tr>
-            </a:tbl>
-          </a:graphicData>
-        </a:graphic>
-      </p:graphicFrame>
+        </p:nvSpPr>
+        <p:spPr/>
+        <p:txBody>
+          <a:bodyPr/>
+          <a:lstStyle/>
+          <a:p>
+            <a:pPr lvl="0" indent="0" marL="0">
+              <a:buNone/>
+            </a:pPr>
+            <a:r>
+              <a:rPr b="1"/>
+              <a:t>Q9. What would be your preferred location for a Campus Art Market?</a:t>
+            </a:r>
+            <a:r>
+              <a:rPr/>
+              <a:t> - [ ] Student Union/Student Center - [ ] Quad/Outdoor Lawn - [ ] Library Plaza - [ ] Near Dining Halls - [ ] Academic Building Atrium - [ ] Other: _____________</a:t>
+            </a:r>
+          </a:p>
+          <a:p>
+            <a:pPr lvl="0" indent="0" marL="0">
+              <a:buNone/>
+            </a:pPr>
+            <a:r>
+              <a:rPr b="1"/>
+              <a:t>Q10. What would be your preferred day and time for a Campus Art Market?</a:t>
+            </a:r>
+            <a:r>
+              <a:rPr/>
+              <a:t> (Select all that apply) - [ ] Weekday mornings (9 AM - 12 PM) - [ ] Weekday afternoons (12 PM - 5 PM) - [ ] Weekday evenings (5 PM - 9 PM) - [ ] Weekend mornings - [ ] Weekend afternoons - [ ] Weekend evenings</a:t>
+            </a:r>
+          </a:p>
+          <a:p>
+            <a:pPr lvl="0" indent="0" marL="0">
+              <a:buNone/>
+            </a:pPr>
+            <a:r>
+              <a:rPr b="1"/>
+              <a:t>Q11. How often should the Campus Art Market be held?</a:t>
+            </a:r>
+            <a:r>
+              <a:rPr/>
+              <a:t> - [ ] Weekly - [ ] Bi-weekly - [ ] Monthly - [ ] Once per semester - [ ] Special events only</a:t>
+            </a:r>
+          </a:p>
+        </p:txBody>
+      </p:sp>
     </p:spTree>
   </p:cSld>
 </p:sld>
@@ -7801,7 +9333,12 @@
             <p:ph type="title"/>
           </p:nvPr>
         </p:nvSpPr>
-        <p:spPr/>
+        <p:spPr>
+          <a:xfrm>
+            <a:off x="457201" y="204787"/>
+            <a:ext cx="3008313" cy="871538"/>
+          </a:xfrm>
+        </p:spPr>
         <p:txBody>
           <a:bodyPr/>
           <a:lstStyle/>
@@ -7811,19 +9348,19 @@
             </a:pPr>
             <a:r>
               <a:rPr/>
-              <a:t>Section A: Demographics</a:t>
-            </a:r>
-          </a:p>
-        </p:txBody>
-      </p:sp>
-      <p:sp>
-        <p:nvSpPr>
-          <p:cNvPr id="3" name="Content Placeholder 2"/>
-          <p:cNvSpPr>
-            <a:spLocks noGrp="1"/>
-          </p:cNvSpPr>
-          <p:nvPr>
-            <p:ph idx="1"/>
+              <a:t>Metric 6: Experience Factors</a:t>
+            </a:r>
+          </a:p>
+        </p:txBody>
+      </p:sp>
+      <p:sp>
+        <p:nvSpPr>
+          <p:cNvPr id="4" name="Text Placeholder 3"/>
+          <p:cNvSpPr>
+            <a:spLocks noGrp="1"/>
+          </p:cNvSpPr>
+          <p:nvPr>
+            <p:ph idx="2" sz="half" type="body"/>
           </p:nvPr>
         </p:nvSpPr>
         <p:spPr/>
@@ -7832,93 +9369,701 @@
           <a:lstStyle/>
           <a:p>
             <a:pPr lvl="0" indent="0" marL="0">
-              <a:spcBef>
-                <a:spcPts val="3000"/>
-              </a:spcBef>
               <a:buNone/>
             </a:pPr>
             <a:r>
               <a:rPr b="1"/>
-              <a:t>Q1. Academic Standing</a:t>
-            </a:r>
-          </a:p>
-          <a:p>
-            <a:pPr lvl="0"/>
+              <a:t>Q12. How important are the following factors to your market experience?</a:t>
+            </a:r>
             <a:r>
               <a:rPr/>
-              <a:t>☐ Freshman</a:t>
-            </a:r>
-          </a:p>
-          <a:p>
-            <a:pPr lvl="0"/>
-            <a:r>
-              <a:rPr/>
-              <a:t>☐ Sophomore</a:t>
-            </a:r>
-          </a:p>
-          <a:p>
-            <a:pPr lvl="0"/>
-            <a:r>
-              <a:rPr/>
-              <a:t>☐ Junior</a:t>
-            </a:r>
-          </a:p>
-          <a:p>
-            <a:pPr lvl="0"/>
-            <a:r>
-              <a:rPr/>
-              <a:t>☐ Senior</a:t>
-            </a:r>
-          </a:p>
-          <a:p>
-            <a:pPr lvl="0"/>
-            <a:r>
-              <a:rPr/>
-              <a:t>☐ Graduate Student</a:t>
-            </a:r>
-          </a:p>
-          <a:p>
-            <a:pPr lvl="0" indent="0" marL="0">
-              <a:spcBef>
-                <a:spcPts val="3000"/>
-              </a:spcBef>
-              <a:buNone/>
-            </a:pPr>
-            <a:r>
-              <a:rPr b="1"/>
-              <a:t>Q2. Purchase Frequency</a:t>
-            </a:r>
-          </a:p>
-          <a:p>
-            <a:pPr lvl="0"/>
-            <a:r>
-              <a:rPr/>
-              <a:t>☐ Never</a:t>
-            </a:r>
-          </a:p>
-          <a:p>
-            <a:pPr lvl="0"/>
-            <a:r>
-              <a:rPr/>
-              <a:t>☐ Rarely (Once or twice a year)</a:t>
-            </a:r>
-          </a:p>
-          <a:p>
-            <a:pPr lvl="0"/>
-            <a:r>
-              <a:rPr/>
-              <a:t>☐ Occasionally (Every few months)</a:t>
-            </a:r>
-          </a:p>
-          <a:p>
-            <a:pPr lvl="0"/>
-            <a:r>
-              <a:rPr/>
-              <a:t>☐ Frequently (Monthly or more)</a:t>
-            </a:r>
-          </a:p>
-        </p:txBody>
-      </p:sp>
+              <a:t> (1 = Not Important, 5 = Very Important)</a:t>
+            </a:r>
+          </a:p>
+        </p:txBody>
+      </p:sp>
+      <p:graphicFrame>
+        <p:nvGraphicFramePr>
+          <p:cNvPr id="6" name="Content Placeholder 5"/>
+          <p:cNvGraphicFramePr>
+            <a:graphicFrameLocks noGrp="1"/>
+          </p:cNvGraphicFramePr>
+          <p:nvPr>
+            <p:ph idx="1"/>
+          </p:nvPr>
+        </p:nvGraphicFramePr>
+        <p:xfrm>
+          <a:off x="3568700" y="203200"/>
+          <a:ext cx="5105400" cy="4381500"/>
+        </p:xfrm>
+        <a:graphic>
+          <a:graphicData uri="http://schemas.openxmlformats.org/drawingml/2006/table">
+            <a:tbl>
+              <a:tblPr firstRow="1" bandRow="1">
+                <a:tableStyleId>{5C22544A-7EE6-4342-B048-85BDC9FD1C3A}</a:tableStyleId>
+              </a:tblPr>
+              <a:tblGrid>
+                <a:gridCol w="850900"/>
+                <a:gridCol w="850900"/>
+                <a:gridCol w="850900"/>
+                <a:gridCol w="850900"/>
+                <a:gridCol w="850900"/>
+                <a:gridCol w="850900"/>
+              </a:tblGrid>
+              <a:tr h="0">
+                <a:tc>
+                  <a:txBody>
+                    <a:bodyPr/>
+                    <a:lstStyle/>
+                    <a:p>
+                      <a:pPr lvl="0" indent="0" marL="0">
+                        <a:buNone/>
+                      </a:pPr>
+                      <a:r>
+                        <a:rPr/>
+                        <a:t>Factor</a:t>
+                      </a:r>
+                    </a:p>
+                  </a:txBody>
+                  <a:tcPr/>
+                </a:tc>
+                <a:tc>
+                  <a:txBody>
+                    <a:bodyPr/>
+                    <a:lstStyle/>
+                    <a:p>
+                      <a:pPr lvl="0" indent="0" marL="0">
+                        <a:buNone/>
+                      </a:pPr>
+                      <a:r>
+                        <a:rPr/>
+                        <a:t>1</a:t>
+                      </a:r>
+                    </a:p>
+                  </a:txBody>
+                  <a:tcPr/>
+                </a:tc>
+                <a:tc>
+                  <a:txBody>
+                    <a:bodyPr/>
+                    <a:lstStyle/>
+                    <a:p>
+                      <a:pPr lvl="0" indent="0" marL="0">
+                        <a:buNone/>
+                      </a:pPr>
+                      <a:r>
+                        <a:rPr/>
+                        <a:t>2</a:t>
+                      </a:r>
+                    </a:p>
+                  </a:txBody>
+                  <a:tcPr/>
+                </a:tc>
+                <a:tc>
+                  <a:txBody>
+                    <a:bodyPr/>
+                    <a:lstStyle/>
+                    <a:p>
+                      <a:pPr lvl="0" indent="0" marL="0">
+                        <a:buNone/>
+                      </a:pPr>
+                      <a:r>
+                        <a:rPr/>
+                        <a:t>3</a:t>
+                      </a:r>
+                    </a:p>
+                  </a:txBody>
+                  <a:tcPr/>
+                </a:tc>
+                <a:tc>
+                  <a:txBody>
+                    <a:bodyPr/>
+                    <a:lstStyle/>
+                    <a:p>
+                      <a:pPr lvl="0" indent="0" marL="0">
+                        <a:buNone/>
+                      </a:pPr>
+                      <a:r>
+                        <a:rPr/>
+                        <a:t>4</a:t>
+                      </a:r>
+                    </a:p>
+                  </a:txBody>
+                  <a:tcPr/>
+                </a:tc>
+                <a:tc>
+                  <a:txBody>
+                    <a:bodyPr/>
+                    <a:lstStyle/>
+                    <a:p>
+                      <a:pPr lvl="0" indent="0" marL="0">
+                        <a:buNone/>
+                      </a:pPr>
+                      <a:r>
+                        <a:rPr/>
+                        <a:t>5</a:t>
+                      </a:r>
+                    </a:p>
+                  </a:txBody>
+                  <a:tcPr/>
+                </a:tc>
+              </a:tr>
+              <a:tr h="0">
+                <a:tc>
+                  <a:txBody>
+                    <a:bodyPr/>
+                    <a:lstStyle/>
+                    <a:p>
+                      <a:pPr lvl="0" indent="0" marL="0">
+                        <a:buNone/>
+                      </a:pPr>
+                      <a:r>
+                        <a:rPr/>
+                        <a:t>Clean and organized setup</a:t>
+                      </a:r>
+                    </a:p>
+                  </a:txBody>
+                </a:tc>
+                <a:tc>
+                  <a:txBody>
+                    <a:bodyPr/>
+                    <a:lstStyle/>
+                    <a:p>
+                      <a:pPr lvl="0" indent="0" marL="0">
+                        <a:buNone/>
+                      </a:pPr>
+                      <a:r>
+                        <a:rPr/>
+                        <a:t>□</a:t>
+                      </a:r>
+                    </a:p>
+                  </a:txBody>
+                </a:tc>
+                <a:tc>
+                  <a:txBody>
+                    <a:bodyPr/>
+                    <a:lstStyle/>
+                    <a:p>
+                      <a:pPr lvl="0" indent="0" marL="0">
+                        <a:buNone/>
+                      </a:pPr>
+                      <a:r>
+                        <a:rPr/>
+                        <a:t>□</a:t>
+                      </a:r>
+                    </a:p>
+                  </a:txBody>
+                </a:tc>
+                <a:tc>
+                  <a:txBody>
+                    <a:bodyPr/>
+                    <a:lstStyle/>
+                    <a:p>
+                      <a:pPr lvl="0" indent="0" marL="0">
+                        <a:buNone/>
+                      </a:pPr>
+                      <a:r>
+                        <a:rPr/>
+                        <a:t>□</a:t>
+                      </a:r>
+                    </a:p>
+                  </a:txBody>
+                </a:tc>
+                <a:tc>
+                  <a:txBody>
+                    <a:bodyPr/>
+                    <a:lstStyle/>
+                    <a:p>
+                      <a:pPr lvl="0" indent="0" marL="0">
+                        <a:buNone/>
+                      </a:pPr>
+                      <a:r>
+                        <a:rPr/>
+                        <a:t>□</a:t>
+                      </a:r>
+                    </a:p>
+                  </a:txBody>
+                </a:tc>
+                <a:tc>
+                  <a:txBody>
+                    <a:bodyPr/>
+                    <a:lstStyle/>
+                    <a:p>
+                      <a:pPr lvl="0" indent="0" marL="0">
+                        <a:buNone/>
+                      </a:pPr>
+                      <a:r>
+                        <a:rPr/>
+                        <a:t>□</a:t>
+                      </a:r>
+                    </a:p>
+                  </a:txBody>
+                </a:tc>
+              </a:tr>
+              <a:tr h="0">
+                <a:tc>
+                  <a:txBody>
+                    <a:bodyPr/>
+                    <a:lstStyle/>
+                    <a:p>
+                      <a:pPr lvl="0" indent="0" marL="0">
+                        <a:buNone/>
+                      </a:pPr>
+                      <a:r>
+                        <a:rPr/>
+                        <a:t>Good lighting to see products</a:t>
+                      </a:r>
+                    </a:p>
+                  </a:txBody>
+                </a:tc>
+                <a:tc>
+                  <a:txBody>
+                    <a:bodyPr/>
+                    <a:lstStyle/>
+                    <a:p>
+                      <a:pPr lvl="0" indent="0" marL="0">
+                        <a:buNone/>
+                      </a:pPr>
+                      <a:r>
+                        <a:rPr/>
+                        <a:t>□</a:t>
+                      </a:r>
+                    </a:p>
+                  </a:txBody>
+                </a:tc>
+                <a:tc>
+                  <a:txBody>
+                    <a:bodyPr/>
+                    <a:lstStyle/>
+                    <a:p>
+                      <a:pPr lvl="0" indent="0" marL="0">
+                        <a:buNone/>
+                      </a:pPr>
+                      <a:r>
+                        <a:rPr/>
+                        <a:t>□</a:t>
+                      </a:r>
+                    </a:p>
+                  </a:txBody>
+                </a:tc>
+                <a:tc>
+                  <a:txBody>
+                    <a:bodyPr/>
+                    <a:lstStyle/>
+                    <a:p>
+                      <a:pPr lvl="0" indent="0" marL="0">
+                        <a:buNone/>
+                      </a:pPr>
+                      <a:r>
+                        <a:rPr/>
+                        <a:t>□</a:t>
+                      </a:r>
+                    </a:p>
+                  </a:txBody>
+                </a:tc>
+                <a:tc>
+                  <a:txBody>
+                    <a:bodyPr/>
+                    <a:lstStyle/>
+                    <a:p>
+                      <a:pPr lvl="0" indent="0" marL="0">
+                        <a:buNone/>
+                      </a:pPr>
+                      <a:r>
+                        <a:rPr/>
+                        <a:t>□</a:t>
+                      </a:r>
+                    </a:p>
+                  </a:txBody>
+                </a:tc>
+                <a:tc>
+                  <a:txBody>
+                    <a:bodyPr/>
+                    <a:lstStyle/>
+                    <a:p>
+                      <a:pPr lvl="0" indent="0" marL="0">
+                        <a:buNone/>
+                      </a:pPr>
+                      <a:r>
+                        <a:rPr/>
+                        <a:t>□</a:t>
+                      </a:r>
+                    </a:p>
+                  </a:txBody>
+                </a:tc>
+              </a:tr>
+              <a:tr h="0">
+                <a:tc>
+                  <a:txBody>
+                    <a:bodyPr/>
+                    <a:lstStyle/>
+                    <a:p>
+                      <a:pPr lvl="0" indent="0" marL="0">
+                        <a:buNone/>
+                      </a:pPr>
+                      <a:r>
+                        <a:rPr/>
+                        <a:t>Music/Entertainment</a:t>
+                      </a:r>
+                    </a:p>
+                  </a:txBody>
+                </a:tc>
+                <a:tc>
+                  <a:txBody>
+                    <a:bodyPr/>
+                    <a:lstStyle/>
+                    <a:p>
+                      <a:pPr lvl="0" indent="0" marL="0">
+                        <a:buNone/>
+                      </a:pPr>
+                      <a:r>
+                        <a:rPr/>
+                        <a:t>□</a:t>
+                      </a:r>
+                    </a:p>
+                  </a:txBody>
+                </a:tc>
+                <a:tc>
+                  <a:txBody>
+                    <a:bodyPr/>
+                    <a:lstStyle/>
+                    <a:p>
+                      <a:pPr lvl="0" indent="0" marL="0">
+                        <a:buNone/>
+                      </a:pPr>
+                      <a:r>
+                        <a:rPr/>
+                        <a:t>□</a:t>
+                      </a:r>
+                    </a:p>
+                  </a:txBody>
+                </a:tc>
+                <a:tc>
+                  <a:txBody>
+                    <a:bodyPr/>
+                    <a:lstStyle/>
+                    <a:p>
+                      <a:pPr lvl="0" indent="0" marL="0">
+                        <a:buNone/>
+                      </a:pPr>
+                      <a:r>
+                        <a:rPr/>
+                        <a:t>□</a:t>
+                      </a:r>
+                    </a:p>
+                  </a:txBody>
+                </a:tc>
+                <a:tc>
+                  <a:txBody>
+                    <a:bodyPr/>
+                    <a:lstStyle/>
+                    <a:p>
+                      <a:pPr lvl="0" indent="0" marL="0">
+                        <a:buNone/>
+                      </a:pPr>
+                      <a:r>
+                        <a:rPr/>
+                        <a:t>□</a:t>
+                      </a:r>
+                    </a:p>
+                  </a:txBody>
+                </a:tc>
+                <a:tc>
+                  <a:txBody>
+                    <a:bodyPr/>
+                    <a:lstStyle/>
+                    <a:p>
+                      <a:pPr lvl="0" indent="0" marL="0">
+                        <a:buNone/>
+                      </a:pPr>
+                      <a:r>
+                        <a:rPr/>
+                        <a:t>□</a:t>
+                      </a:r>
+                    </a:p>
+                  </a:txBody>
+                </a:tc>
+              </a:tr>
+              <a:tr h="0">
+                <a:tc>
+                  <a:txBody>
+                    <a:bodyPr/>
+                    <a:lstStyle/>
+                    <a:p>
+                      <a:pPr lvl="0" indent="0" marL="0">
+                        <a:buNone/>
+                      </a:pPr>
+                      <a:r>
+                        <a:rPr/>
+                        <a:t>Enough space to browse comfortably</a:t>
+                      </a:r>
+                    </a:p>
+                  </a:txBody>
+                </a:tc>
+                <a:tc>
+                  <a:txBody>
+                    <a:bodyPr/>
+                    <a:lstStyle/>
+                    <a:p>
+                      <a:pPr lvl="0" indent="0" marL="0">
+                        <a:buNone/>
+                      </a:pPr>
+                      <a:r>
+                        <a:rPr/>
+                        <a:t>□</a:t>
+                      </a:r>
+                    </a:p>
+                  </a:txBody>
+                </a:tc>
+                <a:tc>
+                  <a:txBody>
+                    <a:bodyPr/>
+                    <a:lstStyle/>
+                    <a:p>
+                      <a:pPr lvl="0" indent="0" marL="0">
+                        <a:buNone/>
+                      </a:pPr>
+                      <a:r>
+                        <a:rPr/>
+                        <a:t>□</a:t>
+                      </a:r>
+                    </a:p>
+                  </a:txBody>
+                </a:tc>
+                <a:tc>
+                  <a:txBody>
+                    <a:bodyPr/>
+                    <a:lstStyle/>
+                    <a:p>
+                      <a:pPr lvl="0" indent="0" marL="0">
+                        <a:buNone/>
+                      </a:pPr>
+                      <a:r>
+                        <a:rPr/>
+                        <a:t>□</a:t>
+                      </a:r>
+                    </a:p>
+                  </a:txBody>
+                </a:tc>
+                <a:tc>
+                  <a:txBody>
+                    <a:bodyPr/>
+                    <a:lstStyle/>
+                    <a:p>
+                      <a:pPr lvl="0" indent="0" marL="0">
+                        <a:buNone/>
+                      </a:pPr>
+                      <a:r>
+                        <a:rPr/>
+                        <a:t>□</a:t>
+                      </a:r>
+                    </a:p>
+                  </a:txBody>
+                </a:tc>
+                <a:tc>
+                  <a:txBody>
+                    <a:bodyPr/>
+                    <a:lstStyle/>
+                    <a:p>
+                      <a:pPr lvl="0" indent="0" marL="0">
+                        <a:buNone/>
+                      </a:pPr>
+                      <a:r>
+                        <a:rPr/>
+                        <a:t>□</a:t>
+                      </a:r>
+                    </a:p>
+                  </a:txBody>
+                </a:tc>
+              </a:tr>
+              <a:tr h="0">
+                <a:tc>
+                  <a:txBody>
+                    <a:bodyPr/>
+                    <a:lstStyle/>
+                    <a:p>
+                      <a:pPr lvl="0" indent="0" marL="0">
+                        <a:buNone/>
+                      </a:pPr>
+                      <a:r>
+                        <a:rPr/>
+                        <a:t>Attractive booth displays</a:t>
+                      </a:r>
+                    </a:p>
+                  </a:txBody>
+                </a:tc>
+                <a:tc>
+                  <a:txBody>
+                    <a:bodyPr/>
+                    <a:lstStyle/>
+                    <a:p>
+                      <a:pPr lvl="0" indent="0" marL="0">
+                        <a:buNone/>
+                      </a:pPr>
+                      <a:r>
+                        <a:rPr/>
+                        <a:t>□</a:t>
+                      </a:r>
+                    </a:p>
+                  </a:txBody>
+                </a:tc>
+                <a:tc>
+                  <a:txBody>
+                    <a:bodyPr/>
+                    <a:lstStyle/>
+                    <a:p>
+                      <a:pPr lvl="0" indent="0" marL="0">
+                        <a:buNone/>
+                      </a:pPr>
+                      <a:r>
+                        <a:rPr/>
+                        <a:t>□</a:t>
+                      </a:r>
+                    </a:p>
+                  </a:txBody>
+                </a:tc>
+                <a:tc>
+                  <a:txBody>
+                    <a:bodyPr/>
+                    <a:lstStyle/>
+                    <a:p>
+                      <a:pPr lvl="0" indent="0" marL="0">
+                        <a:buNone/>
+                      </a:pPr>
+                      <a:r>
+                        <a:rPr/>
+                        <a:t>□</a:t>
+                      </a:r>
+                    </a:p>
+                  </a:txBody>
+                </a:tc>
+                <a:tc>
+                  <a:txBody>
+                    <a:bodyPr/>
+                    <a:lstStyle/>
+                    <a:p>
+                      <a:pPr lvl="0" indent="0" marL="0">
+                        <a:buNone/>
+                      </a:pPr>
+                      <a:r>
+                        <a:rPr/>
+                        <a:t>□</a:t>
+                      </a:r>
+                    </a:p>
+                  </a:txBody>
+                </a:tc>
+                <a:tc>
+                  <a:txBody>
+                    <a:bodyPr/>
+                    <a:lstStyle/>
+                    <a:p>
+                      <a:pPr lvl="0" indent="0" marL="0">
+                        <a:buNone/>
+                      </a:pPr>
+                      <a:r>
+                        <a:rPr/>
+                        <a:t>□</a:t>
+                      </a:r>
+                    </a:p>
+                  </a:txBody>
+                </a:tc>
+              </a:tr>
+              <a:tr h="0">
+                <a:tc>
+                  <a:txBody>
+                    <a:bodyPr/>
+                    <a:lstStyle/>
+                    <a:p>
+                      <a:pPr lvl="0" indent="0" marL="0">
+                        <a:buNone/>
+                      </a:pPr>
+                      <a:r>
+                        <a:rPr/>
+                        <a:t>Ability to interact with artists</a:t>
+                      </a:r>
+                    </a:p>
+                  </a:txBody>
+                </a:tc>
+                <a:tc>
+                  <a:txBody>
+                    <a:bodyPr/>
+                    <a:lstStyle/>
+                    <a:p>
+                      <a:pPr lvl="0" indent="0" marL="0">
+                        <a:buNone/>
+                      </a:pPr>
+                      <a:r>
+                        <a:rPr/>
+                        <a:t>□</a:t>
+                      </a:r>
+                    </a:p>
+                  </a:txBody>
+                </a:tc>
+                <a:tc>
+                  <a:txBody>
+                    <a:bodyPr/>
+                    <a:lstStyle/>
+                    <a:p>
+                      <a:pPr lvl="0" indent="0" marL="0">
+                        <a:buNone/>
+                      </a:pPr>
+                      <a:r>
+                        <a:rPr/>
+                        <a:t>□</a:t>
+                      </a:r>
+                    </a:p>
+                  </a:txBody>
+                </a:tc>
+                <a:tc>
+                  <a:txBody>
+                    <a:bodyPr/>
+                    <a:lstStyle/>
+                    <a:p>
+                      <a:pPr lvl="0" indent="0" marL="0">
+                        <a:buNone/>
+                      </a:pPr>
+                      <a:r>
+                        <a:rPr/>
+                        <a:t>□</a:t>
+                      </a:r>
+                    </a:p>
+                  </a:txBody>
+                </a:tc>
+                <a:tc>
+                  <a:txBody>
+                    <a:bodyPr/>
+                    <a:lstStyle/>
+                    <a:p>
+                      <a:pPr lvl="0" indent="0" marL="0">
+                        <a:buNone/>
+                      </a:pPr>
+                      <a:r>
+                        <a:rPr/>
+                        <a:t>□</a:t>
+                      </a:r>
+                    </a:p>
+                  </a:txBody>
+                </a:tc>
+                <a:tc>
+                  <a:txBody>
+                    <a:bodyPr/>
+                    <a:lstStyle/>
+                    <a:p>
+                      <a:pPr lvl="0" indent="0" marL="0">
+                        <a:buNone/>
+                      </a:pPr>
+                      <a:r>
+                        <a:rPr/>
+                        <a:t>□</a:t>
+                      </a:r>
+                    </a:p>
+                  </a:txBody>
+                </a:tc>
+              </a:tr>
+            </a:tbl>
+          </a:graphicData>
+        </a:graphic>
+      </p:graphicFrame>
     </p:spTree>
   </p:cSld>
 </p:sld>
